--- a/D2D User Story/7_Dimensions_Erstpruefer_Themenfreigabe.pptx
+++ b/D2D User Story/7_Dimensions_Erstpruefer_Themenfreigabe.pptx
@@ -4,6 +4,9 @@
   <p:sldMasterIdLst>
     <p:sldMasterId id="2147483648" r:id="rId1"/>
   </p:sldMasterIdLst>
+  <p:notesMasterIdLst>
+    <p:notesMasterId r:id="rId10"/>
+  </p:notesMasterIdLst>
   <p:sldIdLst>
     <p:sldId id="256" r:id="rId2"/>
     <p:sldId id="257" r:id="rId3"/>
@@ -13,12 +16,8 @@
     <p:sldId id="261" r:id="rId7"/>
     <p:sldId id="262" r:id="rId8"/>
     <p:sldId id="263" r:id="rId9"/>
-    <p:sldId id="264" r:id="rId10"/>
   </p:sldIdLst>
-  <p:notesMasterIdLst>
-    <p:notesMasterId r:id="rId11"/>
-  </p:notesMasterIdLst>
-  <p:sldSz cx="9144000" cy="5143500"/>
+  <p:sldSz cx="9144000" cy="5143500" type="screen16x9"/>
   <p:notesSz cx="5143500" cy="9144000"/>
   <p:defaultTextStyle>
     <a:lvl1pPr marL="0" algn="l" defTabSz="914400" rtl="0" eaLnBrk="1" latinLnBrk="0" hangingPunct="1">
@@ -112,6 +111,11 @@
       </a:defRPr>
     </a:lvl9pPr>
   </p:defaultTextStyle>
+  <p:extLst>
+    <p:ext uri="{EFAFB233-063F-42B5-8137-9DF3F51BA10A}">
+      <p15:sldGuideLst xmlns:p15="http://schemas.microsoft.com/office/powerpoint/2012/main"/>
+    </p:ext>
+  </p:extLst>
 </p:presentation>
 </file>
 
@@ -137,234 +141,10 @@
           <a:chExt cx="0" cy="0"/>
         </a:xfrm>
       </p:grpSpPr>
-      <p:sp>
-        <p:nvSpPr>
-          <p:cNvPr id="2" name="Header Placeholder 1"/>
-          <p:cNvSpPr>
-            <a:spLocks noGrp="1"/>
-          </p:cNvSpPr>
-          <p:nvPr>
-            <p:ph type="hdr" sz="quarter"/>
-          </p:nvPr>
-        </p:nvSpPr>
-        <p:spPr>
-          <a:xfrm>
-            <a:off x="0" y="0"/>
-            <a:ext cx="2971800" cy="458788"/>
-          </a:xfrm>
-          <a:prstGeom prst="rect">
-            <a:avLst/>
-          </a:prstGeom>
-        </p:spPr>
-        <p:txBody>
-          <a:bodyPr vert="horz" lIns="91440" tIns="45720" rIns="91440" bIns="45720" rtlCol="0"/>
-          <a:lstStyle>
-            <a:lvl1pPr algn="l">
-              <a:defRPr sz="1200"/>
-            </a:lvl1pPr>
-          </a:lstStyle>
-          <a:p>
-            <a:endParaRPr lang="en-US"/>
-          </a:p>
-        </p:txBody>
-      </p:sp>
-      <p:sp>
-        <p:nvSpPr>
-          <p:cNvPr id="3" name="Date Placeholder 2"/>
-          <p:cNvSpPr>
-            <a:spLocks noGrp="1"/>
-          </p:cNvSpPr>
-          <p:nvPr>
-            <p:ph type="dt" idx="1"/>
-          </p:nvPr>
-        </p:nvSpPr>
-        <p:spPr>
-          <a:xfrm>
-            <a:off x="3884613" y="0"/>
-            <a:ext cx="2971800" cy="458788"/>
-          </a:xfrm>
-          <a:prstGeom prst="rect">
-            <a:avLst/>
-          </a:prstGeom>
-        </p:spPr>
-        <p:txBody>
-          <a:bodyPr vert="horz" lIns="91440" tIns="45720" rIns="91440" bIns="45720" rtlCol="0"/>
-          <a:lstStyle>
-            <a:lvl1pPr algn="r">
-              <a:defRPr sz="1200"/>
-            </a:lvl1pPr>
-          </a:lstStyle>
-          <a:p>
-            <a:fld id="{5282F153-3F37-0F45-9E97-73ACFA13230C}" type="datetimeFigureOut">
-              <a:rPr lang="en-US"/>
-              <a:t>7/23/19</a:t>
-            </a:fld>
-            <a:endParaRPr lang="en-US"/>
-          </a:p>
-        </p:txBody>
-      </p:sp>
-      <p:sp>
-        <p:nvSpPr>
-          <p:cNvPr id="4" name="Slide Image Placeholder 3"/>
-          <p:cNvSpPr>
-            <a:spLocks noGrp="1" noRot="1" noChangeAspect="1"/>
-          </p:cNvSpPr>
-          <p:nvPr>
-            <p:ph type="sldImg" idx="2"/>
-          </p:nvPr>
-        </p:nvSpPr>
-        <p:spPr>
-          <a:xfrm>
-            <a:off x="685800" y="1143000"/>
-            <a:ext cx="5486400" cy="3086100"/>
-          </a:xfrm>
-          <a:prstGeom prst="rect">
-            <a:avLst/>
-          </a:prstGeom>
-          <a:noFill/>
-          <a:ln w="12700">
-            <a:solidFill>
-              <a:prstClr val="black"/>
-            </a:solidFill>
-          </a:ln>
-        </p:spPr>
-        <p:txBody>
-          <a:bodyPr vert="horz" lIns="91440" tIns="45720" rIns="91440" bIns="45720" rtlCol="0" anchor="ctr"/>
-          <a:lstStyle/>
-          <a:p>
-            <a:endParaRPr lang="en-US"/>
-          </a:p>
-        </p:txBody>
-      </p:sp>
-      <p:sp>
-        <p:nvSpPr>
-          <p:cNvPr id="5" name="Notes Placeholder 4"/>
-          <p:cNvSpPr>
-            <a:spLocks noGrp="1"/>
-          </p:cNvSpPr>
-          <p:nvPr>
-            <p:ph type="body" sz="quarter" idx="3"/>
-          </p:nvPr>
-        </p:nvSpPr>
-        <p:spPr>
-          <a:xfrm>
-            <a:off x="685800" y="4400550"/>
-            <a:ext cx="5486400" cy="3600450"/>
-          </a:xfrm>
-          <a:prstGeom prst="rect">
-            <a:avLst/>
-          </a:prstGeom>
-        </p:spPr>
-        <p:txBody>
-          <a:bodyPr vert="horz" lIns="91440" tIns="45720" rIns="91440" bIns="45720" rtlCol="0"/>
-          <a:lstStyle/>
-          <a:p>
-            <a:pPr lvl="0"/>
-            <a:r>
-              <a:rPr lang="en-US"/>
-              <a:t>Click to edit Master text styles</a:t>
-            </a:r>
-          </a:p>
-          <a:p>
-            <a:pPr lvl="1"/>
-            <a:r>
-              <a:rPr lang="en-US"/>
-              <a:t>Second level</a:t>
-            </a:r>
-          </a:p>
-          <a:p>
-            <a:pPr lvl="2"/>
-            <a:r>
-              <a:rPr lang="en-US"/>
-              <a:t>Third level</a:t>
-            </a:r>
-          </a:p>
-          <a:p>
-            <a:pPr lvl="3"/>
-            <a:r>
-              <a:rPr lang="en-US"/>
-              <a:t>Fourth level</a:t>
-            </a:r>
-          </a:p>
-          <a:p>
-            <a:pPr lvl="4"/>
-            <a:r>
-              <a:rPr lang="en-US"/>
-              <a:t>Fifth level</a:t>
-            </a:r>
-          </a:p>
-        </p:txBody>
-      </p:sp>
-      <p:sp>
-        <p:nvSpPr>
-          <p:cNvPr id="6" name="Footer Placeholder 5"/>
-          <p:cNvSpPr>
-            <a:spLocks noGrp="1"/>
-          </p:cNvSpPr>
-          <p:nvPr>
-            <p:ph type="ftr" sz="quarter" idx="4"/>
-          </p:nvPr>
-        </p:nvSpPr>
-        <p:spPr>
-          <a:xfrm>
-            <a:off x="0" y="8685213"/>
-            <a:ext cx="2971800" cy="458787"/>
-          </a:xfrm>
-          <a:prstGeom prst="rect">
-            <a:avLst/>
-          </a:prstGeom>
-        </p:spPr>
-        <p:txBody>
-          <a:bodyPr vert="horz" lIns="91440" tIns="45720" rIns="91440" bIns="45720" rtlCol="0" anchor="b"/>
-          <a:lstStyle>
-            <a:lvl1pPr algn="l">
-              <a:defRPr sz="1200"/>
-            </a:lvl1pPr>
-          </a:lstStyle>
-          <a:p>
-            <a:endParaRPr lang="en-US"/>
-          </a:p>
-        </p:txBody>
-      </p:sp>
-      <p:sp>
-        <p:nvSpPr>
-          <p:cNvPr id="7" name="Slide Number Placeholder 6"/>
-          <p:cNvSpPr>
-            <a:spLocks noGrp="1"/>
-          </p:cNvSpPr>
-          <p:nvPr>
-            <p:ph type="sldNum" sz="quarter" idx="5"/>
-          </p:nvPr>
-        </p:nvSpPr>
-        <p:spPr>
-          <a:xfrm>
-            <a:off x="3884613" y="8685213"/>
-            <a:ext cx="2971800" cy="458787"/>
-          </a:xfrm>
-          <a:prstGeom prst="rect">
-            <a:avLst/>
-          </a:prstGeom>
-        </p:spPr>
-        <p:txBody>
-          <a:bodyPr vert="horz" lIns="91440" tIns="45720" rIns="91440" bIns="45720" rtlCol="0" anchor="b"/>
-          <a:lstStyle>
-            <a:lvl1pPr algn="r">
-              <a:defRPr sz="1200"/>
-            </a:lvl1pPr>
-          </a:lstStyle>
-          <a:p>
-            <a:fld id="{CE5E9CC1-C706-0F49-92D6-E571CC5EEA8F}" type="slidenum">
-              <a:rPr lang="en-US"/>
-              <a:t>‹#›</a:t>
-            </a:fld>
-            <a:endParaRPr lang="en-US"/>
-          </a:p>
-        </p:txBody>
-      </p:sp>
     </p:spTree>
     <p:extLst>
       <p:ext uri="{BB962C8B-B14F-4D97-AF65-F5344CB8AC3E}">
-        <p14:creationId xmlns:p14="http://schemas.microsoft.com/office/powerpoint/2010/main" val="1024086991"/>
+        <p14:creationId xmlns:p14="http://schemas.microsoft.com/office/powerpoint/2010/main" val="1799276975"/>
       </p:ext>
     </p:extLst>
   </p:cSld>
@@ -512,7 +292,6 @@
               <a:rPr lang="en-US" dirty="0"/>
               <a:t>Betrachtet wird genau eine User Story: US 4.1.1 aus dem Story Mapping (Activity 4 Ausgabe der Arbeit, User Task 4.1 Thema bestätigen und freigeben). Formulierung wörtlich aus dem Repository. Roter Faden: Thema aufrufen, prüfen, bestätigen, freigeben.</a:t>
             </a:r>
-            <a:endParaRPr lang="en-US" dirty="0"/>
           </a:p>
         </p:txBody>
       </p:sp>
@@ -600,7 +379,6 @@
               <a:rPr lang="en-US" dirty="0"/>
               <a:t>Persona A stammt aus der Aufgabe Personas (Aufgabe 2). Persona B ist aus dem Ist-Prozess im Zulassungsantrag abgeleitet (1. Prüfer(in) füllt den unteren Formularteil aus und sendet an das Dekanat); Name und Systemerfahrung sind fiktiv und zu validieren. Bezüge: US 1.1.1 (Thema abstimmen), US 3.2.3 (Entscheidung mitgeteilt bekommen), US 4.3.2 (über Ausgabe informiert werden).</a:t>
             </a:r>
-            <a:endParaRPr lang="en-US" dirty="0"/>
           </a:p>
         </p:txBody>
       </p:sp>
@@ -688,7 +466,6 @@
               <a:rPr lang="en-US" dirty="0"/>
               <a:t>Diese Dimension erstellt das Projektteam selbst. Hier bewusst kein UI, kein Mockup, keine Schaltflächen.</a:t>
             </a:r>
-            <a:endParaRPr lang="en-US" dirty="0"/>
           </a:p>
         </p:txBody>
       </p:sp>
@@ -776,7 +553,6 @@
               <a:rPr lang="en-US" dirty="0"/>
               <a:t>BPMN-Ausschnitt nur für US 4.1.1. Start: Antrag vom Prüfungsausschuss angenommen (US 3.2.1); Erstprüfer:in wird informiert (US 3.2.3). Der Nein-Zweig stammt aus dem Aktivitätsdiagramm des Teams (1. Prüfer:in: Änderungswunsch oder Ablehnung eintragen, danach Rückfrage, Studierende:r passt den Antrag an) und aus dem Formularfeld Bestätigung der Vorschläge des Kandidaten: Nein (siehe Anlage). Die Vorlesung nutzt für Abläufe UML-Aktivitätsdiagramme; BPMN wurde auf Wunsch des Teams gewählt. Editierbare Quelle: quellen/Action_Themenfreigabe.bpmn.</a:t>
             </a:r>
-            <a:endParaRPr lang="en-US" dirty="0"/>
           </a:p>
         </p:txBody>
       </p:sp>
@@ -864,7 +640,6 @@
               <a:rPr lang="en-US" dirty="0"/>
               <a:t>Minimales UML-Klassendiagramm nur für US 4.1.1. Attribute aus dem Zulassungsantrag: Name, Matrikelnummer, Studiengang, Studienabschluss (Bachelor/Master), gewünschter Starttermin, Thema, 1. Prüfer(in), Entscheidung des Prüfungsausschusses (angenommen/abgelehnt), Bestätigung der Vorschläge des Kandidaten, Zeitpunkt der Ausgabe. Zu validieren: Multiplizität Studierende:r zu Antrag (1..*: Bachelor und Master oder erneuter Antrag) und der Wertebereich des Antragsstatus. Editierbare Quelle: quellen/Data_Klassendiagramm_Themenfreigabe.puml.</a:t>
             </a:r>
-            <a:endParaRPr lang="en-US" dirty="0"/>
           </a:p>
         </p:txBody>
       </p:sp>
@@ -952,7 +727,6 @@
               <a:rPr lang="en-US" dirty="0"/>
               <a:t>Sechs Regeln, je eine Aussage, formuliert nach der Satzschablone der Vorlesung (Kap. 5). C1 bis C5 sind durch Repository-Artefakte belegt. C6 ist eine logische Ableitung aus der Reihenfolge der User Tasks 4.1 und 4.2 und noch zu validieren. Zu klären: Das Aktivitätsdiagramm des Teams zeigt die Freigabe der Prüfenden vor der Prüfung durch das Dekanat, das Story Mapping erst nach der Entscheidung des Prüfungsausschusses. C2 folgt dem Story Mapping und dem Zulassungsantrag.</a:t>
             </a:r>
-            <a:endParaRPr lang="en-US" dirty="0"/>
           </a:p>
         </p:txBody>
       </p:sp>
@@ -1040,7 +814,6 @@
               <a:rPr lang="en-US" dirty="0"/>
               <a:t>Systemkontext in der Soll-Perspektive nach Kap. 2 der Vorlesung: Personen, Systeme im Betrieb, Prozesse, Ereignisse, Dokumente; ergänzt um die technische Umgebung aus dem Projektbriefing (webbasiert, Desktop und Smartphone). THM-Login und E-Mail-Dienst stehen im Kontextdiagramm des Teams (Aufgabe 3); das Aktivitätsdiagramm nennt die Anmeldung mit THM-Konto. Weitere Systeme werden nicht angenommen.</a:t>
             </a:r>
-            <a:endParaRPr lang="en-US" dirty="0"/>
           </a:p>
         </p:txBody>
       </p:sp>
@@ -1128,7 +901,6 @@
               <a:rPr lang="en-US" dirty="0"/>
               <a:t>Vier Qualitätsattribute aus den Kategorien der Vorlesung (Sicherheit, Zuverlässigkeit, Benutzbarkeit, Effizienz). Bezug zum Projektbriefing: komfortabel nutzbar auf Desktop und Smartphone; Prozess für alle Beteiligten effizienter abwickeln. Es werden keine Grenzwerte erfunden.</a:t>
             </a:r>
-            <a:endParaRPr lang="en-US" dirty="0"/>
           </a:p>
         </p:txBody>
       </p:sp>
@@ -1150,94 +922,6 @@
             <a:fld id="{F7021451-1387-4CA6-816F-3879F97B5CBC}" type="slidenum">
               <a:rPr lang="en-US"/>
               <a:t>8</a:t>
-            </a:fld>
-            <a:endParaRPr lang="en-US"/>
-          </a:p>
-        </p:txBody>
-      </p:sp>
-    </p:spTree>
-    <p:extLst>
-      <p:ext uri="{BB962C8B-B14F-4D97-AF65-F5344CB8AC3E}">
-        <p14:creationId xmlns:p14="http://schemas.microsoft.com/office/powerpoint/2010/main" val="1024086991"/>
-      </p:ext>
-    </p:extLst>
-  </p:cSld>
-  <p:clrMapOvr>
-    <a:masterClrMapping/>
-  </p:clrMapOvr>
-</p:notes>
-</file>
-
-<file path=ppt/notesSlides/notesSlide9.xml><?xml version="1.0" encoding="utf-8"?>
-<p:notes xmlns:a="http://schemas.openxmlformats.org/drawingml/2006/main" xmlns:r="http://schemas.openxmlformats.org/officeDocument/2006/relationships" xmlns:p="http://schemas.openxmlformats.org/presentationml/2006/main">
-  <p:cSld>
-    <p:spTree>
-      <p:nvGrpSpPr>
-        <p:cNvPr id="1" name=""/>
-        <p:cNvGrpSpPr/>
-        <p:nvPr/>
-      </p:nvGrpSpPr>
-      <p:grpSpPr>
-        <a:xfrm>
-          <a:off x="0" y="0"/>
-          <a:ext cx="0" cy="0"/>
-          <a:chOff x="0" y="0"/>
-          <a:chExt cx="0" cy="0"/>
-        </a:xfrm>
-      </p:grpSpPr>
-      <p:sp>
-        <p:nvSpPr>
-          <p:cNvPr id="2" name="Slide Image Placeholder 1"/>
-          <p:cNvSpPr>
-            <a:spLocks noGrp="1" noRot="1" noChangeAspect="1"/>
-          </p:cNvSpPr>
-          <p:nvPr>
-            <p:ph type="sldImg"/>
-          </p:nvPr>
-        </p:nvSpPr>
-        <p:spPr/>
-      </p:sp>
-      <p:sp>
-        <p:nvSpPr>
-          <p:cNvPr id="3" name="Notes Placeholder 2"/>
-          <p:cNvSpPr>
-            <a:spLocks noGrp="1"/>
-          </p:cNvSpPr>
-          <p:nvPr>
-            <p:ph type="body" idx="1"/>
-          </p:nvPr>
-        </p:nvSpPr>
-        <p:spPr/>
-        <p:txBody>
-          <a:bodyPr/>
-          <a:lstStyle/>
-          <a:p>
-            <a:r>
-              <a:rPr lang="en-US" dirty="0"/>
-              <a:t>Abschlussfolie: zeigt, dass alle Dimensionen dieselben Begriffe verwenden, und sammelt die Annahmen, die mit dem Auftraggeber zu validieren sind.</a:t>
-            </a:r>
-            <a:endParaRPr lang="en-US" dirty="0"/>
-          </a:p>
-        </p:txBody>
-      </p:sp>
-      <p:sp>
-        <p:nvSpPr>
-          <p:cNvPr id="4" name="Slide Number Placeholder 3"/>
-          <p:cNvSpPr>
-            <a:spLocks noGrp="1"/>
-          </p:cNvSpPr>
-          <p:nvPr>
-            <p:ph type="sldNum" sz="quarter" idx="10"/>
-          </p:nvPr>
-        </p:nvSpPr>
-        <p:spPr/>
-        <p:txBody>
-          <a:bodyPr/>
-          <a:lstStyle/>
-          <a:p>
-            <a:fld id="{F7021451-1387-4CA6-816F-3879F97B5CBC}" type="slidenum">
-              <a:rPr lang="en-US"/>
-              <a:t>9</a:t>
             </a:fld>
             <a:endParaRPr lang="en-US"/>
           </a:p>
@@ -1289,6 +973,11 @@
 <file path=ppt/slideMasters/slideMaster1.xml><?xml version="1.0" encoding="utf-8"?>
 <p:sldMaster xmlns:a="http://schemas.openxmlformats.org/drawingml/2006/main" xmlns:r="http://schemas.openxmlformats.org/officeDocument/2006/relationships" xmlns:p="http://schemas.openxmlformats.org/presentationml/2006/main">
   <p:cSld>
+    <p:bg>
+      <p:bgRef idx="1001">
+        <a:schemeClr val="bg1"/>
+      </p:bgRef>
+    </p:bg>
     <p:spTree>
       <p:nvGrpSpPr>
         <p:cNvPr id="1" name=""/>
@@ -1571,6 +1260,7 @@
         <a:solidFill>
           <a:srgbClr val="FFFFFF"/>
         </a:solidFill>
+        <a:effectLst/>
       </p:bgPr>
     </p:bg>
     <p:spTree>
@@ -1633,11 +1323,11 @@
           <a:bodyPr wrap="square" lIns="0" tIns="0" rIns="0" bIns="0" rtlCol="0" anchor="t"/>
           <a:lstStyle/>
           <a:p>
-            <a:pPr indent="0" marL="0">
-              <a:buNone/>
-            </a:pPr>
-            <a:r>
-              <a:rPr lang="en-US" sz="800" b="1" spc="150" kern="0" dirty="0">
+            <a:pPr marL="0" indent="0">
+              <a:buNone/>
+            </a:pPr>
+            <a:r>
+              <a:rPr lang="en-US" sz="800" b="1" kern="0" spc="150" dirty="0">
                 <a:solidFill>
                   <a:srgbClr val="97BC62"/>
                 </a:solidFill>
@@ -1672,7 +1362,7 @@
           <a:bodyPr wrap="square" lIns="0" tIns="0" rIns="0" bIns="0" rtlCol="0" anchor="ctr"/>
           <a:lstStyle/>
           <a:p>
-            <a:pPr indent="0" marL="0">
+            <a:pPr marL="0" indent="0">
               <a:buNone/>
             </a:pPr>
             <a:r>
@@ -1711,7 +1401,7 @@
           <a:bodyPr wrap="square" lIns="0" tIns="0" rIns="0" bIns="0" rtlCol="0" anchor="t"/>
           <a:lstStyle/>
           <a:p>
-            <a:pPr indent="0" marL="0">
+            <a:pPr marL="0" indent="0">
               <a:buNone/>
             </a:pPr>
             <a:r>
@@ -1750,11 +1440,11 @@
           <a:bodyPr wrap="square" lIns="0" tIns="0" rIns="0" bIns="0" rtlCol="0" anchor="t"/>
           <a:lstStyle/>
           <a:p>
-            <a:pPr indent="0" marL="0">
-              <a:buNone/>
-            </a:pPr>
-            <a:r>
-              <a:rPr lang="en-US" sz="800" b="1" spc="150" kern="0" dirty="0">
+            <a:pPr marL="0" indent="0">
+              <a:buNone/>
+            </a:pPr>
+            <a:r>
+              <a:rPr lang="en-US" sz="800" b="1" kern="0" spc="150" dirty="0">
                 <a:solidFill>
                   <a:srgbClr val="97BC62"/>
                 </a:solidFill>
@@ -1789,7 +1479,7 @@
           <a:bodyPr wrap="square" lIns="0" tIns="0" rIns="0" bIns="0" rtlCol="0" anchor="t"/>
           <a:lstStyle/>
           <a:p>
-            <a:pPr indent="0" marL="0">
+            <a:pPr marL="0" indent="0">
               <a:spcAft>
                 <a:spcPts val="400"/>
               </a:spcAft>
@@ -1806,13 +1496,38 @@
               </a:rPr>
               <a:t>Activity 4: </a:t>
             </a:r>
-            <a:pPr indent="0" marL="0">
+            <a:r>
+              <a:rPr lang="en-US" sz="1000" dirty="0">
+                <a:solidFill>
+                  <a:srgbClr val="FFFFFF"/>
+                </a:solidFill>
+                <a:latin typeface="Calibri" pitchFamily="34" charset="0"/>
+                <a:ea typeface="Calibri" pitchFamily="34" charset="-122"/>
+                <a:cs typeface="Calibri" pitchFamily="34" charset="-120"/>
+              </a:rPr>
+              <a:t>Ausgabe der Arbeit</a:t>
+            </a:r>
+            <a:endParaRPr lang="en-US" sz="1000" dirty="0"/>
+          </a:p>
+          <a:p>
+            <a:pPr marL="0" indent="0">
               <a:spcAft>
                 <a:spcPts val="400"/>
               </a:spcAft>
               <a:buNone/>
             </a:pPr>
             <a:r>
+              <a:rPr lang="en-US" sz="1000" b="1" dirty="0">
+                <a:solidFill>
+                  <a:srgbClr val="D9E6CF"/>
+                </a:solidFill>
+                <a:latin typeface="Calibri" pitchFamily="34" charset="0"/>
+                <a:ea typeface="Calibri" pitchFamily="34" charset="-122"/>
+                <a:cs typeface="Calibri" pitchFamily="34" charset="-120"/>
+              </a:rPr>
+              <a:t>User Task 4.1: </a:t>
+            </a:r>
+            <a:r>
               <a:rPr lang="en-US" sz="1000" dirty="0">
                 <a:solidFill>
                   <a:srgbClr val="FFFFFF"/>
@@ -1821,12 +1536,12 @@
                 <a:ea typeface="Calibri" pitchFamily="34" charset="-122"/>
                 <a:cs typeface="Calibri" pitchFamily="34" charset="-120"/>
               </a:rPr>
-              <a:t>Ausgabe der Arbeit</a:t>
+              <a:t>Thema bestätigen und freigeben</a:t>
             </a:r>
             <a:endParaRPr lang="en-US" sz="1000" dirty="0"/>
           </a:p>
           <a:p>
-            <a:pPr indent="0" marL="0">
+            <a:pPr marL="0" indent="0">
               <a:spcAft>
                 <a:spcPts val="400"/>
               </a:spcAft>
@@ -1841,51 +1556,8 @@
                 <a:ea typeface="Calibri" pitchFamily="34" charset="-122"/>
                 <a:cs typeface="Calibri" pitchFamily="34" charset="-120"/>
               </a:rPr>
-              <a:t>User Task 4.1: </a:t>
-            </a:r>
-            <a:pPr indent="0" marL="0">
-              <a:spcAft>
-                <a:spcPts val="400"/>
-              </a:spcAft>
-              <a:buNone/>
-            </a:pPr>
-            <a:r>
-              <a:rPr lang="en-US" sz="1000" dirty="0">
-                <a:solidFill>
-                  <a:srgbClr val="FFFFFF"/>
-                </a:solidFill>
-                <a:latin typeface="Calibri" pitchFamily="34" charset="0"/>
-                <a:ea typeface="Calibri" pitchFamily="34" charset="-122"/>
-                <a:cs typeface="Calibri" pitchFamily="34" charset="-120"/>
-              </a:rPr>
-              <a:t>Thema bestätigen und freigeben</a:t>
-            </a:r>
-            <a:endParaRPr lang="en-US" sz="1000" dirty="0"/>
-          </a:p>
-          <a:p>
-            <a:pPr indent="0" marL="0">
-              <a:spcAft>
-                <a:spcPts val="400"/>
-              </a:spcAft>
-              <a:buNone/>
-            </a:pPr>
-            <a:r>
-              <a:rPr lang="en-US" sz="1000" b="1" dirty="0">
-                <a:solidFill>
-                  <a:srgbClr val="D9E6CF"/>
-                </a:solidFill>
-                <a:latin typeface="Calibri" pitchFamily="34" charset="0"/>
-                <a:ea typeface="Calibri" pitchFamily="34" charset="-122"/>
-                <a:cs typeface="Calibri" pitchFamily="34" charset="-120"/>
-              </a:rPr>
               <a:t>Rolle: </a:t>
             </a:r>
-            <a:pPr indent="0" marL="0">
-              <a:spcAft>
-                <a:spcPts val="400"/>
-              </a:spcAft>
-              <a:buNone/>
-            </a:pPr>
             <a:r>
               <a:rPr lang="en-US" sz="1000" dirty="0">
                 <a:solidFill>
@@ -1922,7 +1594,7 @@
           <a:bodyPr wrap="square" lIns="0" tIns="0" rIns="0" bIns="0" rtlCol="0" anchor="b"/>
           <a:lstStyle/>
           <a:p>
-            <a:pPr indent="0" marL="0">
+            <a:pPr marL="0" indent="0">
               <a:buNone/>
             </a:pPr>
             <a:r>
@@ -1939,7 +1611,7 @@
             <a:endParaRPr lang="en-US" sz="800" dirty="0"/>
           </a:p>
           <a:p>
-            <a:pPr indent="0" marL="0">
+            <a:pPr marL="0" indent="0">
               <a:buNone/>
             </a:pPr>
             <a:r>
@@ -1978,7 +1650,7 @@
           <a:bodyPr wrap="square" lIns="0" tIns="0" rIns="0" bIns="0" rtlCol="0" anchor="ctr"/>
           <a:lstStyle/>
           <a:p>
-            <a:pPr indent="0" marL="0">
+            <a:pPr marL="0" indent="0">
               <a:buNone/>
             </a:pPr>
             <a:r>
@@ -2044,7 +1716,7 @@
           <a:bodyPr wrap="square" lIns="0" tIns="0" rIns="0" bIns="0" rtlCol="0" anchor="ctr"/>
           <a:lstStyle/>
           <a:p>
-            <a:pPr indent="0" marL="0">
+            <a:pPr marL="0" indent="0">
               <a:buNone/>
             </a:pPr>
             <a:r>
@@ -2083,7 +1755,7 @@
           <a:bodyPr wrap="square" lIns="0" tIns="0" rIns="0" bIns="0" rtlCol="0" anchor="t"/>
           <a:lstStyle/>
           <a:p>
-            <a:pPr indent="0" marL="0">
+            <a:pPr marL="0" indent="0">
               <a:buNone/>
             </a:pPr>
             <a:r>
@@ -2122,7 +1794,7 @@
           <a:bodyPr wrap="square" lIns="0" tIns="0" rIns="0" bIns="0" rtlCol="0" anchor="ctr"/>
           <a:lstStyle/>
           <a:p>
-            <a:pPr indent="0" marL="0">
+            <a:pPr marL="0" indent="0">
               <a:buNone/>
             </a:pPr>
             <a:r>
@@ -2188,7 +1860,7 @@
           <a:bodyPr wrap="square" lIns="0" tIns="0" rIns="0" bIns="0" rtlCol="0" anchor="ctr"/>
           <a:lstStyle/>
           <a:p>
-            <a:pPr algn="ctr" indent="0" marL="0">
+            <a:pPr marL="0" indent="0" algn="ctr">
               <a:buNone/>
             </a:pPr>
             <a:r>
@@ -2278,7 +1950,7 @@
           <a:bodyPr wrap="square" lIns="0" tIns="0" rIns="0" bIns="0" rtlCol="0" anchor="ctr"/>
           <a:lstStyle/>
           <a:p>
-            <a:pPr algn="ctr" indent="0" marL="0">
+            <a:pPr marL="0" indent="0" algn="ctr">
               <a:buNone/>
             </a:pPr>
             <a:r>
@@ -2368,7 +2040,7 @@
           <a:bodyPr wrap="square" lIns="0" tIns="0" rIns="0" bIns="0" rtlCol="0" anchor="ctr"/>
           <a:lstStyle/>
           <a:p>
-            <a:pPr algn="ctr" indent="0" marL="0">
+            <a:pPr marL="0" indent="0" algn="ctr">
               <a:buNone/>
             </a:pPr>
             <a:r>
@@ -2458,7 +2130,7 @@
           <a:bodyPr wrap="square" lIns="0" tIns="0" rIns="0" bIns="0" rtlCol="0" anchor="ctr"/>
           <a:lstStyle/>
           <a:p>
-            <a:pPr algn="ctr" indent="0" marL="0">
+            <a:pPr marL="0" indent="0" algn="ctr">
               <a:buNone/>
             </a:pPr>
             <a:r>
@@ -2497,7 +2169,7 @@
           <a:bodyPr wrap="square" lIns="0" tIns="0" rIns="0" bIns="0" rtlCol="0" anchor="ctr"/>
           <a:lstStyle/>
           <a:p>
-            <a:pPr indent="0" marL="0">
+            <a:pPr marL="0" indent="0">
               <a:buNone/>
             </a:pPr>
             <a:r>
@@ -2563,7 +2235,7 @@
           <a:bodyPr wrap="square" lIns="0" tIns="0" rIns="0" bIns="0" rtlCol="0" anchor="ctr"/>
           <a:lstStyle/>
           <a:p>
-            <a:pPr algn="ctr" indent="0" marL="0">
+            <a:pPr marL="0" indent="0" algn="ctr">
               <a:buNone/>
             </a:pPr>
             <a:r>
@@ -2577,9 +2249,6 @@
               </a:rPr>
               <a:t>1 </a:t>
             </a:r>
-            <a:pPr algn="ctr" indent="0" marL="0">
-              <a:buNone/>
-            </a:pPr>
             <a:r>
               <a:rPr lang="en-US" sz="800" dirty="0">
                 <a:solidFill>
@@ -2643,7 +2312,7 @@
           <a:bodyPr wrap="square" lIns="0" tIns="0" rIns="0" bIns="0" rtlCol="0" anchor="ctr"/>
           <a:lstStyle/>
           <a:p>
-            <a:pPr algn="ctr" indent="0" marL="0">
+            <a:pPr marL="0" indent="0" algn="ctr">
               <a:buNone/>
             </a:pPr>
             <a:r>
@@ -2657,9 +2326,6 @@
               </a:rPr>
               <a:t>2 </a:t>
             </a:r>
-            <a:pPr algn="ctr" indent="0" marL="0">
-              <a:buNone/>
-            </a:pPr>
             <a:r>
               <a:rPr lang="en-US" sz="800" dirty="0">
                 <a:solidFill>
@@ -2723,7 +2389,7 @@
           <a:bodyPr wrap="square" lIns="0" tIns="0" rIns="0" bIns="0" rtlCol="0" anchor="ctr"/>
           <a:lstStyle/>
           <a:p>
-            <a:pPr algn="ctr" indent="0" marL="0">
+            <a:pPr marL="0" indent="0" algn="ctr">
               <a:buNone/>
             </a:pPr>
             <a:r>
@@ -2737,9 +2403,6 @@
               </a:rPr>
               <a:t>3 </a:t>
             </a:r>
-            <a:pPr algn="ctr" indent="0" marL="0">
-              <a:buNone/>
-            </a:pPr>
             <a:r>
               <a:rPr lang="en-US" sz="800" dirty="0">
                 <a:solidFill>
@@ -2803,7 +2466,7 @@
           <a:bodyPr wrap="square" lIns="0" tIns="0" rIns="0" bIns="0" rtlCol="0" anchor="ctr"/>
           <a:lstStyle/>
           <a:p>
-            <a:pPr algn="ctr" indent="0" marL="0">
+            <a:pPr marL="0" indent="0" algn="ctr">
               <a:buNone/>
             </a:pPr>
             <a:r>
@@ -2817,9 +2480,6 @@
               </a:rPr>
               <a:t>4 </a:t>
             </a:r>
-            <a:pPr algn="ctr" indent="0" marL="0">
-              <a:buNone/>
-            </a:pPr>
             <a:r>
               <a:rPr lang="en-US" sz="800" dirty="0">
                 <a:solidFill>
@@ -2883,7 +2543,7 @@
           <a:bodyPr wrap="square" lIns="0" tIns="0" rIns="0" bIns="0" rtlCol="0" anchor="ctr"/>
           <a:lstStyle/>
           <a:p>
-            <a:pPr algn="ctr" indent="0" marL="0">
+            <a:pPr marL="0" indent="0" algn="ctr">
               <a:buNone/>
             </a:pPr>
             <a:r>
@@ -2897,9 +2557,6 @@
               </a:rPr>
               <a:t>5 </a:t>
             </a:r>
-            <a:pPr algn="ctr" indent="0" marL="0">
-              <a:buNone/>
-            </a:pPr>
             <a:r>
               <a:rPr lang="en-US" sz="800" dirty="0">
                 <a:solidFill>
@@ -2963,7 +2620,7 @@
           <a:bodyPr wrap="square" lIns="0" tIns="0" rIns="0" bIns="0" rtlCol="0" anchor="ctr"/>
           <a:lstStyle/>
           <a:p>
-            <a:pPr algn="ctr" indent="0" marL="0">
+            <a:pPr marL="0" indent="0" algn="ctr">
               <a:buNone/>
             </a:pPr>
             <a:r>
@@ -2977,9 +2634,6 @@
               </a:rPr>
               <a:t>6 </a:t>
             </a:r>
-            <a:pPr algn="ctr" indent="0" marL="0">
-              <a:buNone/>
-            </a:pPr>
             <a:r>
               <a:rPr lang="en-US" sz="800" dirty="0">
                 <a:solidFill>
@@ -3043,7 +2697,7 @@
           <a:bodyPr wrap="square" lIns="0" tIns="0" rIns="0" bIns="0" rtlCol="0" anchor="ctr"/>
           <a:lstStyle/>
           <a:p>
-            <a:pPr algn="ctr" indent="0" marL="0">
+            <a:pPr marL="0" indent="0" algn="ctr">
               <a:buNone/>
             </a:pPr>
             <a:r>
@@ -3057,9 +2711,6 @@
               </a:rPr>
               <a:t>7 </a:t>
             </a:r>
-            <a:pPr algn="ctr" indent="0" marL="0">
-              <a:buNone/>
-            </a:pPr>
             <a:r>
               <a:rPr lang="en-US" sz="800" dirty="0">
                 <a:solidFill>
@@ -3091,6 +2742,7 @@
         <a:solidFill>
           <a:srgbClr val="FFFFFF"/>
         </a:solidFill>
+        <a:effectLst/>
       </p:bgPr>
     </p:bg>
     <p:spTree>
@@ -3128,7 +2780,7 @@
           <a:bodyPr wrap="square" lIns="0" tIns="0" rIns="0" bIns="0" rtlCol="0" anchor="ctr"/>
           <a:lstStyle/>
           <a:p>
-            <a:pPr indent="0" marL="0">
+            <a:pPr marL="0" indent="0">
               <a:buNone/>
             </a:pPr>
             <a:r>
@@ -3167,11 +2819,11 @@
           <a:bodyPr wrap="square" lIns="0" tIns="0" rIns="0" bIns="0" rtlCol="0" anchor="ctr"/>
           <a:lstStyle/>
           <a:p>
-            <a:pPr algn="r" indent="0" marL="0">
-              <a:buNone/>
-            </a:pPr>
-            <a:r>
-              <a:rPr lang="en-US" sz="800" b="1" spc="150" kern="0" dirty="0">
+            <a:pPr marL="0" indent="0" algn="r">
+              <a:buNone/>
+            </a:pPr>
+            <a:r>
+              <a:rPr lang="en-US" sz="800" b="1" kern="0" spc="150" dirty="0">
                 <a:solidFill>
                   <a:srgbClr val="97BC62"/>
                 </a:solidFill>
@@ -3206,7 +2858,7 @@
           <a:bodyPr wrap="square" lIns="0" tIns="0" rIns="0" bIns="0" rtlCol="0" anchor="t"/>
           <a:lstStyle/>
           <a:p>
-            <a:pPr indent="0" marL="0">
+            <a:pPr marL="0" indent="0">
               <a:buNone/>
             </a:pPr>
             <a:r>
@@ -3245,7 +2897,7 @@
           <a:bodyPr wrap="square" lIns="0" tIns="0" rIns="0" bIns="0" rtlCol="0" anchor="t"/>
           <a:lstStyle/>
           <a:p>
-            <a:pPr indent="0" marL="0">
+            <a:pPr marL="0" indent="0">
               <a:buNone/>
             </a:pPr>
             <a:r>
@@ -3284,7 +2936,7 @@
           <a:bodyPr wrap="square" lIns="0" tIns="0" rIns="0" bIns="0" rtlCol="0" anchor="t"/>
           <a:lstStyle/>
           <a:p>
-            <a:pPr algn="r" indent="0" marL="0">
+            <a:pPr marL="0" indent="0" algn="r">
               <a:buNone/>
             </a:pPr>
             <a:r>
@@ -3402,7 +3054,7 @@
           <a:bodyPr wrap="square" lIns="0" tIns="0" rIns="0" bIns="0" rtlCol="0" anchor="ctr"/>
           <a:lstStyle/>
           <a:p>
-            <a:pPr indent="0" marL="0">
+            <a:pPr marL="0" indent="0">
               <a:buNone/>
             </a:pPr>
             <a:r>
@@ -3441,7 +3093,7 @@
           <a:bodyPr wrap="square" lIns="0" tIns="0" rIns="0" bIns="0" rtlCol="0" anchor="ctr"/>
           <a:lstStyle/>
           <a:p>
-            <a:pPr indent="0" marL="0">
+            <a:pPr marL="0" indent="0">
               <a:buNone/>
             </a:pPr>
             <a:r>
@@ -3480,7 +3132,7 @@
           <a:bodyPr wrap="square" lIns="0" tIns="0" rIns="0" bIns="0" rtlCol="0" anchor="t"/>
           <a:lstStyle/>
           <a:p>
-            <a:pPr indent="0" marL="0">
+            <a:pPr marL="0" indent="0">
               <a:buNone/>
             </a:pPr>
             <a:r>
@@ -3519,7 +3171,7 @@
           <a:bodyPr wrap="square" lIns="0" tIns="0" rIns="0" bIns="0" rtlCol="0" anchor="t"/>
           <a:lstStyle/>
           <a:p>
-            <a:pPr indent="0" marL="0">
+            <a:pPr marL="0" indent="0">
               <a:buNone/>
             </a:pPr>
             <a:r>
@@ -3581,7 +3233,7 @@
           <a:bodyPr wrap="square" lIns="0" tIns="0" rIns="0" bIns="0" rtlCol="0" anchor="t"/>
           <a:lstStyle/>
           <a:p>
-            <a:pPr indent="0" marL="0">
+            <a:pPr marL="0" indent="0">
               <a:buNone/>
             </a:pPr>
             <a:r>
@@ -3620,7 +3272,7 @@
           <a:bodyPr wrap="square" lIns="0" tIns="0" rIns="0" bIns="0" rtlCol="0" anchor="t"/>
           <a:lstStyle/>
           <a:p>
-            <a:pPr indent="0" marL="0">
+            <a:pPr marL="0" indent="0">
               <a:buNone/>
             </a:pPr>
             <a:r>
@@ -3682,7 +3334,7 @@
           <a:bodyPr wrap="square" lIns="0" tIns="0" rIns="0" bIns="0" rtlCol="0" anchor="t"/>
           <a:lstStyle/>
           <a:p>
-            <a:pPr indent="0" marL="0">
+            <a:pPr marL="0" indent="0">
               <a:buNone/>
             </a:pPr>
             <a:r>
@@ -3721,7 +3373,7 @@
           <a:bodyPr wrap="square" lIns="0" tIns="0" rIns="0" bIns="0" rtlCol="0" anchor="t"/>
           <a:lstStyle/>
           <a:p>
-            <a:pPr indent="0" marL="0">
+            <a:pPr marL="0" indent="0">
               <a:buNone/>
             </a:pPr>
             <a:r>
@@ -3783,7 +3435,7 @@
           <a:bodyPr wrap="square" lIns="0" tIns="0" rIns="0" bIns="0" rtlCol="0" anchor="t"/>
           <a:lstStyle/>
           <a:p>
-            <a:pPr indent="0" marL="0">
+            <a:pPr marL="0" indent="0">
               <a:buNone/>
             </a:pPr>
             <a:r>
@@ -3822,7 +3474,7 @@
           <a:bodyPr wrap="square" lIns="0" tIns="0" rIns="0" bIns="0" rtlCol="0" anchor="t"/>
           <a:lstStyle/>
           <a:p>
-            <a:pPr indent="0" marL="0">
+            <a:pPr marL="0" indent="0">
               <a:buNone/>
             </a:pPr>
             <a:r>
@@ -3884,7 +3536,7 @@
           <a:bodyPr wrap="square" lIns="0" tIns="0" rIns="0" bIns="0" rtlCol="0" anchor="t"/>
           <a:lstStyle/>
           <a:p>
-            <a:pPr indent="0" marL="0">
+            <a:pPr marL="0" indent="0">
               <a:buNone/>
             </a:pPr>
             <a:r>
@@ -3923,7 +3575,7 @@
           <a:bodyPr wrap="square" lIns="0" tIns="0" rIns="0" bIns="0" rtlCol="0" anchor="t"/>
           <a:lstStyle/>
           <a:p>
-            <a:pPr indent="0" marL="0">
+            <a:pPr marL="0" indent="0">
               <a:buNone/>
             </a:pPr>
             <a:r>
@@ -3985,7 +3637,7 @@
           <a:bodyPr wrap="square" lIns="0" tIns="0" rIns="0" bIns="0" rtlCol="0" anchor="t"/>
           <a:lstStyle/>
           <a:p>
-            <a:pPr indent="0" marL="0">
+            <a:pPr marL="0" indent="0">
               <a:buNone/>
             </a:pPr>
             <a:r>
@@ -4024,7 +3676,7 @@
           <a:bodyPr wrap="square" lIns="0" tIns="0" rIns="0" bIns="0" rtlCol="0" anchor="t"/>
           <a:lstStyle/>
           <a:p>
-            <a:pPr indent="0" marL="0">
+            <a:pPr marL="0" indent="0">
               <a:buNone/>
             </a:pPr>
             <a:r>
@@ -4142,7 +3794,7 @@
           <a:bodyPr wrap="square" lIns="0" tIns="0" rIns="0" bIns="0" rtlCol="0" anchor="ctr"/>
           <a:lstStyle/>
           <a:p>
-            <a:pPr indent="0" marL="0">
+            <a:pPr marL="0" indent="0">
               <a:buNone/>
             </a:pPr>
             <a:r>
@@ -4181,7 +3833,7 @@
           <a:bodyPr wrap="square" lIns="0" tIns="0" rIns="0" bIns="0" rtlCol="0" anchor="ctr"/>
           <a:lstStyle/>
           <a:p>
-            <a:pPr indent="0" marL="0">
+            <a:pPr marL="0" indent="0">
               <a:buNone/>
             </a:pPr>
             <a:r>
@@ -4220,7 +3872,7 @@
           <a:bodyPr wrap="square" lIns="0" tIns="0" rIns="0" bIns="0" rtlCol="0" anchor="t"/>
           <a:lstStyle/>
           <a:p>
-            <a:pPr indent="0" marL="0">
+            <a:pPr marL="0" indent="0">
               <a:buNone/>
             </a:pPr>
             <a:r>
@@ -4259,7 +3911,7 @@
           <a:bodyPr wrap="square" lIns="0" tIns="0" rIns="0" bIns="0" rtlCol="0" anchor="t"/>
           <a:lstStyle/>
           <a:p>
-            <a:pPr indent="0" marL="0">
+            <a:pPr marL="0" indent="0">
               <a:buNone/>
             </a:pPr>
             <a:r>
@@ -4321,7 +3973,7 @@
           <a:bodyPr wrap="square" lIns="0" tIns="0" rIns="0" bIns="0" rtlCol="0" anchor="t"/>
           <a:lstStyle/>
           <a:p>
-            <a:pPr indent="0" marL="0">
+            <a:pPr marL="0" indent="0">
               <a:buNone/>
             </a:pPr>
             <a:r>
@@ -4360,7 +4012,7 @@
           <a:bodyPr wrap="square" lIns="0" tIns="0" rIns="0" bIns="0" rtlCol="0" anchor="t"/>
           <a:lstStyle/>
           <a:p>
-            <a:pPr indent="0" marL="0">
+            <a:pPr marL="0" indent="0">
               <a:buNone/>
             </a:pPr>
             <a:r>
@@ -4422,7 +4074,7 @@
           <a:bodyPr wrap="square" lIns="0" tIns="0" rIns="0" bIns="0" rtlCol="0" anchor="t"/>
           <a:lstStyle/>
           <a:p>
-            <a:pPr indent="0" marL="0">
+            <a:pPr marL="0" indent="0">
               <a:buNone/>
             </a:pPr>
             <a:r>
@@ -4461,7 +4113,7 @@
           <a:bodyPr wrap="square" lIns="0" tIns="0" rIns="0" bIns="0" rtlCol="0" anchor="t"/>
           <a:lstStyle/>
           <a:p>
-            <a:pPr indent="0" marL="0">
+            <a:pPr marL="0" indent="0">
               <a:buNone/>
             </a:pPr>
             <a:r>
@@ -4523,7 +4175,7 @@
           <a:bodyPr wrap="square" lIns="0" tIns="0" rIns="0" bIns="0" rtlCol="0" anchor="t"/>
           <a:lstStyle/>
           <a:p>
-            <a:pPr indent="0" marL="0">
+            <a:pPr marL="0" indent="0">
               <a:buNone/>
             </a:pPr>
             <a:r>
@@ -4562,7 +4214,7 @@
           <a:bodyPr wrap="square" lIns="0" tIns="0" rIns="0" bIns="0" rtlCol="0" anchor="t"/>
           <a:lstStyle/>
           <a:p>
-            <a:pPr indent="0" marL="0">
+            <a:pPr marL="0" indent="0">
               <a:buNone/>
             </a:pPr>
             <a:r>
@@ -4624,7 +4276,7 @@
           <a:bodyPr wrap="square" lIns="0" tIns="0" rIns="0" bIns="0" rtlCol="0" anchor="t"/>
           <a:lstStyle/>
           <a:p>
-            <a:pPr indent="0" marL="0">
+            <a:pPr marL="0" indent="0">
               <a:buNone/>
             </a:pPr>
             <a:r>
@@ -4663,7 +4315,7 @@
           <a:bodyPr wrap="square" lIns="0" tIns="0" rIns="0" bIns="0" rtlCol="0" anchor="t"/>
           <a:lstStyle/>
           <a:p>
-            <a:pPr indent="0" marL="0">
+            <a:pPr marL="0" indent="0">
               <a:buNone/>
             </a:pPr>
             <a:r>
@@ -4725,7 +4377,7 @@
           <a:bodyPr wrap="square" lIns="0" tIns="0" rIns="0" bIns="0" rtlCol="0" anchor="t"/>
           <a:lstStyle/>
           <a:p>
-            <a:pPr indent="0" marL="0">
+            <a:pPr marL="0" indent="0">
               <a:buNone/>
             </a:pPr>
             <a:r>
@@ -4764,7 +4416,7 @@
           <a:bodyPr wrap="square" lIns="0" tIns="0" rIns="0" bIns="0" rtlCol="0" anchor="t"/>
           <a:lstStyle/>
           <a:p>
-            <a:pPr indent="0" marL="0">
+            <a:pPr marL="0" indent="0">
               <a:buNone/>
             </a:pPr>
             <a:r>
@@ -4798,6 +4450,7 @@
         <a:solidFill>
           <a:srgbClr val="FFFFFF"/>
         </a:solidFill>
+        <a:effectLst/>
       </p:bgPr>
     </p:bg>
     <p:spTree>
@@ -4835,7 +4488,7 @@
           <a:bodyPr wrap="square" lIns="0" tIns="0" rIns="0" bIns="0" rtlCol="0" anchor="ctr"/>
           <a:lstStyle/>
           <a:p>
-            <a:pPr indent="0" marL="0">
+            <a:pPr marL="0" indent="0">
               <a:buNone/>
             </a:pPr>
             <a:r>
@@ -4874,11 +4527,11 @@
           <a:bodyPr wrap="square" lIns="0" tIns="0" rIns="0" bIns="0" rtlCol="0" anchor="ctr"/>
           <a:lstStyle/>
           <a:p>
-            <a:pPr algn="r" indent="0" marL="0">
-              <a:buNone/>
-            </a:pPr>
-            <a:r>
-              <a:rPr lang="en-US" sz="800" b="1" spc="150" kern="0" dirty="0">
+            <a:pPr marL="0" indent="0" algn="r">
+              <a:buNone/>
+            </a:pPr>
+            <a:r>
+              <a:rPr lang="en-US" sz="800" b="1" kern="0" spc="150" dirty="0">
                 <a:solidFill>
                   <a:srgbClr val="97BC62"/>
                 </a:solidFill>
@@ -4913,7 +4566,7 @@
           <a:bodyPr wrap="square" lIns="0" tIns="0" rIns="0" bIns="0" rtlCol="0" anchor="t"/>
           <a:lstStyle/>
           <a:p>
-            <a:pPr indent="0" marL="0">
+            <a:pPr marL="0" indent="0">
               <a:buNone/>
             </a:pPr>
             <a:r>
@@ -4952,7 +4605,7 @@
           <a:bodyPr wrap="square" lIns="0" tIns="0" rIns="0" bIns="0" rtlCol="0" anchor="t"/>
           <a:lstStyle/>
           <a:p>
-            <a:pPr indent="0" marL="0">
+            <a:pPr marL="0" indent="0">
               <a:buNone/>
             </a:pPr>
             <a:r>
@@ -4991,7 +4644,7 @@
           <a:bodyPr wrap="square" lIns="0" tIns="0" rIns="0" bIns="0" rtlCol="0" anchor="t"/>
           <a:lstStyle/>
           <a:p>
-            <a:pPr algn="r" indent="0" marL="0">
+            <a:pPr marL="0" indent="0" algn="r">
               <a:buNone/>
             </a:pPr>
             <a:r>
@@ -5057,7 +4710,7 @@
           <a:bodyPr wrap="square" lIns="0" tIns="0" rIns="0" bIns="0" rtlCol="0" anchor="ctr"/>
           <a:lstStyle/>
           <a:p>
-            <a:pPr algn="ctr" indent="0" marL="0">
+            <a:pPr marL="0" indent="0" algn="ctr">
               <a:buNone/>
             </a:pPr>
             <a:r>
@@ -5096,7 +4749,7 @@
           <a:bodyPr wrap="square" lIns="0" tIns="0" rIns="0" bIns="0" rtlCol="0" anchor="ctr"/>
           <a:lstStyle/>
           <a:p>
-            <a:pPr algn="ctr" indent="0" marL="0">
+            <a:pPr marL="0" indent="0" algn="ctr">
               <a:buNone/>
             </a:pPr>
             <a:r>
@@ -5130,6 +4783,7 @@
         <a:solidFill>
           <a:srgbClr val="FFFFFF"/>
         </a:solidFill>
+        <a:effectLst/>
       </p:bgPr>
     </p:bg>
     <p:spTree>
@@ -5167,7 +4821,7 @@
           <a:bodyPr wrap="square" lIns="0" tIns="0" rIns="0" bIns="0" rtlCol="0" anchor="ctr"/>
           <a:lstStyle/>
           <a:p>
-            <a:pPr indent="0" marL="0">
+            <a:pPr marL="0" indent="0">
               <a:buNone/>
             </a:pPr>
             <a:r>
@@ -5206,11 +4860,11 @@
           <a:bodyPr wrap="square" lIns="0" tIns="0" rIns="0" bIns="0" rtlCol="0" anchor="ctr"/>
           <a:lstStyle/>
           <a:p>
-            <a:pPr algn="r" indent="0" marL="0">
-              <a:buNone/>
-            </a:pPr>
-            <a:r>
-              <a:rPr lang="en-US" sz="800" b="1" spc="150" kern="0" dirty="0">
+            <a:pPr marL="0" indent="0" algn="r">
+              <a:buNone/>
+            </a:pPr>
+            <a:r>
+              <a:rPr lang="en-US" sz="800" b="1" kern="0" spc="150" dirty="0">
                 <a:solidFill>
                   <a:srgbClr val="97BC62"/>
                 </a:solidFill>
@@ -5245,7 +4899,7 @@
           <a:bodyPr wrap="square" lIns="0" tIns="0" rIns="0" bIns="0" rtlCol="0" anchor="t"/>
           <a:lstStyle/>
           <a:p>
-            <a:pPr indent="0" marL="0">
+            <a:pPr marL="0" indent="0">
               <a:buNone/>
             </a:pPr>
             <a:r>
@@ -5284,7 +4938,7 @@
           <a:bodyPr wrap="square" lIns="0" tIns="0" rIns="0" bIns="0" rtlCol="0" anchor="t"/>
           <a:lstStyle/>
           <a:p>
-            <a:pPr indent="0" marL="0">
+            <a:pPr marL="0" indent="0">
               <a:buNone/>
             </a:pPr>
             <a:r>
@@ -5323,7 +4977,7 @@
           <a:bodyPr wrap="square" lIns="0" tIns="0" rIns="0" bIns="0" rtlCol="0" anchor="t"/>
           <a:lstStyle/>
           <a:p>
-            <a:pPr algn="r" indent="0" marL="0">
+            <a:pPr marL="0" indent="0" algn="r">
               <a:buNone/>
             </a:pPr>
             <a:r>
@@ -5485,7 +5139,7 @@
           <a:bodyPr wrap="square" lIns="0" tIns="0" rIns="0" bIns="0" rtlCol="0" anchor="ctr"/>
           <a:lstStyle/>
           <a:p>
-            <a:pPr algn="ctr" indent="0" marL="0">
+            <a:pPr marL="0" indent="0" algn="ctr">
               <a:buNone/>
             </a:pPr>
             <a:r>
@@ -5524,7 +5178,7 @@
           <a:bodyPr wrap="square" lIns="0" tIns="0" rIns="0" bIns="0" rtlCol="0" anchor="ctr"/>
           <a:lstStyle/>
           <a:p>
-            <a:pPr algn="ctr" indent="0" marL="0">
+            <a:pPr marL="0" indent="0" algn="ctr">
               <a:buNone/>
             </a:pPr>
             <a:r>
@@ -5563,7 +5217,7 @@
           <a:bodyPr wrap="square" lIns="0" tIns="0" rIns="0" bIns="0" rtlCol="0" anchor="ctr"/>
           <a:lstStyle/>
           <a:p>
-            <a:pPr algn="ctr" indent="0" marL="0">
+            <a:pPr marL="0" indent="0" algn="ctr">
               <a:buNone/>
             </a:pPr>
             <a:r>
@@ -5627,19 +5281,24 @@
           <a:bodyPr wrap="square" lIns="0" tIns="0" rIns="0" bIns="0" rtlCol="0" anchor="t"/>
           <a:lstStyle/>
           <a:p>
-            <a:pPr algn="l" indent="0" marL="0">
-              <a:buNone/>
-            </a:pPr>
-            <a:r>
-              <a:rPr lang="en-US" sz="700" dirty="0">
-                <a:solidFill>
-                  <a:srgbClr val="5C6B5C"/>
-                </a:solidFill>
-                <a:latin typeface="Calibri" pitchFamily="34" charset="0"/>
-                <a:ea typeface="Calibri" pitchFamily="34" charset="-122"/>
-                <a:cs typeface="Calibri" pitchFamily="34" charset="-120"/>
-              </a:rPr>
-              <a:t>Antrag vom Prüfungsausschuss angenommen</a:t>
+            <a:pPr marL="0" indent="0" algn="l">
+              <a:buNone/>
+            </a:pPr>
+            <a:r>
+              <a:rPr lang="en-US" sz="700" dirty="0"/>
+              <a:t>Student </a:t>
+            </a:r>
+            <a:r>
+              <a:rPr lang="en-US" sz="700" dirty="0" err="1"/>
+              <a:t>schickt</a:t>
+            </a:r>
+            <a:r>
+              <a:rPr lang="en-US" sz="700" dirty="0"/>
+              <a:t> thema an </a:t>
+            </a:r>
+            <a:r>
+              <a:rPr lang="en-US" sz="700" dirty="0" err="1"/>
+              <a:t>Prüfer</a:t>
             </a:r>
             <a:endParaRPr lang="en-US" sz="700" dirty="0"/>
           </a:p>
@@ -5717,7 +5376,7 @@
           <a:bodyPr wrap="square" lIns="0" tIns="0" rIns="0" bIns="0" rtlCol="0" anchor="ctr"/>
           <a:lstStyle/>
           <a:p>
-            <a:pPr algn="ctr" indent="0" marL="0">
+            <a:pPr marL="0" indent="0" algn="ctr">
               <a:buNone/>
             </a:pPr>
             <a:r>
@@ -5807,7 +5466,7 @@
           <a:bodyPr wrap="square" lIns="0" tIns="0" rIns="0" bIns="0" rtlCol="0" anchor="ctr"/>
           <a:lstStyle/>
           <a:p>
-            <a:pPr algn="ctr" indent="0" marL="0">
+            <a:pPr marL="0" indent="0" algn="ctr">
               <a:buNone/>
             </a:pPr>
             <a:r>
@@ -5819,7 +5478,7 @@
                 <a:ea typeface="Calibri" pitchFamily="34" charset="-122"/>
                 <a:cs typeface="Calibri" pitchFamily="34" charset="-120"/>
               </a:rPr>
-              <a:t>Antrag aufrufen</a:t>
+              <a:t>Thema aufrufen</a:t>
             </a:r>
             <a:endParaRPr lang="en-US" sz="850" dirty="0"/>
           </a:p>
@@ -5897,7 +5556,7 @@
           <a:bodyPr wrap="square" lIns="0" tIns="0" rIns="0" bIns="0" rtlCol="0" anchor="ctr"/>
           <a:lstStyle/>
           <a:p>
-            <a:pPr algn="ctr" indent="0" marL="0">
+            <a:pPr marL="0" indent="0" algn="ctr">
               <a:buNone/>
             </a:pPr>
             <a:r>
@@ -5985,7 +5644,7 @@
           <a:bodyPr wrap="square" lIns="0" tIns="0" rIns="0" bIns="0" rtlCol="0" anchor="ctr"/>
           <a:lstStyle/>
           <a:p>
-            <a:pPr algn="ctr" indent="0" marL="0">
+            <a:pPr marL="0" indent="0" algn="ctr">
               <a:buNone/>
             </a:pPr>
             <a:r>
@@ -6024,9 +5683,20 @@
           <a:bodyPr wrap="square" lIns="0" tIns="0" rIns="0" bIns="0" rtlCol="0" anchor="t"/>
           <a:lstStyle/>
           <a:p>
-            <a:pPr algn="ctr" indent="0" marL="0">
-              <a:buNone/>
-            </a:pPr>
+            <a:pPr marL="0" indent="0" algn="ctr">
+              <a:buNone/>
+            </a:pPr>
+            <a:r>
+              <a:rPr lang="en-US" sz="750" i="1" dirty="0" err="1">
+                <a:solidFill>
+                  <a:srgbClr val="5C6B5C"/>
+                </a:solidFill>
+                <a:latin typeface="Calibri" pitchFamily="34" charset="0"/>
+                <a:ea typeface="Calibri" pitchFamily="34" charset="-122"/>
+                <a:cs typeface="Calibri" pitchFamily="34" charset="-120"/>
+              </a:rPr>
+              <a:t>Passt</a:t>
+            </a:r>
             <a:r>
               <a:rPr lang="en-US" sz="750" i="1" dirty="0">
                 <a:solidFill>
@@ -6036,7 +5706,7 @@
                 <a:ea typeface="Calibri" pitchFamily="34" charset="-122"/>
                 <a:cs typeface="Calibri" pitchFamily="34" charset="-120"/>
               </a:rPr>
-              <a:t>Thema wie abgestimmt?</a:t>
+              <a:t> das Thema?</a:t>
             </a:r>
             <a:endParaRPr lang="en-US" sz="750" dirty="0"/>
           </a:p>
@@ -6087,7 +5757,7 @@
           <a:bodyPr wrap="square" lIns="0" tIns="0" rIns="0" bIns="0" rtlCol="0" anchor="t"/>
           <a:lstStyle/>
           <a:p>
-            <a:pPr indent="0" marL="0">
+            <a:pPr marL="0" indent="0">
               <a:buNone/>
             </a:pPr>
             <a:r>
@@ -6153,7 +5823,7 @@
           <a:bodyPr wrap="square" lIns="0" tIns="0" rIns="0" bIns="0" rtlCol="0" anchor="ctr"/>
           <a:lstStyle/>
           <a:p>
-            <a:pPr algn="ctr" indent="0" marL="0">
+            <a:pPr marL="0" indent="0" algn="ctr">
               <a:buNone/>
             </a:pPr>
             <a:r>
@@ -6243,7 +5913,7 @@
           <a:bodyPr wrap="square" lIns="0" tIns="0" rIns="0" bIns="0" rtlCol="0" anchor="ctr"/>
           <a:lstStyle/>
           <a:p>
-            <a:pPr algn="ctr" indent="0" marL="0">
+            <a:pPr marL="0" indent="0" algn="ctr">
               <a:buNone/>
             </a:pPr>
             <a:r>
@@ -6331,7 +6001,7 @@
           <a:bodyPr wrap="square" lIns="0" tIns="0" rIns="0" bIns="0" rtlCol="0" anchor="ctr"/>
           <a:lstStyle/>
           <a:p>
-            <a:pPr indent="0" marL="0">
+            <a:pPr marL="0" indent="0">
               <a:buNone/>
             </a:pPr>
             <a:r>
@@ -6417,7 +6087,7 @@
           <a:bodyPr wrap="square" lIns="0" tIns="0" rIns="0" bIns="0" rtlCol="0" anchor="t"/>
           <a:lstStyle/>
           <a:p>
-            <a:pPr indent="0" marL="0">
+            <a:pPr marL="0" indent="0">
               <a:buNone/>
             </a:pPr>
             <a:r>
@@ -6483,7 +6153,7 @@
           <a:bodyPr wrap="square" lIns="0" tIns="0" rIns="0" bIns="0" rtlCol="0" anchor="ctr"/>
           <a:lstStyle/>
           <a:p>
-            <a:pPr algn="ctr" indent="0" marL="0">
+            <a:pPr marL="0" indent="0" algn="ctr">
               <a:buNone/>
             </a:pPr>
             <a:r>
@@ -6571,7 +6241,7 @@
           <a:bodyPr wrap="square" lIns="0" tIns="0" rIns="0" bIns="0" rtlCol="0" anchor="ctr"/>
           <a:lstStyle/>
           <a:p>
-            <a:pPr indent="0" marL="0">
+            <a:pPr marL="0" indent="0">
               <a:buNone/>
             </a:pPr>
             <a:r>
@@ -6583,7 +6253,41 @@
                 <a:ea typeface="Calibri" pitchFamily="34" charset="-122"/>
                 <a:cs typeface="Calibri" pitchFamily="34" charset="-120"/>
               </a:rPr>
-              <a:t>Rückfrage an Studierende:n</a:t>
+              <a:t>Rückfrage an </a:t>
+            </a:r>
+            <a:r>
+              <a:rPr lang="en-US" sz="800" b="1" dirty="0" err="1">
+                <a:solidFill>
+                  <a:srgbClr val="1F2A1F"/>
+                </a:solidFill>
+                <a:latin typeface="Calibri" pitchFamily="34" charset="0"/>
+                <a:ea typeface="Calibri" pitchFamily="34" charset="-122"/>
+                <a:cs typeface="Calibri" pitchFamily="34" charset="-120"/>
+              </a:rPr>
+              <a:t>Studierende:n</a:t>
+            </a:r>
+            <a:endParaRPr lang="en-US" sz="800" b="1" dirty="0">
+              <a:solidFill>
+                <a:srgbClr val="1F2A1F"/>
+              </a:solidFill>
+              <a:latin typeface="Calibri" pitchFamily="34" charset="0"/>
+              <a:ea typeface="Calibri" pitchFamily="34" charset="-122"/>
+              <a:cs typeface="Calibri" pitchFamily="34" charset="-120"/>
+            </a:endParaRPr>
+          </a:p>
+          <a:p>
+            <a:pPr marL="0" indent="0">
+              <a:buNone/>
+            </a:pPr>
+            <a:r>
+              <a:rPr lang="en-US" sz="800" b="1" dirty="0" err="1">
+                <a:solidFill>
+                  <a:srgbClr val="1F2A1F"/>
+                </a:solidFill>
+                <a:latin typeface="Calibri" pitchFamily="34" charset="0"/>
+                <a:cs typeface="Calibri" pitchFamily="34" charset="-120"/>
+              </a:rPr>
+              <a:t>senden</a:t>
             </a:r>
             <a:endParaRPr lang="en-US" sz="800" dirty="0"/>
           </a:p>
@@ -6637,7 +6341,7 @@
           <a:bodyPr wrap="square" lIns="0" tIns="0" rIns="0" bIns="0" rtlCol="0" anchor="ctr"/>
           <a:lstStyle/>
           <a:p>
-            <a:pPr indent="0" marL="0">
+            <a:pPr marL="0" indent="0">
               <a:buNone/>
             </a:pPr>
             <a:r>
@@ -6651,9 +6355,6 @@
               </a:rPr>
               <a:t>Ausschnitt: </a:t>
             </a:r>
-            <a:pPr indent="0" marL="0">
-              <a:buNone/>
-            </a:pPr>
             <a:r>
               <a:rPr lang="en-US" sz="850" dirty="0">
                 <a:solidFill>
@@ -6665,9 +6366,6 @@
               </a:rPr>
               <a:t>nur US 4.1.1.   </a:t>
             </a:r>
-            <a:pPr indent="0" marL="0">
-              <a:buNone/>
-            </a:pPr>
             <a:r>
               <a:rPr lang="en-US" sz="850" b="1" dirty="0">
                 <a:solidFill>
@@ -6679,9 +6377,6 @@
               </a:rPr>
               <a:t>Davor: </a:t>
             </a:r>
-            <a:pPr indent="0" marL="0">
-              <a:buNone/>
-            </a:pPr>
             <a:r>
               <a:rPr lang="en-US" sz="850" dirty="0">
                 <a:solidFill>
@@ -6693,9 +6388,6 @@
               </a:rPr>
               <a:t>Entscheidung des Prüfungsausschusses (User Task 3.2).   </a:t>
             </a:r>
-            <a:pPr indent="0" marL="0">
-              <a:buNone/>
-            </a:pPr>
             <a:r>
               <a:rPr lang="en-US" sz="850" b="1" dirty="0">
                 <a:solidFill>
@@ -6707,9 +6399,6 @@
               </a:rPr>
               <a:t>Danach: </a:t>
             </a:r>
-            <a:pPr indent="0" marL="0">
-              <a:buNone/>
-            </a:pPr>
             <a:r>
               <a:rPr lang="en-US" sz="850" dirty="0">
                 <a:solidFill>
@@ -6741,6 +6430,7 @@
         <a:solidFill>
           <a:srgbClr val="FFFFFF"/>
         </a:solidFill>
+        <a:effectLst/>
       </p:bgPr>
     </p:bg>
     <p:spTree>
@@ -6778,7 +6468,7 @@
           <a:bodyPr wrap="square" lIns="0" tIns="0" rIns="0" bIns="0" rtlCol="0" anchor="ctr"/>
           <a:lstStyle/>
           <a:p>
-            <a:pPr indent="0" marL="0">
+            <a:pPr marL="0" indent="0">
               <a:buNone/>
             </a:pPr>
             <a:r>
@@ -6817,11 +6507,11 @@
           <a:bodyPr wrap="square" lIns="0" tIns="0" rIns="0" bIns="0" rtlCol="0" anchor="ctr"/>
           <a:lstStyle/>
           <a:p>
-            <a:pPr algn="r" indent="0" marL="0">
-              <a:buNone/>
-            </a:pPr>
-            <a:r>
-              <a:rPr lang="en-US" sz="800" b="1" spc="150" kern="0" dirty="0">
+            <a:pPr marL="0" indent="0" algn="r">
+              <a:buNone/>
+            </a:pPr>
+            <a:r>
+              <a:rPr lang="en-US" sz="800" b="1" kern="0" spc="150" dirty="0">
                 <a:solidFill>
                   <a:srgbClr val="97BC62"/>
                 </a:solidFill>
@@ -6856,7 +6546,7 @@
           <a:bodyPr wrap="square" lIns="0" tIns="0" rIns="0" bIns="0" rtlCol="0" anchor="t"/>
           <a:lstStyle/>
           <a:p>
-            <a:pPr indent="0" marL="0">
+            <a:pPr marL="0" indent="0">
               <a:buNone/>
             </a:pPr>
             <a:r>
@@ -6895,7 +6585,7 @@
           <a:bodyPr wrap="square" lIns="0" tIns="0" rIns="0" bIns="0" rtlCol="0" anchor="t"/>
           <a:lstStyle/>
           <a:p>
-            <a:pPr indent="0" marL="0">
+            <a:pPr marL="0" indent="0">
               <a:buNone/>
             </a:pPr>
             <a:r>
@@ -6934,7 +6624,7 @@
           <a:bodyPr wrap="square" lIns="0" tIns="0" rIns="0" bIns="0" rtlCol="0" anchor="t"/>
           <a:lstStyle/>
           <a:p>
-            <a:pPr algn="r" indent="0" marL="0">
+            <a:pPr marL="0" indent="0" algn="r">
               <a:buNone/>
             </a:pPr>
             <a:r>
@@ -7023,7 +6713,7 @@
           <a:bodyPr wrap="square" lIns="0" tIns="0" rIns="0" bIns="0" rtlCol="0" anchor="ctr"/>
           <a:lstStyle/>
           <a:p>
-            <a:pPr algn="ctr" indent="0" marL="0">
+            <a:pPr marL="0" indent="0" algn="ctr">
               <a:buNone/>
             </a:pPr>
             <a:r>
@@ -7062,7 +6752,7 @@
           <a:bodyPr wrap="square" lIns="0" tIns="0" rIns="0" bIns="0" rtlCol="0" anchor="t"/>
           <a:lstStyle/>
           <a:p>
-            <a:pPr indent="0" marL="0">
+            <a:pPr marL="0" indent="0">
               <a:buNone/>
             </a:pPr>
             <a:r>
@@ -7079,7 +6769,7 @@
             <a:endParaRPr lang="en-US" sz="800" dirty="0"/>
           </a:p>
           <a:p>
-            <a:pPr indent="0" marL="0">
+            <a:pPr marL="0" indent="0">
               <a:buNone/>
             </a:pPr>
             <a:r>
@@ -7091,12 +6781,12 @@
                 <a:ea typeface="Calibri" pitchFamily="34" charset="-122"/>
                 <a:cs typeface="Calibri" pitchFamily="34" charset="-120"/>
               </a:rPr>
-              <a:t>- matrikelnummer : String</a:t>
+              <a:t>- matrikelnummer : Int</a:t>
             </a:r>
             <a:endParaRPr lang="en-US" sz="800" dirty="0"/>
           </a:p>
           <a:p>
-            <a:pPr indent="0" marL="0">
+            <a:pPr marL="0" indent="0">
               <a:buNone/>
             </a:pPr>
             <a:r>
@@ -7185,7 +6875,7 @@
           <a:bodyPr wrap="square" lIns="0" tIns="0" rIns="0" bIns="0" rtlCol="0" anchor="ctr"/>
           <a:lstStyle/>
           <a:p>
-            <a:pPr algn="ctr" indent="0" marL="0">
+            <a:pPr marL="0" indent="0" algn="ctr">
               <a:buNone/>
             </a:pPr>
             <a:r>
@@ -7224,7 +6914,7 @@
           <a:bodyPr wrap="square" lIns="0" tIns="0" rIns="0" bIns="0" rtlCol="0" anchor="t"/>
           <a:lstStyle/>
           <a:p>
-            <a:pPr indent="0" marL="0">
+            <a:pPr marL="0" indent="0">
               <a:buNone/>
             </a:pPr>
             <a:r>
@@ -7241,7 +6931,7 @@
             <a:endParaRPr lang="en-US" sz="800" dirty="0"/>
           </a:p>
           <a:p>
-            <a:pPr indent="0" marL="0">
+            <a:pPr marL="0" indent="0">
               <a:buNone/>
             </a:pPr>
             <a:r>
@@ -7258,7 +6948,7 @@
             <a:endParaRPr lang="en-US" sz="800" dirty="0"/>
           </a:p>
           <a:p>
-            <a:pPr indent="0" marL="0">
+            <a:pPr marL="0" indent="0">
               <a:buNone/>
             </a:pPr>
             <a:r>
@@ -7275,7 +6965,7 @@
             <a:endParaRPr lang="en-US" sz="800" dirty="0"/>
           </a:p>
           <a:p>
-            <a:pPr indent="0" marL="0">
+            <a:pPr marL="0" indent="0">
               <a:buNone/>
             </a:pPr>
             <a:r>
@@ -7364,7 +7054,7 @@
           <a:bodyPr wrap="square" lIns="0" tIns="0" rIns="0" bIns="0" rtlCol="0" anchor="ctr"/>
           <a:lstStyle/>
           <a:p>
-            <a:pPr algn="ctr" indent="0" marL="0">
+            <a:pPr marL="0" indent="0" algn="ctr">
               <a:buNone/>
             </a:pPr>
             <a:r>
@@ -7403,8 +7093,9 @@
           <a:bodyPr wrap="square" lIns="0" tIns="0" rIns="0" bIns="0" rtlCol="0" anchor="t"/>
           <a:lstStyle/>
           <a:p>
-            <a:pPr indent="0" marL="0">
-              <a:buNone/>
+            <a:pPr marL="171450" indent="-171450">
+              <a:buFontTx/>
+              <a:buChar char="-"/>
             </a:pPr>
             <a:r>
               <a:rPr lang="en-US" sz="800" dirty="0">
@@ -7415,7 +7106,39 @@
                 <a:ea typeface="Calibri" pitchFamily="34" charset="-122"/>
                 <a:cs typeface="Calibri" pitchFamily="34" charset="-120"/>
               </a:rPr>
-              <a:t>- name : String</a:t>
+              <a:t>name : String</a:t>
+            </a:r>
+          </a:p>
+          <a:p>
+            <a:r>
+              <a:rPr lang="en-US" sz="800" dirty="0">
+                <a:solidFill>
+                  <a:srgbClr val="1F2A1F"/>
+                </a:solidFill>
+                <a:latin typeface="Calibri" pitchFamily="34" charset="0"/>
+                <a:cs typeface="Calibri" pitchFamily="34" charset="-120"/>
+              </a:rPr>
+              <a:t>-       THM </a:t>
+            </a:r>
+            <a:r>
+              <a:rPr lang="en-US" sz="800" dirty="0" err="1">
+                <a:solidFill>
+                  <a:srgbClr val="1F2A1F"/>
+                </a:solidFill>
+                <a:latin typeface="Calibri" pitchFamily="34" charset="0"/>
+                <a:cs typeface="Calibri" pitchFamily="34" charset="-120"/>
+              </a:rPr>
+              <a:t>Prüfernummer</a:t>
+            </a:r>
+            <a:r>
+              <a:rPr lang="en-US" sz="800" dirty="0">
+                <a:solidFill>
+                  <a:srgbClr val="1F2A1F"/>
+                </a:solidFill>
+                <a:latin typeface="Calibri" pitchFamily="34" charset="0"/>
+                <a:cs typeface="Calibri" pitchFamily="34" charset="-120"/>
+              </a:rPr>
+              <a:t>: Int</a:t>
             </a:r>
             <a:endParaRPr lang="en-US" sz="800" dirty="0"/>
           </a:p>
@@ -7492,7 +7215,7 @@
           <a:bodyPr wrap="square" lIns="0" tIns="0" rIns="0" bIns="0" rtlCol="0" anchor="ctr"/>
           <a:lstStyle/>
           <a:p>
-            <a:pPr algn="ctr" indent="0" marL="0">
+            <a:pPr marL="0" indent="0" algn="ctr">
               <a:buNone/>
             </a:pPr>
             <a:r>
@@ -7531,7 +7254,7 @@
           <a:bodyPr wrap="square" lIns="0" tIns="0" rIns="0" bIns="0" rtlCol="0" anchor="t"/>
           <a:lstStyle/>
           <a:p>
-            <a:pPr indent="0" marL="0">
+            <a:pPr marL="0" indent="0">
               <a:buNone/>
             </a:pPr>
             <a:r>
@@ -7620,7 +7343,7 @@
           <a:bodyPr wrap="square" lIns="0" tIns="0" rIns="0" bIns="0" rtlCol="0" anchor="ctr"/>
           <a:lstStyle/>
           <a:p>
-            <a:pPr algn="ctr" indent="0" marL="0">
+            <a:pPr marL="0" indent="0" algn="ctr">
               <a:buNone/>
             </a:pPr>
             <a:r>
@@ -7659,7 +7382,7 @@
           <a:bodyPr wrap="square" lIns="0" tIns="0" rIns="0" bIns="0" rtlCol="0" anchor="t"/>
           <a:lstStyle/>
           <a:p>
-            <a:pPr indent="0" marL="0">
+            <a:pPr marL="0" indent="0">
               <a:buNone/>
             </a:pPr>
             <a:r>
@@ -7676,7 +7399,7 @@
             <a:endParaRPr lang="en-US" sz="800" dirty="0"/>
           </a:p>
           <a:p>
-            <a:pPr indent="0" marL="0">
+            <a:pPr marL="0" indent="0">
               <a:buNone/>
             </a:pPr>
             <a:r>
@@ -7738,7 +7461,7 @@
           <a:bodyPr wrap="square" lIns="0" tIns="0" rIns="0" bIns="0" rtlCol="0" anchor="ctr"/>
           <a:lstStyle/>
           <a:p>
-            <a:pPr algn="ctr" indent="0" marL="0">
+            <a:pPr marL="0" indent="0" algn="ctr">
               <a:buNone/>
             </a:pPr>
             <a:r>
@@ -7777,7 +7500,7 @@
           <a:bodyPr wrap="square" lIns="0" tIns="0" rIns="0" bIns="0" rtlCol="0" anchor="ctr"/>
           <a:lstStyle/>
           <a:p>
-            <a:pPr algn="l" indent="0" marL="0">
+            <a:pPr marL="0" indent="0" algn="l">
               <a:buNone/>
             </a:pPr>
             <a:r>
@@ -7816,7 +7539,7 @@
           <a:bodyPr wrap="square" lIns="0" tIns="0" rIns="0" bIns="0" rtlCol="0" anchor="ctr"/>
           <a:lstStyle/>
           <a:p>
-            <a:pPr algn="r" indent="0" marL="0">
+            <a:pPr marL="0" indent="0" algn="r">
               <a:buNone/>
             </a:pPr>
             <a:r>
@@ -7878,7 +7601,7 @@
           <a:bodyPr wrap="square" lIns="0" tIns="0" rIns="0" bIns="0" rtlCol="0" anchor="ctr"/>
           <a:lstStyle/>
           <a:p>
-            <a:pPr algn="ctr" indent="0" marL="0">
+            <a:pPr marL="0" indent="0" algn="ctr">
               <a:buNone/>
             </a:pPr>
             <a:r>
@@ -7917,7 +7640,7 @@
           <a:bodyPr wrap="square" lIns="0" tIns="0" rIns="0" bIns="0" rtlCol="0" anchor="ctr"/>
           <a:lstStyle/>
           <a:p>
-            <a:pPr algn="l" indent="0" marL="0">
+            <a:pPr marL="0" indent="0" algn="l">
               <a:buNone/>
             </a:pPr>
             <a:r>
@@ -7956,7 +7679,7 @@
           <a:bodyPr wrap="square" lIns="0" tIns="0" rIns="0" bIns="0" rtlCol="0" anchor="ctr"/>
           <a:lstStyle/>
           <a:p>
-            <a:pPr algn="r" indent="0" marL="0">
+            <a:pPr marL="0" indent="0" algn="r">
               <a:buNone/>
             </a:pPr>
             <a:r>
@@ -8043,7 +7766,7 @@
           <a:bodyPr wrap="square" lIns="0" tIns="0" rIns="0" bIns="0" rtlCol="0" anchor="ctr"/>
           <a:lstStyle/>
           <a:p>
-            <a:pPr algn="r" indent="0" marL="0">
+            <a:pPr marL="0" indent="0" algn="r">
               <a:buNone/>
             </a:pPr>
             <a:r>
@@ -8082,7 +7805,7 @@
           <a:bodyPr wrap="square" lIns="0" tIns="0" rIns="0" bIns="0" rtlCol="0" anchor="ctr"/>
           <a:lstStyle/>
           <a:p>
-            <a:pPr algn="r" indent="0" marL="0">
+            <a:pPr marL="0" indent="0" algn="r">
               <a:buNone/>
             </a:pPr>
             <a:r>
@@ -8121,7 +7844,7 @@
           <a:bodyPr wrap="square" lIns="0" tIns="0" rIns="0" bIns="0" rtlCol="0" anchor="ctr"/>
           <a:lstStyle/>
           <a:p>
-            <a:pPr algn="r" indent="0" marL="0">
+            <a:pPr marL="0" indent="0" algn="r">
               <a:buNone/>
             </a:pPr>
             <a:r>
@@ -8183,7 +7906,7 @@
           <a:bodyPr wrap="square" lIns="0" tIns="0" rIns="0" bIns="0" rtlCol="0" anchor="ctr"/>
           <a:lstStyle/>
           <a:p>
-            <a:pPr algn="l" indent="0" marL="0">
+            <a:pPr marL="0" indent="0" algn="l">
               <a:buNone/>
             </a:pPr>
             <a:r>
@@ -8222,7 +7945,7 @@
           <a:bodyPr wrap="square" lIns="0" tIns="0" rIns="0" bIns="0" rtlCol="0" anchor="ctr"/>
           <a:lstStyle/>
           <a:p>
-            <a:pPr algn="l" indent="0" marL="0">
+            <a:pPr marL="0" indent="0" algn="l">
               <a:buNone/>
             </a:pPr>
             <a:r>
@@ -8261,7 +7984,7 @@
           <a:bodyPr wrap="square" lIns="0" tIns="0" rIns="0" bIns="0" rtlCol="0" anchor="ctr"/>
           <a:lstStyle/>
           <a:p>
-            <a:pPr indent="0" marL="0">
+            <a:pPr marL="0" indent="0">
               <a:buNone/>
             </a:pPr>
             <a:r>
@@ -8323,7 +8046,7 @@
           <a:bodyPr wrap="square" lIns="0" tIns="0" rIns="0" bIns="0" rtlCol="0" anchor="ctr"/>
           <a:lstStyle/>
           <a:p>
-            <a:pPr algn="l" indent="0" marL="0">
+            <a:pPr marL="0" indent="0" algn="l">
               <a:buNone/>
             </a:pPr>
             <a:r>
@@ -8362,7 +8085,7 @@
           <a:bodyPr wrap="square" lIns="0" tIns="0" rIns="0" bIns="0" rtlCol="0" anchor="ctr"/>
           <a:lstStyle/>
           <a:p>
-            <a:pPr algn="l" indent="0" marL="0">
+            <a:pPr marL="0" indent="0" algn="l">
               <a:buNone/>
             </a:pPr>
             <a:r>
@@ -8401,7 +8124,7 @@
           <a:bodyPr wrap="square" lIns="0" tIns="0" rIns="0" bIns="0" rtlCol="0" anchor="ctr"/>
           <a:lstStyle/>
           <a:p>
-            <a:pPr indent="0" marL="0">
+            <a:pPr marL="0" indent="0">
               <a:buNone/>
             </a:pPr>
             <a:r>
@@ -8467,7 +8190,7 @@
           <a:bodyPr wrap="square" lIns="0" tIns="0" rIns="0" bIns="0" rtlCol="0" anchor="ctr"/>
           <a:lstStyle/>
           <a:p>
-            <a:pPr indent="0" marL="0">
+            <a:pPr marL="0" indent="0">
               <a:buNone/>
             </a:pPr>
             <a:r>
@@ -8481,9 +8204,6 @@
               </a:rPr>
               <a:t>Lesart: </a:t>
             </a:r>
-            <a:pPr indent="0" marL="0">
-              <a:buNone/>
-            </a:pPr>
             <a:r>
               <a:rPr lang="en-US" sz="900" dirty="0">
                 <a:solidFill>
@@ -8515,6 +8235,7 @@
         <a:solidFill>
           <a:srgbClr val="FFFFFF"/>
         </a:solidFill>
+        <a:effectLst/>
       </p:bgPr>
     </p:bg>
     <p:spTree>
@@ -8552,7 +8273,7 @@
           <a:bodyPr wrap="square" lIns="0" tIns="0" rIns="0" bIns="0" rtlCol="0" anchor="ctr"/>
           <a:lstStyle/>
           <a:p>
-            <a:pPr indent="0" marL="0">
+            <a:pPr marL="0" indent="0">
               <a:buNone/>
             </a:pPr>
             <a:r>
@@ -8591,11 +8312,11 @@
           <a:bodyPr wrap="square" lIns="0" tIns="0" rIns="0" bIns="0" rtlCol="0" anchor="ctr"/>
           <a:lstStyle/>
           <a:p>
-            <a:pPr algn="r" indent="0" marL="0">
-              <a:buNone/>
-            </a:pPr>
-            <a:r>
-              <a:rPr lang="en-US" sz="800" b="1" spc="150" kern="0" dirty="0">
+            <a:pPr marL="0" indent="0" algn="r">
+              <a:buNone/>
+            </a:pPr>
+            <a:r>
+              <a:rPr lang="en-US" sz="800" b="1" kern="0" spc="150" dirty="0">
                 <a:solidFill>
                   <a:srgbClr val="97BC62"/>
                 </a:solidFill>
@@ -8630,7 +8351,7 @@
           <a:bodyPr wrap="square" lIns="0" tIns="0" rIns="0" bIns="0" rtlCol="0" anchor="t"/>
           <a:lstStyle/>
           <a:p>
-            <a:pPr indent="0" marL="0">
+            <a:pPr marL="0" indent="0">
               <a:buNone/>
             </a:pPr>
             <a:r>
@@ -8669,7 +8390,7 @@
           <a:bodyPr wrap="square" lIns="0" tIns="0" rIns="0" bIns="0" rtlCol="0" anchor="t"/>
           <a:lstStyle/>
           <a:p>
-            <a:pPr indent="0" marL="0">
+            <a:pPr marL="0" indent="0">
               <a:buNone/>
             </a:pPr>
             <a:r>
@@ -8708,7 +8429,7 @@
           <a:bodyPr wrap="square" lIns="0" tIns="0" rIns="0" bIns="0" rtlCol="0" anchor="t"/>
           <a:lstStyle/>
           <a:p>
-            <a:pPr algn="r" indent="0" marL="0">
+            <a:pPr marL="0" indent="0" algn="r">
               <a:buNone/>
             </a:pPr>
             <a:r>
@@ -8801,7 +8522,7 @@
           <a:bodyPr wrap="square" lIns="0" tIns="0" rIns="0" bIns="0" rtlCol="0" anchor="ctr"/>
           <a:lstStyle/>
           <a:p>
-            <a:pPr algn="ctr" indent="0" marL="0">
+            <a:pPr marL="0" indent="0" algn="ctr">
               <a:buNone/>
             </a:pPr>
             <a:r>
@@ -8840,7 +8561,7 @@
           <a:bodyPr wrap="square" lIns="0" tIns="0" rIns="0" bIns="0" rtlCol="0" anchor="ctr"/>
           <a:lstStyle/>
           <a:p>
-            <a:pPr indent="0" marL="0">
+            <a:pPr marL="0" indent="0">
               <a:buNone/>
             </a:pPr>
             <a:r>
@@ -8879,7 +8600,7 @@
           <a:bodyPr wrap="square" lIns="0" tIns="0" rIns="0" bIns="0" rtlCol="0" anchor="ctr"/>
           <a:lstStyle/>
           <a:p>
-            <a:pPr indent="0" marL="0">
+            <a:pPr marL="0" indent="0">
               <a:buNone/>
             </a:pPr>
             <a:r>
@@ -8972,7 +8693,7 @@
           <a:bodyPr wrap="square" lIns="0" tIns="0" rIns="0" bIns="0" rtlCol="0" anchor="ctr"/>
           <a:lstStyle/>
           <a:p>
-            <a:pPr algn="ctr" indent="0" marL="0">
+            <a:pPr marL="0" indent="0" algn="ctr">
               <a:buNone/>
             </a:pPr>
             <a:r>
@@ -9011,7 +8732,7 @@
           <a:bodyPr wrap="square" lIns="0" tIns="0" rIns="0" bIns="0" rtlCol="0" anchor="ctr"/>
           <a:lstStyle/>
           <a:p>
-            <a:pPr indent="0" marL="0">
+            <a:pPr marL="0" indent="0">
               <a:buNone/>
             </a:pPr>
             <a:r>
@@ -9050,7 +8771,7 @@
           <a:bodyPr wrap="square" lIns="0" tIns="0" rIns="0" bIns="0" rtlCol="0" anchor="ctr"/>
           <a:lstStyle/>
           <a:p>
-            <a:pPr indent="0" marL="0">
+            <a:pPr marL="0" indent="0">
               <a:buNone/>
             </a:pPr>
             <a:r>
@@ -9143,7 +8864,7 @@
           <a:bodyPr wrap="square" lIns="0" tIns="0" rIns="0" bIns="0" rtlCol="0" anchor="ctr"/>
           <a:lstStyle/>
           <a:p>
-            <a:pPr algn="ctr" indent="0" marL="0">
+            <a:pPr marL="0" indent="0" algn="ctr">
               <a:buNone/>
             </a:pPr>
             <a:r>
@@ -9182,7 +8903,7 @@
           <a:bodyPr wrap="square" lIns="0" tIns="0" rIns="0" bIns="0" rtlCol="0" anchor="ctr"/>
           <a:lstStyle/>
           <a:p>
-            <a:pPr indent="0" marL="0">
+            <a:pPr marL="0" indent="0">
               <a:buNone/>
             </a:pPr>
             <a:r>
@@ -9221,7 +8942,7 @@
           <a:bodyPr wrap="square" lIns="0" tIns="0" rIns="0" bIns="0" rtlCol="0" anchor="ctr"/>
           <a:lstStyle/>
           <a:p>
-            <a:pPr indent="0" marL="0">
+            <a:pPr marL="0" indent="0">
               <a:buNone/>
             </a:pPr>
             <a:r>
@@ -9314,7 +9035,7 @@
           <a:bodyPr wrap="square" lIns="0" tIns="0" rIns="0" bIns="0" rtlCol="0" anchor="ctr"/>
           <a:lstStyle/>
           <a:p>
-            <a:pPr algn="ctr" indent="0" marL="0">
+            <a:pPr marL="0" indent="0" algn="ctr">
               <a:buNone/>
             </a:pPr>
             <a:r>
@@ -9353,7 +9074,7 @@
           <a:bodyPr wrap="square" lIns="0" tIns="0" rIns="0" bIns="0" rtlCol="0" anchor="ctr"/>
           <a:lstStyle/>
           <a:p>
-            <a:pPr indent="0" marL="0">
+            <a:pPr marL="0" indent="0">
               <a:buNone/>
             </a:pPr>
             <a:r>
@@ -9392,7 +9113,7 @@
           <a:bodyPr wrap="square" lIns="0" tIns="0" rIns="0" bIns="0" rtlCol="0" anchor="ctr"/>
           <a:lstStyle/>
           <a:p>
-            <a:pPr indent="0" marL="0">
+            <a:pPr marL="0" indent="0">
               <a:buNone/>
             </a:pPr>
             <a:r>
@@ -9485,7 +9206,7 @@
           <a:bodyPr wrap="square" lIns="0" tIns="0" rIns="0" bIns="0" rtlCol="0" anchor="ctr"/>
           <a:lstStyle/>
           <a:p>
-            <a:pPr algn="ctr" indent="0" marL="0">
+            <a:pPr marL="0" indent="0" algn="ctr">
               <a:buNone/>
             </a:pPr>
             <a:r>
@@ -9524,7 +9245,7 @@
           <a:bodyPr wrap="square" lIns="0" tIns="0" rIns="0" bIns="0" rtlCol="0" anchor="ctr"/>
           <a:lstStyle/>
           <a:p>
-            <a:pPr indent="0" marL="0">
+            <a:pPr marL="0" indent="0">
               <a:buNone/>
             </a:pPr>
             <a:r>
@@ -9563,7 +9284,7 @@
           <a:bodyPr wrap="square" lIns="0" tIns="0" rIns="0" bIns="0" rtlCol="0" anchor="ctr"/>
           <a:lstStyle/>
           <a:p>
-            <a:pPr indent="0" marL="0">
+            <a:pPr marL="0" indent="0">
               <a:buNone/>
             </a:pPr>
             <a:r>
@@ -9656,7 +9377,7 @@
           <a:bodyPr wrap="square" lIns="0" tIns="0" rIns="0" bIns="0" rtlCol="0" anchor="ctr"/>
           <a:lstStyle/>
           <a:p>
-            <a:pPr algn="ctr" indent="0" marL="0">
+            <a:pPr marL="0" indent="0" algn="ctr">
               <a:buNone/>
             </a:pPr>
             <a:r>
@@ -9695,7 +9416,7 @@
           <a:bodyPr wrap="square" lIns="0" tIns="0" rIns="0" bIns="0" rtlCol="0" anchor="ctr"/>
           <a:lstStyle/>
           <a:p>
-            <a:pPr indent="0" marL="0">
+            <a:pPr marL="0" indent="0">
               <a:buNone/>
             </a:pPr>
             <a:r>
@@ -9734,7 +9455,7 @@
           <a:bodyPr wrap="square" lIns="0" tIns="0" rIns="0" bIns="0" rtlCol="0" anchor="ctr"/>
           <a:lstStyle/>
           <a:p>
-            <a:pPr indent="0" marL="0">
+            <a:pPr marL="0" indent="0">
               <a:buNone/>
             </a:pPr>
             <a:r>
@@ -9773,7 +9494,7 @@
           <a:bodyPr wrap="square" lIns="0" tIns="0" rIns="0" bIns="0" rtlCol="0" anchor="ctr"/>
           <a:lstStyle/>
           <a:p>
-            <a:pPr indent="0" marL="0">
+            <a:pPr marL="0" indent="0">
               <a:buNone/>
             </a:pPr>
             <a:r>
@@ -9787,9 +9508,6 @@
               </a:rPr>
               <a:t>Satzschablone:  </a:t>
             </a:r>
-            <a:pPr indent="0" marL="0">
-              <a:buNone/>
-            </a:pPr>
             <a:r>
               <a:rPr lang="en-US" sz="900" dirty="0">
                 <a:solidFill>
@@ -9821,6 +9539,7 @@
         <a:solidFill>
           <a:srgbClr val="FFFFFF"/>
         </a:solidFill>
+        <a:effectLst/>
       </p:bgPr>
     </p:bg>
     <p:spTree>
@@ -9858,7 +9577,7 @@
           <a:bodyPr wrap="square" lIns="0" tIns="0" rIns="0" bIns="0" rtlCol="0" anchor="ctr"/>
           <a:lstStyle/>
           <a:p>
-            <a:pPr indent="0" marL="0">
+            <a:pPr marL="0" indent="0">
               <a:buNone/>
             </a:pPr>
             <a:r>
@@ -9897,11 +9616,11 @@
           <a:bodyPr wrap="square" lIns="0" tIns="0" rIns="0" bIns="0" rtlCol="0" anchor="ctr"/>
           <a:lstStyle/>
           <a:p>
-            <a:pPr algn="r" indent="0" marL="0">
-              <a:buNone/>
-            </a:pPr>
-            <a:r>
-              <a:rPr lang="en-US" sz="800" b="1" spc="150" kern="0" dirty="0">
+            <a:pPr marL="0" indent="0" algn="r">
+              <a:buNone/>
+            </a:pPr>
+            <a:r>
+              <a:rPr lang="en-US" sz="800" b="1" kern="0" spc="150" dirty="0">
                 <a:solidFill>
                   <a:srgbClr val="97BC62"/>
                 </a:solidFill>
@@ -9936,7 +9655,7 @@
           <a:bodyPr wrap="square" lIns="0" tIns="0" rIns="0" bIns="0" rtlCol="0" anchor="t"/>
           <a:lstStyle/>
           <a:p>
-            <a:pPr indent="0" marL="0">
+            <a:pPr marL="0" indent="0">
               <a:buNone/>
             </a:pPr>
             <a:r>
@@ -9975,7 +9694,7 @@
           <a:bodyPr wrap="square" lIns="0" tIns="0" rIns="0" bIns="0" rtlCol="0" anchor="t"/>
           <a:lstStyle/>
           <a:p>
-            <a:pPr indent="0" marL="0">
+            <a:pPr marL="0" indent="0">
               <a:buNone/>
             </a:pPr>
             <a:r>
@@ -10014,7 +9733,7 @@
           <a:bodyPr wrap="square" lIns="0" tIns="0" rIns="0" bIns="0" rtlCol="0" anchor="t"/>
           <a:lstStyle/>
           <a:p>
-            <a:pPr algn="r" indent="0" marL="0">
+            <a:pPr marL="0" indent="0" algn="r">
               <a:buNone/>
             </a:pPr>
             <a:r>
@@ -10041,23 +9760,41 @@
           <p:nvPr>
             <p:extLst>
               <p:ext uri="{D42A27DB-BD31-4B8C-83A1-F6EECF244321}">
-                <p14:modId xmlns:p14="http://schemas.microsoft.com/office/powerpoint/2010/main" val="1579011935"/>
+                <p14:modId xmlns:p14="http://schemas.microsoft.com/office/powerpoint/2010/main" val="993417332"/>
               </p:ext>
             </p:extLst>
           </p:nvPr>
         </p:nvGraphicFramePr>
         <p:xfrm>
           <a:off x="411480" y="987552"/>
-          <a:ext cx="8321040" cy="914400"/>
+          <a:ext cx="8321040" cy="3474720"/>
         </p:xfrm>
         <a:graphic>
           <a:graphicData uri="http://schemas.openxmlformats.org/drawingml/2006/table">
             <a:tbl>
               <a:tblPr/>
               <a:tblGrid>
-                <a:gridCol w="1051560"/>
-                <a:gridCol w="3063240"/>
-                <a:gridCol w="4206240"/>
+                <a:gridCol w="1051560">
+                  <a:extLst>
+                    <a:ext uri="{9D8B030D-6E8A-4147-A177-3AD203B41FA5}">
+                      <a16:colId xmlns:a16="http://schemas.microsoft.com/office/drawing/2014/main" val="20000"/>
+                    </a:ext>
+                  </a:extLst>
+                </a:gridCol>
+                <a:gridCol w="3063240">
+                  <a:extLst>
+                    <a:ext uri="{9D8B030D-6E8A-4147-A177-3AD203B41FA5}">
+                      <a16:colId xmlns:a16="http://schemas.microsoft.com/office/drawing/2014/main" val="20001"/>
+                    </a:ext>
+                  </a:extLst>
+                </a:gridCol>
+                <a:gridCol w="4206240">
+                  <a:extLst>
+                    <a:ext uri="{9D8B030D-6E8A-4147-A177-3AD203B41FA5}">
+                      <a16:colId xmlns:a16="http://schemas.microsoft.com/office/drawing/2014/main" val="20002"/>
+                    </a:ext>
+                  </a:extLst>
+                </a:gridCol>
               </a:tblGrid>
               <a:tr h="292608">
                 <a:tc>
@@ -10065,7 +9802,7 @@
                     <a:bodyPr/>
                     <a:lstStyle/>
                     <a:p>
-                      <a:pPr indent="0" marL="0">
+                      <a:pPr marL="0" indent="0">
                         <a:buNone/>
                       </a:pPr>
                       <a:r>
@@ -10133,7 +9870,7 @@
                     <a:bodyPr/>
                     <a:lstStyle/>
                     <a:p>
-                      <a:pPr indent="0" marL="0">
+                      <a:pPr marL="0" indent="0">
                         <a:buNone/>
                       </a:pPr>
                       <a:r>
@@ -10201,7 +9938,7 @@
                     <a:bodyPr/>
                     <a:lstStyle/>
                     <a:p>
-                      <a:pPr indent="0" marL="0">
+                      <a:pPr marL="0" indent="0">
                         <a:buNone/>
                       </a:pPr>
                       <a:r>
@@ -10264,6 +10001,11 @@
                     </a:solidFill>
                   </a:tcPr>
                 </a:tc>
+                <a:extLst>
+                  <a:ext uri="{0D108BD9-81ED-4DB2-BD59-A6C34878D82A}">
+                    <a16:rowId xmlns:a16="http://schemas.microsoft.com/office/drawing/2014/main" val="10000"/>
+                  </a:ext>
+                </a:extLst>
               </a:tr>
               <a:tr h="603504">
                 <a:tc>
@@ -10271,7 +10013,7 @@
                     <a:bodyPr/>
                     <a:lstStyle/>
                     <a:p>
-                      <a:pPr indent="0" marL="0">
+                      <a:pPr marL="0" indent="0">
                         <a:buNone/>
                       </a:pPr>
                       <a:r>
@@ -10339,7 +10081,7 @@
                     <a:bodyPr/>
                     <a:lstStyle/>
                     <a:p>
-                      <a:pPr indent="0" marL="0">
+                      <a:pPr marL="0" indent="0">
                         <a:buNone/>
                       </a:pPr>
                       <a:r>
@@ -10404,7 +10146,7 @@
                     <a:bodyPr/>
                     <a:lstStyle/>
                     <a:p>
-                      <a:pPr indent="0" marL="0">
+                      <a:pPr marL="0" indent="0">
                         <a:buNone/>
                       </a:pPr>
                       <a:r>
@@ -10464,6 +10206,11 @@
                     </a:lnB>
                   </a:tcPr>
                 </a:tc>
+                <a:extLst>
+                  <a:ext uri="{0D108BD9-81ED-4DB2-BD59-A6C34878D82A}">
+                    <a16:rowId xmlns:a16="http://schemas.microsoft.com/office/drawing/2014/main" val="10001"/>
+                  </a:ext>
+                </a:extLst>
               </a:tr>
               <a:tr h="530352">
                 <a:tc>
@@ -10471,7 +10218,7 @@
                     <a:bodyPr/>
                     <a:lstStyle/>
                     <a:p>
-                      <a:pPr indent="0" marL="0">
+                      <a:pPr marL="0" indent="0">
                         <a:buNone/>
                       </a:pPr>
                       <a:r>
@@ -10539,7 +10286,7 @@
                     <a:bodyPr/>
                     <a:lstStyle/>
                     <a:p>
-                      <a:pPr indent="0" marL="0">
+                      <a:pPr marL="0" indent="0">
                         <a:buNone/>
                       </a:pPr>
                       <a:r>
@@ -10604,7 +10351,7 @@
                     <a:bodyPr/>
                     <a:lstStyle/>
                     <a:p>
-                      <a:pPr indent="0" marL="0">
+                      <a:pPr marL="0" indent="0">
                         <a:buNone/>
                       </a:pPr>
                       <a:r>
@@ -10664,6 +10411,11 @@
                     </a:lnB>
                   </a:tcPr>
                 </a:tc>
+                <a:extLst>
+                  <a:ext uri="{0D108BD9-81ED-4DB2-BD59-A6C34878D82A}">
+                    <a16:rowId xmlns:a16="http://schemas.microsoft.com/office/drawing/2014/main" val="10002"/>
+                  </a:ext>
+                </a:extLst>
               </a:tr>
               <a:tr h="530352">
                 <a:tc>
@@ -10671,7 +10423,7 @@
                     <a:bodyPr/>
                     <a:lstStyle/>
                     <a:p>
-                      <a:pPr indent="0" marL="0">
+                      <a:pPr marL="0" indent="0">
                         <a:buNone/>
                       </a:pPr>
                       <a:r>
@@ -10739,7 +10491,7 @@
                     <a:bodyPr/>
                     <a:lstStyle/>
                     <a:p>
-                      <a:pPr indent="0" marL="0">
+                      <a:pPr marL="0" indent="0">
                         <a:buNone/>
                       </a:pPr>
                       <a:r>
@@ -10804,7 +10556,7 @@
                     <a:bodyPr/>
                     <a:lstStyle/>
                     <a:p>
-                      <a:pPr indent="0" marL="0">
+                      <a:pPr marL="0" indent="0">
                         <a:buNone/>
                       </a:pPr>
                       <a:r>
@@ -10864,6 +10616,11 @@
                     </a:lnB>
                   </a:tcPr>
                 </a:tc>
+                <a:extLst>
+                  <a:ext uri="{0D108BD9-81ED-4DB2-BD59-A6C34878D82A}">
+                    <a16:rowId xmlns:a16="http://schemas.microsoft.com/office/drawing/2014/main" val="10003"/>
+                  </a:ext>
+                </a:extLst>
               </a:tr>
               <a:tr h="457200">
                 <a:tc>
@@ -10871,7 +10628,7 @@
                     <a:bodyPr/>
                     <a:lstStyle/>
                     <a:p>
-                      <a:pPr indent="0" marL="0">
+                      <a:pPr marL="0" indent="0">
                         <a:buNone/>
                       </a:pPr>
                       <a:r>
@@ -10939,9 +10696,20 @@
                     <a:bodyPr/>
                     <a:lstStyle/>
                     <a:p>
-                      <a:pPr indent="0" marL="0">
+                      <a:pPr marL="0" indent="0">
                         <a:buNone/>
                       </a:pPr>
+                      <a:r>
+                        <a:rPr lang="en-US" sz="850" dirty="0" err="1">
+                          <a:solidFill>
+                            <a:srgbClr val="1F2A1F"/>
+                          </a:solidFill>
+                          <a:latin typeface="Calibri" pitchFamily="34" charset="0"/>
+                          <a:ea typeface="Calibri" pitchFamily="34" charset="-122"/>
+                          <a:cs typeface="Calibri" pitchFamily="34" charset="-120"/>
+                        </a:rPr>
+                        <a:t>Antrag</a:t>
+                      </a:r>
                       <a:r>
                         <a:rPr lang="en-US" sz="850" dirty="0">
                           <a:solidFill>
@@ -10951,7 +10719,106 @@
                           <a:ea typeface="Calibri" pitchFamily="34" charset="-122"/>
                           <a:cs typeface="Calibri" pitchFamily="34" charset="-120"/>
                         </a:rPr>
-                        <a:t>Antrag vom Prüfungsausschuss angenommen; Thema freigegeben</a:t>
+                        <a:t> Erst </a:t>
+                      </a:r>
+                      <a:r>
+                        <a:rPr lang="en-US" sz="850" dirty="0" err="1">
+                          <a:solidFill>
+                            <a:srgbClr val="1F2A1F"/>
+                          </a:solidFill>
+                          <a:latin typeface="Calibri" pitchFamily="34" charset="0"/>
+                          <a:ea typeface="Calibri" pitchFamily="34" charset="-122"/>
+                          <a:cs typeface="Calibri" pitchFamily="34" charset="-120"/>
+                        </a:rPr>
+                        <a:t>Prüfer</a:t>
+                      </a:r>
+                      <a:r>
+                        <a:rPr lang="en-US" sz="850" dirty="0">
+                          <a:solidFill>
+                            <a:srgbClr val="1F2A1F"/>
+                          </a:solidFill>
+                          <a:latin typeface="Calibri" pitchFamily="34" charset="0"/>
+                          <a:ea typeface="Calibri" pitchFamily="34" charset="-122"/>
+                          <a:cs typeface="Calibri" pitchFamily="34" charset="-120"/>
+                        </a:rPr>
+                        <a:t> angenommen; Thema </a:t>
+                      </a:r>
+                      <a:r>
+                        <a:rPr lang="en-US" sz="850" dirty="0" err="1">
+                          <a:solidFill>
+                            <a:srgbClr val="1F2A1F"/>
+                          </a:solidFill>
+                          <a:latin typeface="Calibri" pitchFamily="34" charset="0"/>
+                          <a:ea typeface="Calibri" pitchFamily="34" charset="-122"/>
+                          <a:cs typeface="Calibri" pitchFamily="34" charset="-120"/>
+                        </a:rPr>
+                        <a:t>freigegeben</a:t>
+                      </a:r>
+                      <a:r>
+                        <a:rPr lang="en-US" sz="850" dirty="0">
+                          <a:solidFill>
+                            <a:srgbClr val="1F2A1F"/>
+                          </a:solidFill>
+                          <a:latin typeface="Calibri" pitchFamily="34" charset="0"/>
+                          <a:ea typeface="Calibri" pitchFamily="34" charset="-122"/>
+                          <a:cs typeface="Calibri" pitchFamily="34" charset="-120"/>
+                        </a:rPr>
+                        <a:t> und </a:t>
+                      </a:r>
+                      <a:r>
+                        <a:rPr lang="en-US" sz="850" dirty="0" err="1">
+                          <a:solidFill>
+                            <a:srgbClr val="1F2A1F"/>
+                          </a:solidFill>
+                          <a:latin typeface="Calibri" pitchFamily="34" charset="0"/>
+                          <a:ea typeface="Calibri" pitchFamily="34" charset="-122"/>
+                          <a:cs typeface="Calibri" pitchFamily="34" charset="-120"/>
+                        </a:rPr>
+                        <a:t>bestätig</a:t>
+                      </a:r>
+                      <a:r>
+                        <a:rPr lang="en-US" sz="850" dirty="0">
+                          <a:solidFill>
+                            <a:srgbClr val="1F2A1F"/>
+                          </a:solidFill>
+                          <a:latin typeface="Calibri" pitchFamily="34" charset="0"/>
+                          <a:ea typeface="Calibri" pitchFamily="34" charset="-122"/>
+                          <a:cs typeface="Calibri" pitchFamily="34" charset="-120"/>
+                        </a:rPr>
+                        <a:t> </a:t>
+                      </a:r>
+                      <a:r>
+                        <a:rPr lang="en-US" sz="850" dirty="0" err="1">
+                          <a:solidFill>
+                            <a:srgbClr val="1F2A1F"/>
+                          </a:solidFill>
+                          <a:latin typeface="Calibri" pitchFamily="34" charset="0"/>
+                          <a:ea typeface="Calibri" pitchFamily="34" charset="-122"/>
+                          <a:cs typeface="Calibri" pitchFamily="34" charset="-120"/>
+                        </a:rPr>
+                        <a:t>über</a:t>
+                      </a:r>
+                      <a:r>
+                        <a:rPr lang="en-US" sz="850" dirty="0">
+                          <a:solidFill>
+                            <a:srgbClr val="1F2A1F"/>
+                          </a:solidFill>
+                          <a:latin typeface="Calibri" pitchFamily="34" charset="0"/>
+                          <a:ea typeface="Calibri" pitchFamily="34" charset="-122"/>
+                          <a:cs typeface="Calibri" pitchFamily="34" charset="-120"/>
+                        </a:rPr>
+                        <a:t> den Erst </a:t>
+                      </a:r>
+                      <a:r>
+                        <a:rPr lang="en-US" sz="850" dirty="0" err="1">
+                          <a:solidFill>
+                            <a:srgbClr val="1F2A1F"/>
+                          </a:solidFill>
+                          <a:latin typeface="Calibri" pitchFamily="34" charset="0"/>
+                          <a:ea typeface="Calibri" pitchFamily="34" charset="-122"/>
+                          <a:cs typeface="Calibri" pitchFamily="34" charset="-120"/>
+                        </a:rPr>
+                        <a:t>Prüfer</a:t>
                       </a:r>
                       <a:endParaRPr lang="en-US" sz="850" dirty="0">
                         <a:latin typeface="Calibri" charset="0"/>
@@ -11004,7 +10871,7 @@
                     <a:bodyPr/>
                     <a:lstStyle/>
                     <a:p>
-                      <a:pPr indent="0" marL="0">
+                      <a:pPr marL="0" indent="0">
                         <a:buNone/>
                       </a:pPr>
                       <a:r>
@@ -11064,6 +10931,11 @@
                     </a:lnB>
                   </a:tcPr>
                 </a:tc>
+                <a:extLst>
+                  <a:ext uri="{0D108BD9-81ED-4DB2-BD59-A6C34878D82A}">
+                    <a16:rowId xmlns:a16="http://schemas.microsoft.com/office/drawing/2014/main" val="10004"/>
+                  </a:ext>
+                </a:extLst>
               </a:tr>
               <a:tr h="603504">
                 <a:tc>
@@ -11071,7 +10943,7 @@
                     <a:bodyPr/>
                     <a:lstStyle/>
                     <a:p>
-                      <a:pPr indent="0" marL="0">
+                      <a:pPr marL="0" indent="0">
                         <a:buNone/>
                       </a:pPr>
                       <a:r>
@@ -11139,7 +11011,7 @@
                     <a:bodyPr/>
                     <a:lstStyle/>
                     <a:p>
-                      <a:pPr indent="0" marL="0">
+                      <a:pPr marL="0" indent="0">
                         <a:buNone/>
                       </a:pPr>
                       <a:r>
@@ -11204,7 +11076,7 @@
                     <a:bodyPr/>
                     <a:lstStyle/>
                     <a:p>
-                      <a:pPr indent="0" marL="0">
+                      <a:pPr marL="0" indent="0">
                         <a:buNone/>
                       </a:pPr>
                       <a:r>
@@ -11264,6 +11136,11 @@
                     </a:lnB>
                   </a:tcPr>
                 </a:tc>
+                <a:extLst>
+                  <a:ext uri="{0D108BD9-81ED-4DB2-BD59-A6C34878D82A}">
+                    <a16:rowId xmlns:a16="http://schemas.microsoft.com/office/drawing/2014/main" val="10005"/>
+                  </a:ext>
+                </a:extLst>
               </a:tr>
               <a:tr h="457200">
                 <a:tc>
@@ -11271,7 +11148,7 @@
                     <a:bodyPr/>
                     <a:lstStyle/>
                     <a:p>
-                      <a:pPr indent="0" marL="0">
+                      <a:pPr marL="0" indent="0">
                         <a:buNone/>
                       </a:pPr>
                       <a:r>
@@ -11339,7 +11216,7 @@
                     <a:bodyPr/>
                     <a:lstStyle/>
                     <a:p>
-                      <a:pPr indent="0" marL="0">
+                      <a:pPr marL="0" indent="0">
                         <a:buNone/>
                       </a:pPr>
                       <a:r>
@@ -11351,7 +11228,7 @@
                           <a:ea typeface="Calibri" pitchFamily="34" charset="-122"/>
                           <a:cs typeface="Calibri" pitchFamily="34" charset="-120"/>
                         </a:rPr>
-                        <a:t>Webbasierte Anwendung im Browser, am Desktop und am Smartphone</a:t>
+                        <a:t>Webbasierte Anwendung im Browser, am Desktop.</a:t>
                       </a:r>
                       <a:endParaRPr lang="en-US" sz="850" dirty="0">
                         <a:latin typeface="Calibri" charset="0"/>
@@ -11404,7 +11281,7 @@
                     <a:bodyPr/>
                     <a:lstStyle/>
                     <a:p>
-                      <a:pPr indent="0" marL="0">
+                      <a:pPr marL="0" indent="0">
                         <a:buNone/>
                       </a:pPr>
                       <a:r>
@@ -11416,7 +11293,29 @@
                           <a:ea typeface="Calibri" pitchFamily="34" charset="-122"/>
                           <a:cs typeface="Calibri" pitchFamily="34" charset="-120"/>
                         </a:rPr>
-                        <a:t>Die Themenfreigabe muss auf beiden Gerätetypen komfortabel möglich sein.</a:t>
+                        <a:t>Die Themenfreigabe muss auf dem </a:t>
+                      </a:r>
+                      <a:r>
+                        <a:rPr lang="en-US" sz="850" dirty="0" err="1">
+                          <a:solidFill>
+                            <a:srgbClr val="1F2A1F"/>
+                          </a:solidFill>
+                          <a:latin typeface="Calibri" pitchFamily="34" charset="0"/>
+                          <a:ea typeface="Calibri" pitchFamily="34" charset="-122"/>
+                          <a:cs typeface="Calibri" pitchFamily="34" charset="-120"/>
+                        </a:rPr>
+                        <a:t>Gerätetyp</a:t>
+                      </a:r>
+                      <a:r>
+                        <a:rPr lang="en-US" sz="850" dirty="0">
+                          <a:solidFill>
+                            <a:srgbClr val="1F2A1F"/>
+                          </a:solidFill>
+                          <a:latin typeface="Calibri" pitchFamily="34" charset="0"/>
+                          <a:ea typeface="Calibri" pitchFamily="34" charset="-122"/>
+                          <a:cs typeface="Calibri" pitchFamily="34" charset="-120"/>
+                        </a:rPr>
+                        <a:t> komfortabel möglich sein.</a:t>
                       </a:r>
                       <a:endParaRPr lang="en-US" sz="850" dirty="0">
                         <a:latin typeface="Calibri" charset="0"/>
@@ -11464,6 +11363,11 @@
                     </a:lnB>
                   </a:tcPr>
                 </a:tc>
+                <a:extLst>
+                  <a:ext uri="{0D108BD9-81ED-4DB2-BD59-A6C34878D82A}">
+                    <a16:rowId xmlns:a16="http://schemas.microsoft.com/office/drawing/2014/main" val="10006"/>
+                  </a:ext>
+                </a:extLst>
               </a:tr>
             </a:tbl>
           </a:graphicData>
@@ -11485,6 +11389,7 @@
         <a:solidFill>
           <a:srgbClr val="FFFFFF"/>
         </a:solidFill>
+        <a:effectLst/>
       </p:bgPr>
     </p:bg>
     <p:spTree>
@@ -11522,7 +11427,7 @@
           <a:bodyPr wrap="square" lIns="0" tIns="0" rIns="0" bIns="0" rtlCol="0" anchor="ctr"/>
           <a:lstStyle/>
           <a:p>
-            <a:pPr indent="0" marL="0">
+            <a:pPr marL="0" indent="0">
               <a:buNone/>
             </a:pPr>
             <a:r>
@@ -11561,11 +11466,11 @@
           <a:bodyPr wrap="square" lIns="0" tIns="0" rIns="0" bIns="0" rtlCol="0" anchor="ctr"/>
           <a:lstStyle/>
           <a:p>
-            <a:pPr algn="r" indent="0" marL="0">
-              <a:buNone/>
-            </a:pPr>
-            <a:r>
-              <a:rPr lang="en-US" sz="800" b="1" spc="150" kern="0" dirty="0">
+            <a:pPr marL="0" indent="0" algn="r">
+              <a:buNone/>
+            </a:pPr>
+            <a:r>
+              <a:rPr lang="en-US" sz="800" b="1" kern="0" spc="150" dirty="0">
                 <a:solidFill>
                   <a:srgbClr val="97BC62"/>
                 </a:solidFill>
@@ -11600,7 +11505,7 @@
           <a:bodyPr wrap="square" lIns="0" tIns="0" rIns="0" bIns="0" rtlCol="0" anchor="t"/>
           <a:lstStyle/>
           <a:p>
-            <a:pPr indent="0" marL="0">
+            <a:pPr marL="0" indent="0">
               <a:buNone/>
             </a:pPr>
             <a:r>
@@ -11639,7 +11544,7 @@
           <a:bodyPr wrap="square" lIns="0" tIns="0" rIns="0" bIns="0" rtlCol="0" anchor="t"/>
           <a:lstStyle/>
           <a:p>
-            <a:pPr indent="0" marL="0">
+            <a:pPr marL="0" indent="0">
               <a:buNone/>
             </a:pPr>
             <a:r>
@@ -11678,7 +11583,7 @@
           <a:bodyPr wrap="square" lIns="0" tIns="0" rIns="0" bIns="0" rtlCol="0" anchor="t"/>
           <a:lstStyle/>
           <a:p>
-            <a:pPr algn="r" indent="0" marL="0">
+            <a:pPr marL="0" indent="0" algn="r">
               <a:buNone/>
             </a:pPr>
             <a:r>
@@ -11712,16 +11617,34 @@
         </p:nvGraphicFramePr>
         <p:xfrm>
           <a:off x="411480" y="987552"/>
-          <a:ext cx="8321040" cy="914400"/>
+          <a:ext cx="8321040" cy="2999232"/>
         </p:xfrm>
         <a:graphic>
           <a:graphicData uri="http://schemas.openxmlformats.org/drawingml/2006/table">
             <a:tbl>
               <a:tblPr/>
               <a:tblGrid>
-                <a:gridCol w="1371600"/>
-                <a:gridCol w="3840480"/>
-                <a:gridCol w="3108960"/>
+                <a:gridCol w="1371600">
+                  <a:extLst>
+                    <a:ext uri="{9D8B030D-6E8A-4147-A177-3AD203B41FA5}">
+                      <a16:colId xmlns:a16="http://schemas.microsoft.com/office/drawing/2014/main" val="20000"/>
+                    </a:ext>
+                  </a:extLst>
+                </a:gridCol>
+                <a:gridCol w="3840480">
+                  <a:extLst>
+                    <a:ext uri="{9D8B030D-6E8A-4147-A177-3AD203B41FA5}">
+                      <a16:colId xmlns:a16="http://schemas.microsoft.com/office/drawing/2014/main" val="20001"/>
+                    </a:ext>
+                  </a:extLst>
+                </a:gridCol>
+                <a:gridCol w="3108960">
+                  <a:extLst>
+                    <a:ext uri="{9D8B030D-6E8A-4147-A177-3AD203B41FA5}">
+                      <a16:colId xmlns:a16="http://schemas.microsoft.com/office/drawing/2014/main" val="20002"/>
+                    </a:ext>
+                  </a:extLst>
+                </a:gridCol>
               </a:tblGrid>
               <a:tr h="292608">
                 <a:tc>
@@ -11729,7 +11652,7 @@
                     <a:bodyPr/>
                     <a:lstStyle/>
                     <a:p>
-                      <a:pPr indent="0" marL="0">
+                      <a:pPr marL="0" indent="0">
                         <a:buNone/>
                       </a:pPr>
                       <a:r>
@@ -11797,7 +11720,7 @@
                     <a:bodyPr/>
                     <a:lstStyle/>
                     <a:p>
-                      <a:pPr indent="0" marL="0">
+                      <a:pPr marL="0" indent="0">
                         <a:buNone/>
                       </a:pPr>
                       <a:r>
@@ -11865,7 +11788,7 @@
                     <a:bodyPr/>
                     <a:lstStyle/>
                     <a:p>
-                      <a:pPr indent="0" marL="0">
+                      <a:pPr marL="0" indent="0">
                         <a:buNone/>
                       </a:pPr>
                       <a:r>
@@ -11928,6 +11851,11 @@
                     </a:solidFill>
                   </a:tcPr>
                 </a:tc>
+                <a:extLst>
+                  <a:ext uri="{0D108BD9-81ED-4DB2-BD59-A6C34878D82A}">
+                    <a16:rowId xmlns:a16="http://schemas.microsoft.com/office/drawing/2014/main" val="10000"/>
+                  </a:ext>
+                </a:extLst>
               </a:tr>
               <a:tr h="676656">
                 <a:tc>
@@ -11935,7 +11863,7 @@
                     <a:bodyPr/>
                     <a:lstStyle/>
                     <a:p>
-                      <a:pPr indent="0" marL="0">
+                      <a:pPr marL="0" indent="0">
                         <a:buNone/>
                       </a:pPr>
                       <a:r>
@@ -12003,7 +11931,7 @@
                     <a:bodyPr/>
                     <a:lstStyle/>
                     <a:p>
-                      <a:pPr indent="0" marL="0">
+                      <a:pPr marL="0" indent="0">
                         <a:buNone/>
                       </a:pPr>
                       <a:r>
@@ -12068,7 +11996,7 @@
                     <a:bodyPr/>
                     <a:lstStyle/>
                     <a:p>
-                      <a:pPr indent="0" marL="0">
+                      <a:pPr marL="0" indent="0">
                         <a:buNone/>
                       </a:pPr>
                       <a:r>
@@ -12128,6 +12056,11 @@
                     </a:lnB>
                   </a:tcPr>
                 </a:tc>
+                <a:extLst>
+                  <a:ext uri="{0D108BD9-81ED-4DB2-BD59-A6C34878D82A}">
+                    <a16:rowId xmlns:a16="http://schemas.microsoft.com/office/drawing/2014/main" val="10001"/>
+                  </a:ext>
+                </a:extLst>
               </a:tr>
               <a:tr h="603504">
                 <a:tc>
@@ -12135,7 +12068,7 @@
                     <a:bodyPr/>
                     <a:lstStyle/>
                     <a:p>
-                      <a:pPr indent="0" marL="0">
+                      <a:pPr marL="0" indent="0">
                         <a:buNone/>
                       </a:pPr>
                       <a:r>
@@ -12203,7 +12136,7 @@
                     <a:bodyPr/>
                     <a:lstStyle/>
                     <a:p>
-                      <a:pPr indent="0" marL="0">
+                      <a:pPr marL="0" indent="0">
                         <a:buNone/>
                       </a:pPr>
                       <a:r>
@@ -12268,7 +12201,7 @@
                     <a:bodyPr/>
                     <a:lstStyle/>
                     <a:p>
-                      <a:pPr indent="0" marL="0">
+                      <a:pPr marL="0" indent="0">
                         <a:buNone/>
                       </a:pPr>
                       <a:r>
@@ -12328,6 +12261,11 @@
                     </a:lnB>
                   </a:tcPr>
                 </a:tc>
+                <a:extLst>
+                  <a:ext uri="{0D108BD9-81ED-4DB2-BD59-A6C34878D82A}">
+                    <a16:rowId xmlns:a16="http://schemas.microsoft.com/office/drawing/2014/main" val="10002"/>
+                  </a:ext>
+                </a:extLst>
               </a:tr>
               <a:tr h="749808">
                 <a:tc>
@@ -12335,7 +12273,7 @@
                     <a:bodyPr/>
                     <a:lstStyle/>
                     <a:p>
-                      <a:pPr indent="0" marL="0">
+                      <a:pPr marL="0" indent="0">
                         <a:buNone/>
                       </a:pPr>
                       <a:r>
@@ -12403,7 +12341,7 @@
                     <a:bodyPr/>
                     <a:lstStyle/>
                     <a:p>
-                      <a:pPr indent="0" marL="0">
+                      <a:pPr marL="0" indent="0">
                         <a:buNone/>
                       </a:pPr>
                       <a:r>
@@ -12468,7 +12406,7 @@
                     <a:bodyPr/>
                     <a:lstStyle/>
                     <a:p>
-                      <a:pPr indent="0" marL="0">
+                      <a:pPr marL="0" indent="0">
                         <a:buNone/>
                       </a:pPr>
                       <a:r>
@@ -12528,6 +12466,11 @@
                     </a:lnB>
                   </a:tcPr>
                 </a:tc>
+                <a:extLst>
+                  <a:ext uri="{0D108BD9-81ED-4DB2-BD59-A6C34878D82A}">
+                    <a16:rowId xmlns:a16="http://schemas.microsoft.com/office/drawing/2014/main" val="10003"/>
+                  </a:ext>
+                </a:extLst>
               </a:tr>
               <a:tr h="676656">
                 <a:tc>
@@ -12535,7 +12478,7 @@
                     <a:bodyPr/>
                     <a:lstStyle/>
                     <a:p>
-                      <a:pPr indent="0" marL="0">
+                      <a:pPr marL="0" indent="0">
                         <a:buNone/>
                       </a:pPr>
                       <a:r>
@@ -12603,7 +12546,7 @@
                     <a:bodyPr/>
                     <a:lstStyle/>
                     <a:p>
-                      <a:pPr indent="0" marL="0">
+                      <a:pPr marL="0" indent="0">
                         <a:buNone/>
                       </a:pPr>
                       <a:r>
@@ -12668,7 +12611,7 @@
                     <a:bodyPr/>
                     <a:lstStyle/>
                     <a:p>
-                      <a:pPr indent="0" marL="0">
+                      <a:pPr marL="0" indent="0">
                         <a:buNone/>
                       </a:pPr>
                       <a:r>
@@ -12728,6 +12671,11 @@
                     </a:lnB>
                   </a:tcPr>
                 </a:tc>
+                <a:extLst>
+                  <a:ext uri="{0D108BD9-81ED-4DB2-BD59-A6C34878D82A}">
+                    <a16:rowId xmlns:a16="http://schemas.microsoft.com/office/drawing/2014/main" val="10004"/>
+                  </a:ext>
+                </a:extLst>
               </a:tr>
             </a:tbl>
           </a:graphicData>
@@ -12762,7 +12710,7 @@
       </p:sp>
       <p:sp>
         <p:nvSpPr>
-          <p:cNvPr id="9" name="Text 6"/>
+          <p:cNvPr id="7" name="Text 6"/>
           <p:cNvSpPr txBox="1"/>
           <p:nvPr/>
         </p:nvSpPr>
@@ -12781,7 +12729,7 @@
           <a:bodyPr wrap="square" lIns="0" tIns="0" rIns="0" bIns="0" rtlCol="0" anchor="ctr"/>
           <a:lstStyle/>
           <a:p>
-            <a:pPr indent="0" marL="0">
+            <a:pPr marL="0" indent="0">
               <a:buNone/>
             </a:pPr>
             <a:r>
@@ -12795,9 +12743,6 @@
               </a:rPr>
               <a:t>Abgrenzung: </a:t>
             </a:r>
-            <a:pPr indent="0" marL="0">
-              <a:buNone/>
-            </a:pPr>
             <a:r>
               <a:rPr lang="en-US" sz="900" dirty="0">
                 <a:solidFill>
@@ -12808,2529 +12753,6 @@
                 <a:cs typeface="Calibri" pitchFamily="34" charset="-120"/>
               </a:rPr>
               <a:t>Qualitätsanforderungen sind getrennt von den funktionalen Regeln C1 bis C6 dokumentiert. Messwerte sind im Projekt nicht vorgegeben und deshalb als „noch zu validieren“ gekennzeichnet.</a:t>
-            </a:r>
-            <a:endParaRPr lang="en-US" sz="900" dirty="0"/>
-          </a:p>
-        </p:txBody>
-      </p:sp>
-    </p:spTree>
-  </p:cSld>
-  <p:clrMapOvr>
-    <a:masterClrMapping/>
-  </p:clrMapOvr>
-</p:sld>
-</file>
-
-<file path=ppt/slides/slide9.xml><?xml version="1.0" encoding="utf-8"?>
-<p:sld xmlns:a="http://schemas.openxmlformats.org/drawingml/2006/main" xmlns:r="http://schemas.openxmlformats.org/officeDocument/2006/relationships" xmlns:p="http://schemas.openxmlformats.org/presentationml/2006/main">
-  <p:cSld name="Slide 9">
-    <p:bg>
-      <p:bgPr>
-        <a:solidFill>
-          <a:srgbClr val="FFFFFF"/>
-        </a:solidFill>
-      </p:bgPr>
-    </p:bg>
-    <p:spTree>
-      <p:nvGrpSpPr>
-        <p:cNvPr id="1" name=""/>
-        <p:cNvGrpSpPr/>
-        <p:nvPr/>
-      </p:nvGrpSpPr>
-      <p:grpSpPr>
-        <a:xfrm>
-          <a:off x="0" y="0"/>
-          <a:ext cx="0" cy="0"/>
-          <a:chOff x="0" y="0"/>
-          <a:chExt cx="0" cy="0"/>
-        </a:xfrm>
-      </p:grpSpPr>
-      <p:sp>
-        <p:nvSpPr>
-          <p:cNvPr id="2" name="Text 0"/>
-          <p:cNvSpPr txBox="1"/>
-          <p:nvPr/>
-        </p:nvSpPr>
-        <p:spPr>
-          <a:xfrm>
-            <a:off x="411480" y="201168"/>
-            <a:ext cx="5943600" cy="457200"/>
-          </a:xfrm>
-          <a:prstGeom prst="rect">
-            <a:avLst/>
-          </a:prstGeom>
-          <a:noFill/>
-          <a:ln/>
-        </p:spPr>
-        <p:txBody>
-          <a:bodyPr wrap="square" lIns="0" tIns="0" rIns="0" bIns="0" rtlCol="0" anchor="ctr"/>
-          <a:lstStyle/>
-          <a:p>
-            <a:pPr indent="0" marL="0">
-              <a:buNone/>
-            </a:pPr>
-            <a:r>
-              <a:rPr lang="en-US" sz="2200" b="1" dirty="0">
-                <a:solidFill>
-                  <a:srgbClr val="1F2A1F"/>
-                </a:solidFill>
-                <a:latin typeface="Cambria" pitchFamily="34" charset="0"/>
-                <a:ea typeface="Cambria" pitchFamily="34" charset="-122"/>
-                <a:cs typeface="Cambria" pitchFamily="34" charset="-120"/>
-              </a:rPr>
-              <a:t>Konsistenz und offene Punkte</a:t>
-            </a:r>
-            <a:endParaRPr lang="en-US" sz="2200" dirty="0"/>
-          </a:p>
-        </p:txBody>
-      </p:sp>
-      <p:sp>
-        <p:nvSpPr>
-          <p:cNvPr id="3" name="Text 1"/>
-          <p:cNvSpPr txBox="1"/>
-          <p:nvPr/>
-        </p:nvSpPr>
-        <p:spPr>
-          <a:xfrm>
-            <a:off x="6035040" y="274320"/>
-            <a:ext cx="2697480" cy="274320"/>
-          </a:xfrm>
-          <a:prstGeom prst="rect">
-            <a:avLst/>
-          </a:prstGeom>
-          <a:noFill/>
-          <a:ln/>
-        </p:spPr>
-        <p:txBody>
-          <a:bodyPr wrap="square" lIns="0" tIns="0" rIns="0" bIns="0" rtlCol="0" anchor="ctr"/>
-          <a:lstStyle/>
-          <a:p>
-            <a:pPr algn="r" indent="0" marL="0">
-              <a:buNone/>
-            </a:pPr>
-            <a:r>
-              <a:rPr lang="en-US" sz="800" b="1" spc="150" kern="0" dirty="0">
-                <a:solidFill>
-                  <a:srgbClr val="97BC62"/>
-                </a:solidFill>
-                <a:latin typeface="Calibri" pitchFamily="34" charset="0"/>
-                <a:ea typeface="Calibri" pitchFamily="34" charset="-122"/>
-                <a:cs typeface="Calibri" pitchFamily="34" charset="-120"/>
-              </a:rPr>
-              <a:t>7 DIMENSIONS</a:t>
-            </a:r>
-            <a:endParaRPr lang="en-US" sz="800" dirty="0"/>
-          </a:p>
-        </p:txBody>
-      </p:sp>
-      <p:sp>
-        <p:nvSpPr>
-          <p:cNvPr id="4" name="Text 2"/>
-          <p:cNvSpPr txBox="1"/>
-          <p:nvPr/>
-        </p:nvSpPr>
-        <p:spPr>
-          <a:xfrm>
-            <a:off x="411480" y="658368"/>
-            <a:ext cx="8321040" cy="201168"/>
-          </a:xfrm>
-          <a:prstGeom prst="rect">
-            <a:avLst/>
-          </a:prstGeom>
-          <a:noFill/>
-          <a:ln/>
-        </p:spPr>
-        <p:txBody>
-          <a:bodyPr wrap="square" lIns="0" tIns="0" rIns="0" bIns="0" rtlCol="0" anchor="t"/>
-          <a:lstStyle/>
-          <a:p>
-            <a:pPr indent="0" marL="0">
-              <a:buNone/>
-            </a:pPr>
-            <a:r>
-              <a:rPr lang="en-US" sz="900" dirty="0">
-                <a:solidFill>
-                  <a:srgbClr val="5C6B5C"/>
-                </a:solidFill>
-                <a:latin typeface="Calibri" pitchFamily="34" charset="0"/>
-                <a:ea typeface="Calibri" pitchFamily="34" charset="-122"/>
-                <a:cs typeface="Calibri" pitchFamily="34" charset="-120"/>
-              </a:rPr>
-              <a:t>US 4.1.1  ·  Erstprüfer:in:  Thema aufrufen  ›  Thema prüfen  ›  Thema bestätigen  ›  Thema freigeben</a:t>
-            </a:r>
-            <a:endParaRPr lang="en-US" sz="900" dirty="0"/>
-          </a:p>
-        </p:txBody>
-      </p:sp>
-      <p:sp>
-        <p:nvSpPr>
-          <p:cNvPr id="5" name="Text 3"/>
-          <p:cNvSpPr txBox="1"/>
-          <p:nvPr/>
-        </p:nvSpPr>
-        <p:spPr>
-          <a:xfrm>
-            <a:off x="411480" y="4828032"/>
-            <a:ext cx="3840480" cy="182880"/>
-          </a:xfrm>
-          <a:prstGeom prst="rect">
-            <a:avLst/>
-          </a:prstGeom>
-          <a:noFill/>
-          <a:ln/>
-        </p:spPr>
-        <p:txBody>
-          <a:bodyPr wrap="square" lIns="0" tIns="0" rIns="0" bIns="0" rtlCol="0" anchor="t"/>
-          <a:lstStyle/>
-          <a:p>
-            <a:pPr indent="0" marL="0">
-              <a:buNone/>
-            </a:pPr>
-            <a:r>
-              <a:rPr lang="en-US" sz="750" dirty="0">
-                <a:solidFill>
-                  <a:srgbClr val="8A968A"/>
-                </a:solidFill>
-                <a:latin typeface="Calibri" pitchFamily="34" charset="0"/>
-                <a:ea typeface="Calibri" pitchFamily="34" charset="-122"/>
-                <a:cs typeface="Calibri" pitchFamily="34" charset="-120"/>
-              </a:rPr>
-              <a:t>ThesisFlow  ·  Requirements Engineering, Gruppe Grün</a:t>
-            </a:r>
-            <a:endParaRPr lang="en-US" sz="750" dirty="0"/>
-          </a:p>
-        </p:txBody>
-      </p:sp>
-      <p:sp>
-        <p:nvSpPr>
-          <p:cNvPr id="6" name="Text 4"/>
-          <p:cNvSpPr txBox="1"/>
-          <p:nvPr/>
-        </p:nvSpPr>
-        <p:spPr>
-          <a:xfrm>
-            <a:off x="4206240" y="4828032"/>
-            <a:ext cx="4526280" cy="182880"/>
-          </a:xfrm>
-          <a:prstGeom prst="rect">
-            <a:avLst/>
-          </a:prstGeom>
-          <a:noFill/>
-          <a:ln/>
-        </p:spPr>
-        <p:txBody>
-          <a:bodyPr wrap="square" lIns="0" tIns="0" rIns="0" bIns="0" rtlCol="0" anchor="t"/>
-          <a:lstStyle/>
-          <a:p>
-            <a:pPr algn="r" indent="0" marL="0">
-              <a:buNone/>
-            </a:pPr>
-            <a:r>
-              <a:rPr lang="en-US" sz="750" i="1" dirty="0">
-                <a:solidFill>
-                  <a:srgbClr val="8A968A"/>
-                </a:solidFill>
-                <a:latin typeface="Calibri" pitchFamily="34" charset="0"/>
-                <a:ea typeface="Calibri" pitchFamily="34" charset="-122"/>
-                <a:cs typeface="Calibri" pitchFamily="34" charset="-120"/>
-              </a:rPr>
-              <a:t>Begriffe wie im Story Mapping und im Zulassungsantrag</a:t>
-            </a:r>
-            <a:endParaRPr lang="en-US" sz="750" dirty="0"/>
-          </a:p>
-        </p:txBody>
-      </p:sp>
-      <p:sp>
-        <p:nvSpPr>
-          <p:cNvPr id="7" name="Text 5"/>
-          <p:cNvSpPr txBox="1"/>
-          <p:nvPr/>
-        </p:nvSpPr>
-        <p:spPr>
-          <a:xfrm>
-            <a:off x="411480" y="987552"/>
-            <a:ext cx="4114800" cy="274320"/>
-          </a:xfrm>
-          <a:prstGeom prst="rect">
-            <a:avLst/>
-          </a:prstGeom>
-          <a:noFill/>
-          <a:ln/>
-        </p:spPr>
-        <p:txBody>
-          <a:bodyPr wrap="square" lIns="0" tIns="0" rIns="0" bIns="0" rtlCol="0" anchor="ctr"/>
-          <a:lstStyle/>
-          <a:p>
-            <a:pPr indent="0" marL="0">
-              <a:buNone/>
-            </a:pPr>
-            <a:r>
-              <a:rPr lang="en-US" sz="1150" b="1" dirty="0">
-                <a:solidFill>
-                  <a:srgbClr val="2C5F2D"/>
-                </a:solidFill>
-                <a:latin typeface="Calibri" pitchFamily="34" charset="0"/>
-                <a:ea typeface="Calibri" pitchFamily="34" charset="-122"/>
-                <a:cs typeface="Calibri" pitchFamily="34" charset="-120"/>
-              </a:rPr>
-              <a:t>Ein Begriff, eine Bedeutung</a:t>
-            </a:r>
-            <a:endParaRPr lang="en-US" sz="1150" dirty="0"/>
-          </a:p>
-        </p:txBody>
-      </p:sp>
-      <p:graphicFrame>
-        <p:nvGraphicFramePr>
-          <p:cNvPr id="10" name="Table 0"/>
-          <p:cNvGraphicFramePr>
-            <a:graphicFrameLocks noGrp="1"/>
-          </p:cNvGraphicFramePr>
-          <p:nvPr>
-            <p:extLst>
-              <p:ext uri="{D42A27DB-BD31-4B8C-83A1-F6EECF244321}">
-                <p14:modId xmlns:p14="http://schemas.microsoft.com/office/powerpoint/2010/main" val="1579011935"/>
-              </p:ext>
-            </p:extLst>
-          </p:nvPr>
-        </p:nvGraphicFramePr>
-        <p:xfrm>
-          <a:off x="411480" y="1325880"/>
-          <a:ext cx="4160520" cy="914400"/>
-        </p:xfrm>
-        <a:graphic>
-          <a:graphicData uri="http://schemas.openxmlformats.org/drawingml/2006/table">
-            <a:tbl>
-              <a:tblPr/>
-              <a:tblGrid>
-                <a:gridCol w="1143000"/>
-                <a:gridCol w="777240"/>
-                <a:gridCol w="777240"/>
-                <a:gridCol w="640080"/>
-                <a:gridCol w="822960"/>
-              </a:tblGrid>
-              <a:tr h="310896">
-                <a:tc>
-                  <a:txBody>
-                    <a:bodyPr/>
-                    <a:lstStyle/>
-                    <a:p>
-                      <a:pPr indent="0" marL="0">
-                        <a:buNone/>
-                      </a:pPr>
-                      <a:r>
-                        <a:rPr lang="en-US" sz="850" b="1" dirty="0">
-                          <a:solidFill>
-                            <a:srgbClr val="FFFFFF"/>
-                          </a:solidFill>
-                          <a:latin typeface="Calibri" pitchFamily="34" charset="0"/>
-                          <a:ea typeface="Calibri" pitchFamily="34" charset="-122"/>
-                          <a:cs typeface="Calibri" pitchFamily="34" charset="-120"/>
-                        </a:rPr>
-                        <a:t>Begriff</a:t>
-                      </a:r>
-                      <a:endParaRPr lang="en-US" sz="850" dirty="0">
-                        <a:latin typeface="Calibri" charset="0"/>
-                        <a:ea typeface="Calibri" charset="0"/>
-                        <a:cs typeface="Calibri" charset="0"/>
-                      </a:endParaRPr>
-                    </a:p>
-                  </a:txBody>
-                  <a:tcPr marL="63500" marR="63500" marT="25400" marB="25400" anchor="ctr">
-                    <a:lnL w="9525" cap="flat" cmpd="sng" algn="ctr">
-                      <a:solidFill>
-                        <a:srgbClr val="C9D1C9"/>
-                      </a:solidFill>
-                      <a:prstDash val="solid"/>
-                      <a:round/>
-                      <a:headEnd type="none" w="med" len="med"/>
-                      <a:tailEnd type="none" w="med" len="med"/>
-                    </a:lnL>
-                    <a:lnR w="9525" cap="flat" cmpd="sng" algn="ctr">
-                      <a:solidFill>
-                        <a:srgbClr val="C9D1C9"/>
-                      </a:solidFill>
-                      <a:prstDash val="solid"/>
-                      <a:round/>
-                      <a:headEnd type="none" w="med" len="med"/>
-                      <a:tailEnd type="none" w="med" len="med"/>
-                    </a:lnR>
-                    <a:lnT w="9525" cap="flat" cmpd="sng" algn="ctr">
-                      <a:solidFill>
-                        <a:srgbClr val="C9D1C9"/>
-                      </a:solidFill>
-                      <a:prstDash val="solid"/>
-                      <a:round/>
-                      <a:headEnd type="none" w="med" len="med"/>
-                      <a:tailEnd type="none" w="med" len="med"/>
-                    </a:lnT>
-                    <a:lnB w="9525" cap="flat" cmpd="sng" algn="ctr">
-                      <a:solidFill>
-                        <a:srgbClr val="C9D1C9"/>
-                      </a:solidFill>
-                      <a:prstDash val="solid"/>
-                      <a:round/>
-                      <a:headEnd type="none" w="med" len="med"/>
-                      <a:tailEnd type="none" w="med" len="med"/>
-                    </a:lnB>
-                    <a:solidFill>
-                      <a:srgbClr val="2C5F2D"/>
-                    </a:solidFill>
-                  </a:tcPr>
-                </a:tc>
-                <a:tc>
-                  <a:txBody>
-                    <a:bodyPr/>
-                    <a:lstStyle/>
-                    <a:p>
-                      <a:pPr indent="0" marL="0">
-                        <a:buNone/>
-                      </a:pPr>
-                      <a:r>
-                        <a:rPr lang="en-US" sz="850" b="1" dirty="0">
-                          <a:solidFill>
-                            <a:srgbClr val="FFFFFF"/>
-                          </a:solidFill>
-                          <a:latin typeface="Calibri" pitchFamily="34" charset="0"/>
-                          <a:ea typeface="Calibri" pitchFamily="34" charset="-122"/>
-                          <a:cs typeface="Calibri" pitchFamily="34" charset="-120"/>
-                        </a:rPr>
-                        <a:t>User</a:t>
-                      </a:r>
-                      <a:endParaRPr lang="en-US" sz="850" dirty="0">
-                        <a:latin typeface="Calibri" charset="0"/>
-                        <a:ea typeface="Calibri" charset="0"/>
-                        <a:cs typeface="Calibri" charset="0"/>
-                      </a:endParaRPr>
-                    </a:p>
-                  </a:txBody>
-                  <a:tcPr marL="63500" marR="63500" marT="25400" marB="25400" anchor="ctr">
-                    <a:lnL w="9525" cap="flat" cmpd="sng" algn="ctr">
-                      <a:solidFill>
-                        <a:srgbClr val="C9D1C9"/>
-                      </a:solidFill>
-                      <a:prstDash val="solid"/>
-                      <a:round/>
-                      <a:headEnd type="none" w="med" len="med"/>
-                      <a:tailEnd type="none" w="med" len="med"/>
-                    </a:lnL>
-                    <a:lnR w="9525" cap="flat" cmpd="sng" algn="ctr">
-                      <a:solidFill>
-                        <a:srgbClr val="C9D1C9"/>
-                      </a:solidFill>
-                      <a:prstDash val="solid"/>
-                      <a:round/>
-                      <a:headEnd type="none" w="med" len="med"/>
-                      <a:tailEnd type="none" w="med" len="med"/>
-                    </a:lnR>
-                    <a:lnT w="9525" cap="flat" cmpd="sng" algn="ctr">
-                      <a:solidFill>
-                        <a:srgbClr val="C9D1C9"/>
-                      </a:solidFill>
-                      <a:prstDash val="solid"/>
-                      <a:round/>
-                      <a:headEnd type="none" w="med" len="med"/>
-                      <a:tailEnd type="none" w="med" len="med"/>
-                    </a:lnT>
-                    <a:lnB w="9525" cap="flat" cmpd="sng" algn="ctr">
-                      <a:solidFill>
-                        <a:srgbClr val="C9D1C9"/>
-                      </a:solidFill>
-                      <a:prstDash val="solid"/>
-                      <a:round/>
-                      <a:headEnd type="none" w="med" len="med"/>
-                      <a:tailEnd type="none" w="med" len="med"/>
-                    </a:lnB>
-                    <a:solidFill>
-                      <a:srgbClr val="2C5F2D"/>
-                    </a:solidFill>
-                  </a:tcPr>
-                </a:tc>
-                <a:tc>
-                  <a:txBody>
-                    <a:bodyPr/>
-                    <a:lstStyle/>
-                    <a:p>
-                      <a:pPr indent="0" marL="0">
-                        <a:buNone/>
-                      </a:pPr>
-                      <a:r>
-                        <a:rPr lang="en-US" sz="850" b="1" dirty="0">
-                          <a:solidFill>
-                            <a:srgbClr val="FFFFFF"/>
-                          </a:solidFill>
-                          <a:latin typeface="Calibri" pitchFamily="34" charset="0"/>
-                          <a:ea typeface="Calibri" pitchFamily="34" charset="-122"/>
-                          <a:cs typeface="Calibri" pitchFamily="34" charset="-120"/>
-                        </a:rPr>
-                        <a:t>Action</a:t>
-                      </a:r>
-                      <a:endParaRPr lang="en-US" sz="850" dirty="0">
-                        <a:latin typeface="Calibri" charset="0"/>
-                        <a:ea typeface="Calibri" charset="0"/>
-                        <a:cs typeface="Calibri" charset="0"/>
-                      </a:endParaRPr>
-                    </a:p>
-                  </a:txBody>
-                  <a:tcPr marL="63500" marR="63500" marT="25400" marB="25400" anchor="ctr">
-                    <a:lnL w="9525" cap="flat" cmpd="sng" algn="ctr">
-                      <a:solidFill>
-                        <a:srgbClr val="C9D1C9"/>
-                      </a:solidFill>
-                      <a:prstDash val="solid"/>
-                      <a:round/>
-                      <a:headEnd type="none" w="med" len="med"/>
-                      <a:tailEnd type="none" w="med" len="med"/>
-                    </a:lnL>
-                    <a:lnR w="9525" cap="flat" cmpd="sng" algn="ctr">
-                      <a:solidFill>
-                        <a:srgbClr val="C9D1C9"/>
-                      </a:solidFill>
-                      <a:prstDash val="solid"/>
-                      <a:round/>
-                      <a:headEnd type="none" w="med" len="med"/>
-                      <a:tailEnd type="none" w="med" len="med"/>
-                    </a:lnR>
-                    <a:lnT w="9525" cap="flat" cmpd="sng" algn="ctr">
-                      <a:solidFill>
-                        <a:srgbClr val="C9D1C9"/>
-                      </a:solidFill>
-                      <a:prstDash val="solid"/>
-                      <a:round/>
-                      <a:headEnd type="none" w="med" len="med"/>
-                      <a:tailEnd type="none" w="med" len="med"/>
-                    </a:lnT>
-                    <a:lnB w="9525" cap="flat" cmpd="sng" algn="ctr">
-                      <a:solidFill>
-                        <a:srgbClr val="C9D1C9"/>
-                      </a:solidFill>
-                      <a:prstDash val="solid"/>
-                      <a:round/>
-                      <a:headEnd type="none" w="med" len="med"/>
-                      <a:tailEnd type="none" w="med" len="med"/>
-                    </a:lnB>
-                    <a:solidFill>
-                      <a:srgbClr val="2C5F2D"/>
-                    </a:solidFill>
-                  </a:tcPr>
-                </a:tc>
-                <a:tc>
-                  <a:txBody>
-                    <a:bodyPr/>
-                    <a:lstStyle/>
-                    <a:p>
-                      <a:pPr indent="0" marL="0">
-                        <a:buNone/>
-                      </a:pPr>
-                      <a:r>
-                        <a:rPr lang="en-US" sz="850" b="1" dirty="0">
-                          <a:solidFill>
-                            <a:srgbClr val="FFFFFF"/>
-                          </a:solidFill>
-                          <a:latin typeface="Calibri" pitchFamily="34" charset="0"/>
-                          <a:ea typeface="Calibri" pitchFamily="34" charset="-122"/>
-                          <a:cs typeface="Calibri" pitchFamily="34" charset="-120"/>
-                        </a:rPr>
-                        <a:t>Data</a:t>
-                      </a:r>
-                      <a:endParaRPr lang="en-US" sz="850" dirty="0">
-                        <a:latin typeface="Calibri" charset="0"/>
-                        <a:ea typeface="Calibri" charset="0"/>
-                        <a:cs typeface="Calibri" charset="0"/>
-                      </a:endParaRPr>
-                    </a:p>
-                  </a:txBody>
-                  <a:tcPr marL="63500" marR="63500" marT="25400" marB="25400" anchor="ctr">
-                    <a:lnL w="9525" cap="flat" cmpd="sng" algn="ctr">
-                      <a:solidFill>
-                        <a:srgbClr val="C9D1C9"/>
-                      </a:solidFill>
-                      <a:prstDash val="solid"/>
-                      <a:round/>
-                      <a:headEnd type="none" w="med" len="med"/>
-                      <a:tailEnd type="none" w="med" len="med"/>
-                    </a:lnL>
-                    <a:lnR w="9525" cap="flat" cmpd="sng" algn="ctr">
-                      <a:solidFill>
-                        <a:srgbClr val="C9D1C9"/>
-                      </a:solidFill>
-                      <a:prstDash val="solid"/>
-                      <a:round/>
-                      <a:headEnd type="none" w="med" len="med"/>
-                      <a:tailEnd type="none" w="med" len="med"/>
-                    </a:lnR>
-                    <a:lnT w="9525" cap="flat" cmpd="sng" algn="ctr">
-                      <a:solidFill>
-                        <a:srgbClr val="C9D1C9"/>
-                      </a:solidFill>
-                      <a:prstDash val="solid"/>
-                      <a:round/>
-                      <a:headEnd type="none" w="med" len="med"/>
-                      <a:tailEnd type="none" w="med" len="med"/>
-                    </a:lnT>
-                    <a:lnB w="9525" cap="flat" cmpd="sng" algn="ctr">
-                      <a:solidFill>
-                        <a:srgbClr val="C9D1C9"/>
-                      </a:solidFill>
-                      <a:prstDash val="solid"/>
-                      <a:round/>
-                      <a:headEnd type="none" w="med" len="med"/>
-                      <a:tailEnd type="none" w="med" len="med"/>
-                    </a:lnB>
-                    <a:solidFill>
-                      <a:srgbClr val="2C5F2D"/>
-                    </a:solidFill>
-                  </a:tcPr>
-                </a:tc>
-                <a:tc>
-                  <a:txBody>
-                    <a:bodyPr/>
-                    <a:lstStyle/>
-                    <a:p>
-                      <a:pPr indent="0" marL="0">
-                        <a:buNone/>
-                      </a:pPr>
-                      <a:r>
-                        <a:rPr lang="en-US" sz="850" b="1" dirty="0">
-                          <a:solidFill>
-                            <a:srgbClr val="FFFFFF"/>
-                          </a:solidFill>
-                          <a:latin typeface="Calibri" pitchFamily="34" charset="0"/>
-                          <a:ea typeface="Calibri" pitchFamily="34" charset="-122"/>
-                          <a:cs typeface="Calibri" pitchFamily="34" charset="-120"/>
-                        </a:rPr>
-                        <a:t>Control</a:t>
-                      </a:r>
-                      <a:endParaRPr lang="en-US" sz="850" dirty="0">
-                        <a:latin typeface="Calibri" charset="0"/>
-                        <a:ea typeface="Calibri" charset="0"/>
-                        <a:cs typeface="Calibri" charset="0"/>
-                      </a:endParaRPr>
-                    </a:p>
-                  </a:txBody>
-                  <a:tcPr marL="63500" marR="63500" marT="25400" marB="25400" anchor="ctr">
-                    <a:lnL w="9525" cap="flat" cmpd="sng" algn="ctr">
-                      <a:solidFill>
-                        <a:srgbClr val="C9D1C9"/>
-                      </a:solidFill>
-                      <a:prstDash val="solid"/>
-                      <a:round/>
-                      <a:headEnd type="none" w="med" len="med"/>
-                      <a:tailEnd type="none" w="med" len="med"/>
-                    </a:lnL>
-                    <a:lnR w="9525" cap="flat" cmpd="sng" algn="ctr">
-                      <a:solidFill>
-                        <a:srgbClr val="C9D1C9"/>
-                      </a:solidFill>
-                      <a:prstDash val="solid"/>
-                      <a:round/>
-                      <a:headEnd type="none" w="med" len="med"/>
-                      <a:tailEnd type="none" w="med" len="med"/>
-                    </a:lnR>
-                    <a:lnT w="9525" cap="flat" cmpd="sng" algn="ctr">
-                      <a:solidFill>
-                        <a:srgbClr val="C9D1C9"/>
-                      </a:solidFill>
-                      <a:prstDash val="solid"/>
-                      <a:round/>
-                      <a:headEnd type="none" w="med" len="med"/>
-                      <a:tailEnd type="none" w="med" len="med"/>
-                    </a:lnT>
-                    <a:lnB w="9525" cap="flat" cmpd="sng" algn="ctr">
-                      <a:solidFill>
-                        <a:srgbClr val="C9D1C9"/>
-                      </a:solidFill>
-                      <a:prstDash val="solid"/>
-                      <a:round/>
-                      <a:headEnd type="none" w="med" len="med"/>
-                      <a:tailEnd type="none" w="med" len="med"/>
-                    </a:lnB>
-                    <a:solidFill>
-                      <a:srgbClr val="2C5F2D"/>
-                    </a:solidFill>
-                  </a:tcPr>
-                </a:tc>
-              </a:tr>
-              <a:tr h="310896">
-                <a:tc>
-                  <a:txBody>
-                    <a:bodyPr/>
-                    <a:lstStyle/>
-                    <a:p>
-                      <a:pPr indent="0" marL="0">
-                        <a:buNone/>
-                      </a:pPr>
-                      <a:r>
-                        <a:rPr lang="en-US" sz="850" b="1" dirty="0">
-                          <a:solidFill>
-                            <a:srgbClr val="2C5F2D"/>
-                          </a:solidFill>
-                          <a:latin typeface="Calibri" pitchFamily="34" charset="0"/>
-                          <a:ea typeface="Calibri" pitchFamily="34" charset="-122"/>
-                          <a:cs typeface="Calibri" pitchFamily="34" charset="-120"/>
-                        </a:rPr>
-                        <a:t>Erstprüfer:in</a:t>
-                      </a:r>
-                      <a:endParaRPr lang="en-US" sz="850" dirty="0">
-                        <a:latin typeface="Calibri" charset="0"/>
-                        <a:ea typeface="Calibri" charset="0"/>
-                        <a:cs typeface="Calibri" charset="0"/>
-                      </a:endParaRPr>
-                    </a:p>
-                  </a:txBody>
-                  <a:tcPr marL="63500" marR="63500" marT="25400" marB="25400" anchor="ctr">
-                    <a:lnL w="9525" cap="flat" cmpd="sng" algn="ctr">
-                      <a:solidFill>
-                        <a:srgbClr val="C9D1C9"/>
-                      </a:solidFill>
-                      <a:prstDash val="solid"/>
-                      <a:round/>
-                      <a:headEnd type="none" w="med" len="med"/>
-                      <a:tailEnd type="none" w="med" len="med"/>
-                    </a:lnL>
-                    <a:lnR w="9525" cap="flat" cmpd="sng" algn="ctr">
-                      <a:solidFill>
-                        <a:srgbClr val="C9D1C9"/>
-                      </a:solidFill>
-                      <a:prstDash val="solid"/>
-                      <a:round/>
-                      <a:headEnd type="none" w="med" len="med"/>
-                      <a:tailEnd type="none" w="med" len="med"/>
-                    </a:lnR>
-                    <a:lnT w="9525" cap="flat" cmpd="sng" algn="ctr">
-                      <a:solidFill>
-                        <a:srgbClr val="C9D1C9"/>
-                      </a:solidFill>
-                      <a:prstDash val="solid"/>
-                      <a:round/>
-                      <a:headEnd type="none" w="med" len="med"/>
-                      <a:tailEnd type="none" w="med" len="med"/>
-                    </a:lnT>
-                    <a:lnB w="9525" cap="flat" cmpd="sng" algn="ctr">
-                      <a:solidFill>
-                        <a:srgbClr val="C9D1C9"/>
-                      </a:solidFill>
-                      <a:prstDash val="solid"/>
-                      <a:round/>
-                      <a:headEnd type="none" w="med" len="med"/>
-                      <a:tailEnd type="none" w="med" len="med"/>
-                    </a:lnB>
-                    <a:solidFill>
-                      <a:srgbClr val="EEF4E8"/>
-                    </a:solidFill>
-                  </a:tcPr>
-                </a:tc>
-                <a:tc>
-                  <a:txBody>
-                    <a:bodyPr/>
-                    <a:lstStyle/>
-                    <a:p>
-                      <a:pPr indent="0" marL="0">
-                        <a:buNone/>
-                      </a:pPr>
-                      <a:r>
-                        <a:rPr lang="en-US" sz="850" dirty="0">
-                          <a:solidFill>
-                            <a:srgbClr val="1F2A1F"/>
-                          </a:solidFill>
-                          <a:latin typeface="Calibri" pitchFamily="34" charset="0"/>
-                          <a:ea typeface="Calibri" pitchFamily="34" charset="-122"/>
-                          <a:cs typeface="Calibri" pitchFamily="34" charset="-120"/>
-                        </a:rPr>
-                        <a:t>Persona B</a:t>
-                      </a:r>
-                      <a:endParaRPr lang="en-US" sz="850" dirty="0">
-                        <a:latin typeface="Calibri" charset="0"/>
-                        <a:ea typeface="Calibri" charset="0"/>
-                        <a:cs typeface="Calibri" charset="0"/>
-                      </a:endParaRPr>
-                    </a:p>
-                  </a:txBody>
-                  <a:tcPr marL="63500" marR="63500" marT="25400" marB="25400" anchor="ctr">
-                    <a:lnL w="9525" cap="flat" cmpd="sng" algn="ctr">
-                      <a:solidFill>
-                        <a:srgbClr val="C9D1C9"/>
-                      </a:solidFill>
-                      <a:prstDash val="solid"/>
-                      <a:round/>
-                      <a:headEnd type="none" w="med" len="med"/>
-                      <a:tailEnd type="none" w="med" len="med"/>
-                    </a:lnL>
-                    <a:lnR w="9525" cap="flat" cmpd="sng" algn="ctr">
-                      <a:solidFill>
-                        <a:srgbClr val="C9D1C9"/>
-                      </a:solidFill>
-                      <a:prstDash val="solid"/>
-                      <a:round/>
-                      <a:headEnd type="none" w="med" len="med"/>
-                      <a:tailEnd type="none" w="med" len="med"/>
-                    </a:lnR>
-                    <a:lnT w="9525" cap="flat" cmpd="sng" algn="ctr">
-                      <a:solidFill>
-                        <a:srgbClr val="C9D1C9"/>
-                      </a:solidFill>
-                      <a:prstDash val="solid"/>
-                      <a:round/>
-                      <a:headEnd type="none" w="med" len="med"/>
-                      <a:tailEnd type="none" w="med" len="med"/>
-                    </a:lnT>
-                    <a:lnB w="9525" cap="flat" cmpd="sng" algn="ctr">
-                      <a:solidFill>
-                        <a:srgbClr val="C9D1C9"/>
-                      </a:solidFill>
-                      <a:prstDash val="solid"/>
-                      <a:round/>
-                      <a:headEnd type="none" w="med" len="med"/>
-                      <a:tailEnd type="none" w="med" len="med"/>
-                    </a:lnB>
-                  </a:tcPr>
-                </a:tc>
-                <a:tc>
-                  <a:txBody>
-                    <a:bodyPr/>
-                    <a:lstStyle/>
-                    <a:p>
-                      <a:pPr indent="0" marL="0">
-                        <a:buNone/>
-                      </a:pPr>
-                      <a:r>
-                        <a:rPr lang="en-US" sz="850" dirty="0">
-                          <a:solidFill>
-                            <a:srgbClr val="1F2A1F"/>
-                          </a:solidFill>
-                          <a:latin typeface="Calibri" pitchFamily="34" charset="0"/>
-                          <a:ea typeface="Calibri" pitchFamily="34" charset="-122"/>
-                          <a:cs typeface="Calibri" pitchFamily="34" charset="-120"/>
-                        </a:rPr>
-                        <a:t>Lane</a:t>
-                      </a:r>
-                      <a:endParaRPr lang="en-US" sz="850" dirty="0">
-                        <a:latin typeface="Calibri" charset="0"/>
-                        <a:ea typeface="Calibri" charset="0"/>
-                        <a:cs typeface="Calibri" charset="0"/>
-                      </a:endParaRPr>
-                    </a:p>
-                  </a:txBody>
-                  <a:tcPr marL="63500" marR="63500" marT="25400" marB="25400" anchor="ctr">
-                    <a:lnL w="9525" cap="flat" cmpd="sng" algn="ctr">
-                      <a:solidFill>
-                        <a:srgbClr val="C9D1C9"/>
-                      </a:solidFill>
-                      <a:prstDash val="solid"/>
-                      <a:round/>
-                      <a:headEnd type="none" w="med" len="med"/>
-                      <a:tailEnd type="none" w="med" len="med"/>
-                    </a:lnL>
-                    <a:lnR w="9525" cap="flat" cmpd="sng" algn="ctr">
-                      <a:solidFill>
-                        <a:srgbClr val="C9D1C9"/>
-                      </a:solidFill>
-                      <a:prstDash val="solid"/>
-                      <a:round/>
-                      <a:headEnd type="none" w="med" len="med"/>
-                      <a:tailEnd type="none" w="med" len="med"/>
-                    </a:lnR>
-                    <a:lnT w="9525" cap="flat" cmpd="sng" algn="ctr">
-                      <a:solidFill>
-                        <a:srgbClr val="C9D1C9"/>
-                      </a:solidFill>
-                      <a:prstDash val="solid"/>
-                      <a:round/>
-                      <a:headEnd type="none" w="med" len="med"/>
-                      <a:tailEnd type="none" w="med" len="med"/>
-                    </a:lnT>
-                    <a:lnB w="9525" cap="flat" cmpd="sng" algn="ctr">
-                      <a:solidFill>
-                        <a:srgbClr val="C9D1C9"/>
-                      </a:solidFill>
-                      <a:prstDash val="solid"/>
-                      <a:round/>
-                      <a:headEnd type="none" w="med" len="med"/>
-                      <a:tailEnd type="none" w="med" len="med"/>
-                    </a:lnB>
-                  </a:tcPr>
-                </a:tc>
-                <a:tc>
-                  <a:txBody>
-                    <a:bodyPr/>
-                    <a:lstStyle/>
-                    <a:p>
-                      <a:pPr indent="0" marL="0">
-                        <a:buNone/>
-                      </a:pPr>
-                      <a:r>
-                        <a:rPr lang="en-US" sz="850" dirty="0">
-                          <a:solidFill>
-                            <a:srgbClr val="1F2A1F"/>
-                          </a:solidFill>
-                          <a:latin typeface="Calibri" pitchFamily="34" charset="0"/>
-                          <a:ea typeface="Calibri" pitchFamily="34" charset="-122"/>
-                          <a:cs typeface="Calibri" pitchFamily="34" charset="-120"/>
-                        </a:rPr>
-                        <a:t>Klasse</a:t>
-                      </a:r>
-                      <a:endParaRPr lang="en-US" sz="850" dirty="0">
-                        <a:latin typeface="Calibri" charset="0"/>
-                        <a:ea typeface="Calibri" charset="0"/>
-                        <a:cs typeface="Calibri" charset="0"/>
-                      </a:endParaRPr>
-                    </a:p>
-                  </a:txBody>
-                  <a:tcPr marL="63500" marR="63500" marT="25400" marB="25400" anchor="ctr">
-                    <a:lnL w="9525" cap="flat" cmpd="sng" algn="ctr">
-                      <a:solidFill>
-                        <a:srgbClr val="C9D1C9"/>
-                      </a:solidFill>
-                      <a:prstDash val="solid"/>
-                      <a:round/>
-                      <a:headEnd type="none" w="med" len="med"/>
-                      <a:tailEnd type="none" w="med" len="med"/>
-                    </a:lnL>
-                    <a:lnR w="9525" cap="flat" cmpd="sng" algn="ctr">
-                      <a:solidFill>
-                        <a:srgbClr val="C9D1C9"/>
-                      </a:solidFill>
-                      <a:prstDash val="solid"/>
-                      <a:round/>
-                      <a:headEnd type="none" w="med" len="med"/>
-                      <a:tailEnd type="none" w="med" len="med"/>
-                    </a:lnR>
-                    <a:lnT w="9525" cap="flat" cmpd="sng" algn="ctr">
-                      <a:solidFill>
-                        <a:srgbClr val="C9D1C9"/>
-                      </a:solidFill>
-                      <a:prstDash val="solid"/>
-                      <a:round/>
-                      <a:headEnd type="none" w="med" len="med"/>
-                      <a:tailEnd type="none" w="med" len="med"/>
-                    </a:lnT>
-                    <a:lnB w="9525" cap="flat" cmpd="sng" algn="ctr">
-                      <a:solidFill>
-                        <a:srgbClr val="C9D1C9"/>
-                      </a:solidFill>
-                      <a:prstDash val="solid"/>
-                      <a:round/>
-                      <a:headEnd type="none" w="med" len="med"/>
-                      <a:tailEnd type="none" w="med" len="med"/>
-                    </a:lnB>
-                  </a:tcPr>
-                </a:tc>
-                <a:tc>
-                  <a:txBody>
-                    <a:bodyPr/>
-                    <a:lstStyle/>
-                    <a:p>
-                      <a:pPr indent="0" marL="0">
-                        <a:buNone/>
-                      </a:pPr>
-                      <a:r>
-                        <a:rPr lang="en-US" sz="850" dirty="0">
-                          <a:solidFill>
-                            <a:srgbClr val="1F2A1F"/>
-                          </a:solidFill>
-                          <a:latin typeface="Calibri" pitchFamily="34" charset="0"/>
-                          <a:ea typeface="Calibri" pitchFamily="34" charset="-122"/>
-                          <a:cs typeface="Calibri" pitchFamily="34" charset="-120"/>
-                        </a:rPr>
-                        <a:t>C1 bis C5</a:t>
-                      </a:r>
-                      <a:endParaRPr lang="en-US" sz="850" dirty="0">
-                        <a:latin typeface="Calibri" charset="0"/>
-                        <a:ea typeface="Calibri" charset="0"/>
-                        <a:cs typeface="Calibri" charset="0"/>
-                      </a:endParaRPr>
-                    </a:p>
-                  </a:txBody>
-                  <a:tcPr marL="63500" marR="63500" marT="25400" marB="25400" anchor="ctr">
-                    <a:lnL w="9525" cap="flat" cmpd="sng" algn="ctr">
-                      <a:solidFill>
-                        <a:srgbClr val="C9D1C9"/>
-                      </a:solidFill>
-                      <a:prstDash val="solid"/>
-                      <a:round/>
-                      <a:headEnd type="none" w="med" len="med"/>
-                      <a:tailEnd type="none" w="med" len="med"/>
-                    </a:lnL>
-                    <a:lnR w="9525" cap="flat" cmpd="sng" algn="ctr">
-                      <a:solidFill>
-                        <a:srgbClr val="C9D1C9"/>
-                      </a:solidFill>
-                      <a:prstDash val="solid"/>
-                      <a:round/>
-                      <a:headEnd type="none" w="med" len="med"/>
-                      <a:tailEnd type="none" w="med" len="med"/>
-                    </a:lnR>
-                    <a:lnT w="9525" cap="flat" cmpd="sng" algn="ctr">
-                      <a:solidFill>
-                        <a:srgbClr val="C9D1C9"/>
-                      </a:solidFill>
-                      <a:prstDash val="solid"/>
-                      <a:round/>
-                      <a:headEnd type="none" w="med" len="med"/>
-                      <a:tailEnd type="none" w="med" len="med"/>
-                    </a:lnT>
-                    <a:lnB w="9525" cap="flat" cmpd="sng" algn="ctr">
-                      <a:solidFill>
-                        <a:srgbClr val="C9D1C9"/>
-                      </a:solidFill>
-                      <a:prstDash val="solid"/>
-                      <a:round/>
-                      <a:headEnd type="none" w="med" len="med"/>
-                      <a:tailEnd type="none" w="med" len="med"/>
-                    </a:lnB>
-                  </a:tcPr>
-                </a:tc>
-              </a:tr>
-              <a:tr h="310896">
-                <a:tc>
-                  <a:txBody>
-                    <a:bodyPr/>
-                    <a:lstStyle/>
-                    <a:p>
-                      <a:pPr indent="0" marL="0">
-                        <a:buNone/>
-                      </a:pPr>
-                      <a:r>
-                        <a:rPr lang="en-US" sz="850" b="1" dirty="0">
-                          <a:solidFill>
-                            <a:srgbClr val="2C5F2D"/>
-                          </a:solidFill>
-                          <a:latin typeface="Calibri" pitchFamily="34" charset="0"/>
-                          <a:ea typeface="Calibri" pitchFamily="34" charset="-122"/>
-                          <a:cs typeface="Calibri" pitchFamily="34" charset="-120"/>
-                        </a:rPr>
-                        <a:t>Antrag</a:t>
-                      </a:r>
-                      <a:endParaRPr lang="en-US" sz="850" dirty="0">
-                        <a:latin typeface="Calibri" charset="0"/>
-                        <a:ea typeface="Calibri" charset="0"/>
-                        <a:cs typeface="Calibri" charset="0"/>
-                      </a:endParaRPr>
-                    </a:p>
-                  </a:txBody>
-                  <a:tcPr marL="63500" marR="63500" marT="25400" marB="25400" anchor="ctr">
-                    <a:lnL w="9525" cap="flat" cmpd="sng" algn="ctr">
-                      <a:solidFill>
-                        <a:srgbClr val="C9D1C9"/>
-                      </a:solidFill>
-                      <a:prstDash val="solid"/>
-                      <a:round/>
-                      <a:headEnd type="none" w="med" len="med"/>
-                      <a:tailEnd type="none" w="med" len="med"/>
-                    </a:lnL>
-                    <a:lnR w="9525" cap="flat" cmpd="sng" algn="ctr">
-                      <a:solidFill>
-                        <a:srgbClr val="C9D1C9"/>
-                      </a:solidFill>
-                      <a:prstDash val="solid"/>
-                      <a:round/>
-                      <a:headEnd type="none" w="med" len="med"/>
-                      <a:tailEnd type="none" w="med" len="med"/>
-                    </a:lnR>
-                    <a:lnT w="9525" cap="flat" cmpd="sng" algn="ctr">
-                      <a:solidFill>
-                        <a:srgbClr val="C9D1C9"/>
-                      </a:solidFill>
-                      <a:prstDash val="solid"/>
-                      <a:round/>
-                      <a:headEnd type="none" w="med" len="med"/>
-                      <a:tailEnd type="none" w="med" len="med"/>
-                    </a:lnT>
-                    <a:lnB w="9525" cap="flat" cmpd="sng" algn="ctr">
-                      <a:solidFill>
-                        <a:srgbClr val="C9D1C9"/>
-                      </a:solidFill>
-                      <a:prstDash val="solid"/>
-                      <a:round/>
-                      <a:headEnd type="none" w="med" len="med"/>
-                      <a:tailEnd type="none" w="med" len="med"/>
-                    </a:lnB>
-                    <a:solidFill>
-                      <a:srgbClr val="EEF4E8"/>
-                    </a:solidFill>
-                  </a:tcPr>
-                </a:tc>
-                <a:tc>
-                  <a:txBody>
-                    <a:bodyPr/>
-                    <a:lstStyle/>
-                    <a:p>
-                      <a:pPr indent="0" marL="0">
-                        <a:buNone/>
-                      </a:pPr>
-                      <a:r>
-                        <a:rPr lang="en-US" sz="850" dirty="0">
-                          <a:solidFill>
-                            <a:srgbClr val="1F2A1F"/>
-                          </a:solidFill>
-                          <a:latin typeface="Calibri" pitchFamily="34" charset="0"/>
-                          <a:ea typeface="Calibri" pitchFamily="34" charset="-122"/>
-                          <a:cs typeface="Calibri" pitchFamily="34" charset="-120"/>
-                        </a:rPr>
-                        <a:t>Kontext</a:t>
-                      </a:r>
-                      <a:endParaRPr lang="en-US" sz="850" dirty="0">
-                        <a:latin typeface="Calibri" charset="0"/>
-                        <a:ea typeface="Calibri" charset="0"/>
-                        <a:cs typeface="Calibri" charset="0"/>
-                      </a:endParaRPr>
-                    </a:p>
-                  </a:txBody>
-                  <a:tcPr marL="63500" marR="63500" marT="25400" marB="25400" anchor="ctr">
-                    <a:lnL w="9525" cap="flat" cmpd="sng" algn="ctr">
-                      <a:solidFill>
-                        <a:srgbClr val="C9D1C9"/>
-                      </a:solidFill>
-                      <a:prstDash val="solid"/>
-                      <a:round/>
-                      <a:headEnd type="none" w="med" len="med"/>
-                      <a:tailEnd type="none" w="med" len="med"/>
-                    </a:lnL>
-                    <a:lnR w="9525" cap="flat" cmpd="sng" algn="ctr">
-                      <a:solidFill>
-                        <a:srgbClr val="C9D1C9"/>
-                      </a:solidFill>
-                      <a:prstDash val="solid"/>
-                      <a:round/>
-                      <a:headEnd type="none" w="med" len="med"/>
-                      <a:tailEnd type="none" w="med" len="med"/>
-                    </a:lnR>
-                    <a:lnT w="9525" cap="flat" cmpd="sng" algn="ctr">
-                      <a:solidFill>
-                        <a:srgbClr val="C9D1C9"/>
-                      </a:solidFill>
-                      <a:prstDash val="solid"/>
-                      <a:round/>
-                      <a:headEnd type="none" w="med" len="med"/>
-                      <a:tailEnd type="none" w="med" len="med"/>
-                    </a:lnT>
-                    <a:lnB w="9525" cap="flat" cmpd="sng" algn="ctr">
-                      <a:solidFill>
-                        <a:srgbClr val="C9D1C9"/>
-                      </a:solidFill>
-                      <a:prstDash val="solid"/>
-                      <a:round/>
-                      <a:headEnd type="none" w="med" len="med"/>
-                      <a:tailEnd type="none" w="med" len="med"/>
-                    </a:lnB>
-                  </a:tcPr>
-                </a:tc>
-                <a:tc>
-                  <a:txBody>
-                    <a:bodyPr/>
-                    <a:lstStyle/>
-                    <a:p>
-                      <a:pPr indent="0" marL="0">
-                        <a:buNone/>
-                      </a:pPr>
-                      <a:r>
-                        <a:rPr lang="en-US" sz="850" dirty="0">
-                          <a:solidFill>
-                            <a:srgbClr val="1F2A1F"/>
-                          </a:solidFill>
-                          <a:latin typeface="Calibri" pitchFamily="34" charset="0"/>
-                          <a:ea typeface="Calibri" pitchFamily="34" charset="-122"/>
-                          <a:cs typeface="Calibri" pitchFamily="34" charset="-120"/>
-                        </a:rPr>
-                        <a:t>aufrufen</a:t>
-                      </a:r>
-                      <a:endParaRPr lang="en-US" sz="850" dirty="0">
-                        <a:latin typeface="Calibri" charset="0"/>
-                        <a:ea typeface="Calibri" charset="0"/>
-                        <a:cs typeface="Calibri" charset="0"/>
-                      </a:endParaRPr>
-                    </a:p>
-                  </a:txBody>
-                  <a:tcPr marL="63500" marR="63500" marT="25400" marB="25400" anchor="ctr">
-                    <a:lnL w="9525" cap="flat" cmpd="sng" algn="ctr">
-                      <a:solidFill>
-                        <a:srgbClr val="C9D1C9"/>
-                      </a:solidFill>
-                      <a:prstDash val="solid"/>
-                      <a:round/>
-                      <a:headEnd type="none" w="med" len="med"/>
-                      <a:tailEnd type="none" w="med" len="med"/>
-                    </a:lnL>
-                    <a:lnR w="9525" cap="flat" cmpd="sng" algn="ctr">
-                      <a:solidFill>
-                        <a:srgbClr val="C9D1C9"/>
-                      </a:solidFill>
-                      <a:prstDash val="solid"/>
-                      <a:round/>
-                      <a:headEnd type="none" w="med" len="med"/>
-                      <a:tailEnd type="none" w="med" len="med"/>
-                    </a:lnR>
-                    <a:lnT w="9525" cap="flat" cmpd="sng" algn="ctr">
-                      <a:solidFill>
-                        <a:srgbClr val="C9D1C9"/>
-                      </a:solidFill>
-                      <a:prstDash val="solid"/>
-                      <a:round/>
-                      <a:headEnd type="none" w="med" len="med"/>
-                      <a:tailEnd type="none" w="med" len="med"/>
-                    </a:lnT>
-                    <a:lnB w="9525" cap="flat" cmpd="sng" algn="ctr">
-                      <a:solidFill>
-                        <a:srgbClr val="C9D1C9"/>
-                      </a:solidFill>
-                      <a:prstDash val="solid"/>
-                      <a:round/>
-                      <a:headEnd type="none" w="med" len="med"/>
-                      <a:tailEnd type="none" w="med" len="med"/>
-                    </a:lnB>
-                  </a:tcPr>
-                </a:tc>
-                <a:tc>
-                  <a:txBody>
-                    <a:bodyPr/>
-                    <a:lstStyle/>
-                    <a:p>
-                      <a:pPr indent="0" marL="0">
-                        <a:buNone/>
-                      </a:pPr>
-                      <a:r>
-                        <a:rPr lang="en-US" sz="850" dirty="0">
-                          <a:solidFill>
-                            <a:srgbClr val="1F2A1F"/>
-                          </a:solidFill>
-                          <a:latin typeface="Calibri" pitchFamily="34" charset="0"/>
-                          <a:ea typeface="Calibri" pitchFamily="34" charset="-122"/>
-                          <a:cs typeface="Calibri" pitchFamily="34" charset="-120"/>
-                        </a:rPr>
-                        <a:t>Klasse</a:t>
-                      </a:r>
-                      <a:endParaRPr lang="en-US" sz="850" dirty="0">
-                        <a:latin typeface="Calibri" charset="0"/>
-                        <a:ea typeface="Calibri" charset="0"/>
-                        <a:cs typeface="Calibri" charset="0"/>
-                      </a:endParaRPr>
-                    </a:p>
-                  </a:txBody>
-                  <a:tcPr marL="63500" marR="63500" marT="25400" marB="25400" anchor="ctr">
-                    <a:lnL w="9525" cap="flat" cmpd="sng" algn="ctr">
-                      <a:solidFill>
-                        <a:srgbClr val="C9D1C9"/>
-                      </a:solidFill>
-                      <a:prstDash val="solid"/>
-                      <a:round/>
-                      <a:headEnd type="none" w="med" len="med"/>
-                      <a:tailEnd type="none" w="med" len="med"/>
-                    </a:lnL>
-                    <a:lnR w="9525" cap="flat" cmpd="sng" algn="ctr">
-                      <a:solidFill>
-                        <a:srgbClr val="C9D1C9"/>
-                      </a:solidFill>
-                      <a:prstDash val="solid"/>
-                      <a:round/>
-                      <a:headEnd type="none" w="med" len="med"/>
-                      <a:tailEnd type="none" w="med" len="med"/>
-                    </a:lnR>
-                    <a:lnT w="9525" cap="flat" cmpd="sng" algn="ctr">
-                      <a:solidFill>
-                        <a:srgbClr val="C9D1C9"/>
-                      </a:solidFill>
-                      <a:prstDash val="solid"/>
-                      <a:round/>
-                      <a:headEnd type="none" w="med" len="med"/>
-                      <a:tailEnd type="none" w="med" len="med"/>
-                    </a:lnT>
-                    <a:lnB w="9525" cap="flat" cmpd="sng" algn="ctr">
-                      <a:solidFill>
-                        <a:srgbClr val="C9D1C9"/>
-                      </a:solidFill>
-                      <a:prstDash val="solid"/>
-                      <a:round/>
-                      <a:headEnd type="none" w="med" len="med"/>
-                      <a:tailEnd type="none" w="med" len="med"/>
-                    </a:lnB>
-                  </a:tcPr>
-                </a:tc>
-                <a:tc>
-                  <a:txBody>
-                    <a:bodyPr/>
-                    <a:lstStyle/>
-                    <a:p>
-                      <a:pPr indent="0" marL="0">
-                        <a:buNone/>
-                      </a:pPr>
-                      <a:r>
-                        <a:rPr lang="en-US" sz="850" dirty="0">
-                          <a:solidFill>
-                            <a:srgbClr val="1F2A1F"/>
-                          </a:solidFill>
-                          <a:latin typeface="Calibri" pitchFamily="34" charset="0"/>
-                          <a:ea typeface="Calibri" pitchFamily="34" charset="-122"/>
-                          <a:cs typeface="Calibri" pitchFamily="34" charset="-120"/>
-                        </a:rPr>
-                        <a:t>C1, C2, C6</a:t>
-                      </a:r>
-                      <a:endParaRPr lang="en-US" sz="850" dirty="0">
-                        <a:latin typeface="Calibri" charset="0"/>
-                        <a:ea typeface="Calibri" charset="0"/>
-                        <a:cs typeface="Calibri" charset="0"/>
-                      </a:endParaRPr>
-                    </a:p>
-                  </a:txBody>
-                  <a:tcPr marL="63500" marR="63500" marT="25400" marB="25400" anchor="ctr">
-                    <a:lnL w="9525" cap="flat" cmpd="sng" algn="ctr">
-                      <a:solidFill>
-                        <a:srgbClr val="C9D1C9"/>
-                      </a:solidFill>
-                      <a:prstDash val="solid"/>
-                      <a:round/>
-                      <a:headEnd type="none" w="med" len="med"/>
-                      <a:tailEnd type="none" w="med" len="med"/>
-                    </a:lnL>
-                    <a:lnR w="9525" cap="flat" cmpd="sng" algn="ctr">
-                      <a:solidFill>
-                        <a:srgbClr val="C9D1C9"/>
-                      </a:solidFill>
-                      <a:prstDash val="solid"/>
-                      <a:round/>
-                      <a:headEnd type="none" w="med" len="med"/>
-                      <a:tailEnd type="none" w="med" len="med"/>
-                    </a:lnR>
-                    <a:lnT w="9525" cap="flat" cmpd="sng" algn="ctr">
-                      <a:solidFill>
-                        <a:srgbClr val="C9D1C9"/>
-                      </a:solidFill>
-                      <a:prstDash val="solid"/>
-                      <a:round/>
-                      <a:headEnd type="none" w="med" len="med"/>
-                      <a:tailEnd type="none" w="med" len="med"/>
-                    </a:lnT>
-                    <a:lnB w="9525" cap="flat" cmpd="sng" algn="ctr">
-                      <a:solidFill>
-                        <a:srgbClr val="C9D1C9"/>
-                      </a:solidFill>
-                      <a:prstDash val="solid"/>
-                      <a:round/>
-                      <a:headEnd type="none" w="med" len="med"/>
-                      <a:tailEnd type="none" w="med" len="med"/>
-                    </a:lnB>
-                  </a:tcPr>
-                </a:tc>
-              </a:tr>
-              <a:tr h="310896">
-                <a:tc>
-                  <a:txBody>
-                    <a:bodyPr/>
-                    <a:lstStyle/>
-                    <a:p>
-                      <a:pPr indent="0" marL="0">
-                        <a:buNone/>
-                      </a:pPr>
-                      <a:r>
-                        <a:rPr lang="en-US" sz="850" b="1" dirty="0">
-                          <a:solidFill>
-                            <a:srgbClr val="2C5F2D"/>
-                          </a:solidFill>
-                          <a:latin typeface="Calibri" pitchFamily="34" charset="0"/>
-                          <a:ea typeface="Calibri" pitchFamily="34" charset="-122"/>
-                          <a:cs typeface="Calibri" pitchFamily="34" charset="-120"/>
-                        </a:rPr>
-                        <a:t>Thema</a:t>
-                      </a:r>
-                      <a:endParaRPr lang="en-US" sz="850" dirty="0">
-                        <a:latin typeface="Calibri" charset="0"/>
-                        <a:ea typeface="Calibri" charset="0"/>
-                        <a:cs typeface="Calibri" charset="0"/>
-                      </a:endParaRPr>
-                    </a:p>
-                  </a:txBody>
-                  <a:tcPr marL="63500" marR="63500" marT="25400" marB="25400" anchor="ctr">
-                    <a:lnL w="9525" cap="flat" cmpd="sng" algn="ctr">
-                      <a:solidFill>
-                        <a:srgbClr val="C9D1C9"/>
-                      </a:solidFill>
-                      <a:prstDash val="solid"/>
-                      <a:round/>
-                      <a:headEnd type="none" w="med" len="med"/>
-                      <a:tailEnd type="none" w="med" len="med"/>
-                    </a:lnL>
-                    <a:lnR w="9525" cap="flat" cmpd="sng" algn="ctr">
-                      <a:solidFill>
-                        <a:srgbClr val="C9D1C9"/>
-                      </a:solidFill>
-                      <a:prstDash val="solid"/>
-                      <a:round/>
-                      <a:headEnd type="none" w="med" len="med"/>
-                      <a:tailEnd type="none" w="med" len="med"/>
-                    </a:lnR>
-                    <a:lnT w="9525" cap="flat" cmpd="sng" algn="ctr">
-                      <a:solidFill>
-                        <a:srgbClr val="C9D1C9"/>
-                      </a:solidFill>
-                      <a:prstDash val="solid"/>
-                      <a:round/>
-                      <a:headEnd type="none" w="med" len="med"/>
-                      <a:tailEnd type="none" w="med" len="med"/>
-                    </a:lnT>
-                    <a:lnB w="9525" cap="flat" cmpd="sng" algn="ctr">
-                      <a:solidFill>
-                        <a:srgbClr val="C9D1C9"/>
-                      </a:solidFill>
-                      <a:prstDash val="solid"/>
-                      <a:round/>
-                      <a:headEnd type="none" w="med" len="med"/>
-                      <a:tailEnd type="none" w="med" len="med"/>
-                    </a:lnB>
-                    <a:solidFill>
-                      <a:srgbClr val="EEF4E8"/>
-                    </a:solidFill>
-                  </a:tcPr>
-                </a:tc>
-                <a:tc>
-                  <a:txBody>
-                    <a:bodyPr/>
-                    <a:lstStyle/>
-                    <a:p>
-                      <a:pPr indent="0" marL="0">
-                        <a:buNone/>
-                      </a:pPr>
-                      <a:r>
-                        <a:rPr lang="en-US" sz="850" dirty="0">
-                          <a:solidFill>
-                            <a:srgbClr val="1F2A1F"/>
-                          </a:solidFill>
-                          <a:latin typeface="Calibri" pitchFamily="34" charset="0"/>
-                          <a:ea typeface="Calibri" pitchFamily="34" charset="-122"/>
-                          <a:cs typeface="Calibri" pitchFamily="34" charset="-120"/>
-                        </a:rPr>
-                        <a:t>Ziel</a:t>
-                      </a:r>
-                      <a:endParaRPr lang="en-US" sz="850" dirty="0">
-                        <a:latin typeface="Calibri" charset="0"/>
-                        <a:ea typeface="Calibri" charset="0"/>
-                        <a:cs typeface="Calibri" charset="0"/>
-                      </a:endParaRPr>
-                    </a:p>
-                  </a:txBody>
-                  <a:tcPr marL="63500" marR="63500" marT="25400" marB="25400" anchor="ctr">
-                    <a:lnL w="9525" cap="flat" cmpd="sng" algn="ctr">
-                      <a:solidFill>
-                        <a:srgbClr val="C9D1C9"/>
-                      </a:solidFill>
-                      <a:prstDash val="solid"/>
-                      <a:round/>
-                      <a:headEnd type="none" w="med" len="med"/>
-                      <a:tailEnd type="none" w="med" len="med"/>
-                    </a:lnL>
-                    <a:lnR w="9525" cap="flat" cmpd="sng" algn="ctr">
-                      <a:solidFill>
-                        <a:srgbClr val="C9D1C9"/>
-                      </a:solidFill>
-                      <a:prstDash val="solid"/>
-                      <a:round/>
-                      <a:headEnd type="none" w="med" len="med"/>
-                      <a:tailEnd type="none" w="med" len="med"/>
-                    </a:lnR>
-                    <a:lnT w="9525" cap="flat" cmpd="sng" algn="ctr">
-                      <a:solidFill>
-                        <a:srgbClr val="C9D1C9"/>
-                      </a:solidFill>
-                      <a:prstDash val="solid"/>
-                      <a:round/>
-                      <a:headEnd type="none" w="med" len="med"/>
-                      <a:tailEnd type="none" w="med" len="med"/>
-                    </a:lnT>
-                    <a:lnB w="9525" cap="flat" cmpd="sng" algn="ctr">
-                      <a:solidFill>
-                        <a:srgbClr val="C9D1C9"/>
-                      </a:solidFill>
-                      <a:prstDash val="solid"/>
-                      <a:round/>
-                      <a:headEnd type="none" w="med" len="med"/>
-                      <a:tailEnd type="none" w="med" len="med"/>
-                    </a:lnB>
-                  </a:tcPr>
-                </a:tc>
-                <a:tc>
-                  <a:txBody>
-                    <a:bodyPr/>
-                    <a:lstStyle/>
-                    <a:p>
-                      <a:pPr indent="0" marL="0">
-                        <a:buNone/>
-                      </a:pPr>
-                      <a:r>
-                        <a:rPr lang="en-US" sz="850" dirty="0">
-                          <a:solidFill>
-                            <a:srgbClr val="1F2A1F"/>
-                          </a:solidFill>
-                          <a:latin typeface="Calibri" pitchFamily="34" charset="0"/>
-                          <a:ea typeface="Calibri" pitchFamily="34" charset="-122"/>
-                          <a:cs typeface="Calibri" pitchFamily="34" charset="-120"/>
-                        </a:rPr>
-                        <a:t>prüfen</a:t>
-                      </a:r>
-                      <a:endParaRPr lang="en-US" sz="850" dirty="0">
-                        <a:latin typeface="Calibri" charset="0"/>
-                        <a:ea typeface="Calibri" charset="0"/>
-                        <a:cs typeface="Calibri" charset="0"/>
-                      </a:endParaRPr>
-                    </a:p>
-                  </a:txBody>
-                  <a:tcPr marL="63500" marR="63500" marT="25400" marB="25400" anchor="ctr">
-                    <a:lnL w="9525" cap="flat" cmpd="sng" algn="ctr">
-                      <a:solidFill>
-                        <a:srgbClr val="C9D1C9"/>
-                      </a:solidFill>
-                      <a:prstDash val="solid"/>
-                      <a:round/>
-                      <a:headEnd type="none" w="med" len="med"/>
-                      <a:tailEnd type="none" w="med" len="med"/>
-                    </a:lnL>
-                    <a:lnR w="9525" cap="flat" cmpd="sng" algn="ctr">
-                      <a:solidFill>
-                        <a:srgbClr val="C9D1C9"/>
-                      </a:solidFill>
-                      <a:prstDash val="solid"/>
-                      <a:round/>
-                      <a:headEnd type="none" w="med" len="med"/>
-                      <a:tailEnd type="none" w="med" len="med"/>
-                    </a:lnR>
-                    <a:lnT w="9525" cap="flat" cmpd="sng" algn="ctr">
-                      <a:solidFill>
-                        <a:srgbClr val="C9D1C9"/>
-                      </a:solidFill>
-                      <a:prstDash val="solid"/>
-                      <a:round/>
-                      <a:headEnd type="none" w="med" len="med"/>
-                      <a:tailEnd type="none" w="med" len="med"/>
-                    </a:lnT>
-                    <a:lnB w="9525" cap="flat" cmpd="sng" algn="ctr">
-                      <a:solidFill>
-                        <a:srgbClr val="C9D1C9"/>
-                      </a:solidFill>
-                      <a:prstDash val="solid"/>
-                      <a:round/>
-                      <a:headEnd type="none" w="med" len="med"/>
-                      <a:tailEnd type="none" w="med" len="med"/>
-                    </a:lnB>
-                  </a:tcPr>
-                </a:tc>
-                <a:tc>
-                  <a:txBody>
-                    <a:bodyPr/>
-                    <a:lstStyle/>
-                    <a:p>
-                      <a:pPr indent="0" marL="0">
-                        <a:buNone/>
-                      </a:pPr>
-                      <a:r>
-                        <a:rPr lang="en-US" sz="850" dirty="0">
-                          <a:solidFill>
-                            <a:srgbClr val="1F2A1F"/>
-                          </a:solidFill>
-                          <a:latin typeface="Calibri" pitchFamily="34" charset="0"/>
-                          <a:ea typeface="Calibri" pitchFamily="34" charset="-122"/>
-                          <a:cs typeface="Calibri" pitchFamily="34" charset="-120"/>
-                        </a:rPr>
-                        <a:t>Klasse</a:t>
-                      </a:r>
-                      <a:endParaRPr lang="en-US" sz="850" dirty="0">
-                        <a:latin typeface="Calibri" charset="0"/>
-                        <a:ea typeface="Calibri" charset="0"/>
-                        <a:cs typeface="Calibri" charset="0"/>
-                      </a:endParaRPr>
-                    </a:p>
-                  </a:txBody>
-                  <a:tcPr marL="63500" marR="63500" marT="25400" marB="25400" anchor="ctr">
-                    <a:lnL w="9525" cap="flat" cmpd="sng" algn="ctr">
-                      <a:solidFill>
-                        <a:srgbClr val="C9D1C9"/>
-                      </a:solidFill>
-                      <a:prstDash val="solid"/>
-                      <a:round/>
-                      <a:headEnd type="none" w="med" len="med"/>
-                      <a:tailEnd type="none" w="med" len="med"/>
-                    </a:lnL>
-                    <a:lnR w="9525" cap="flat" cmpd="sng" algn="ctr">
-                      <a:solidFill>
-                        <a:srgbClr val="C9D1C9"/>
-                      </a:solidFill>
-                      <a:prstDash val="solid"/>
-                      <a:round/>
-                      <a:headEnd type="none" w="med" len="med"/>
-                      <a:tailEnd type="none" w="med" len="med"/>
-                    </a:lnR>
-                    <a:lnT w="9525" cap="flat" cmpd="sng" algn="ctr">
-                      <a:solidFill>
-                        <a:srgbClr val="C9D1C9"/>
-                      </a:solidFill>
-                      <a:prstDash val="solid"/>
-                      <a:round/>
-                      <a:headEnd type="none" w="med" len="med"/>
-                      <a:tailEnd type="none" w="med" len="med"/>
-                    </a:lnT>
-                    <a:lnB w="9525" cap="flat" cmpd="sng" algn="ctr">
-                      <a:solidFill>
-                        <a:srgbClr val="C9D1C9"/>
-                      </a:solidFill>
-                      <a:prstDash val="solid"/>
-                      <a:round/>
-                      <a:headEnd type="none" w="med" len="med"/>
-                      <a:tailEnd type="none" w="med" len="med"/>
-                    </a:lnB>
-                  </a:tcPr>
-                </a:tc>
-                <a:tc>
-                  <a:txBody>
-                    <a:bodyPr/>
-                    <a:lstStyle/>
-                    <a:p>
-                      <a:pPr indent="0" marL="0">
-                        <a:buNone/>
-                      </a:pPr>
-                      <a:r>
-                        <a:rPr lang="en-US" sz="850" dirty="0">
-                          <a:solidFill>
-                            <a:srgbClr val="1F2A1F"/>
-                          </a:solidFill>
-                          <a:latin typeface="Calibri" pitchFamily="34" charset="0"/>
-                          <a:ea typeface="Calibri" pitchFamily="34" charset="-122"/>
-                          <a:cs typeface="Calibri" pitchFamily="34" charset="-120"/>
-                        </a:rPr>
-                        <a:t>C2 bis C5</a:t>
-                      </a:r>
-                      <a:endParaRPr lang="en-US" sz="850" dirty="0">
-                        <a:latin typeface="Calibri" charset="0"/>
-                        <a:ea typeface="Calibri" charset="0"/>
-                        <a:cs typeface="Calibri" charset="0"/>
-                      </a:endParaRPr>
-                    </a:p>
-                  </a:txBody>
-                  <a:tcPr marL="63500" marR="63500" marT="25400" marB="25400" anchor="ctr">
-                    <a:lnL w="9525" cap="flat" cmpd="sng" algn="ctr">
-                      <a:solidFill>
-                        <a:srgbClr val="C9D1C9"/>
-                      </a:solidFill>
-                      <a:prstDash val="solid"/>
-                      <a:round/>
-                      <a:headEnd type="none" w="med" len="med"/>
-                      <a:tailEnd type="none" w="med" len="med"/>
-                    </a:lnL>
-                    <a:lnR w="9525" cap="flat" cmpd="sng" algn="ctr">
-                      <a:solidFill>
-                        <a:srgbClr val="C9D1C9"/>
-                      </a:solidFill>
-                      <a:prstDash val="solid"/>
-                      <a:round/>
-                      <a:headEnd type="none" w="med" len="med"/>
-                      <a:tailEnd type="none" w="med" len="med"/>
-                    </a:lnR>
-                    <a:lnT w="9525" cap="flat" cmpd="sng" algn="ctr">
-                      <a:solidFill>
-                        <a:srgbClr val="C9D1C9"/>
-                      </a:solidFill>
-                      <a:prstDash val="solid"/>
-                      <a:round/>
-                      <a:headEnd type="none" w="med" len="med"/>
-                      <a:tailEnd type="none" w="med" len="med"/>
-                    </a:lnT>
-                    <a:lnB w="9525" cap="flat" cmpd="sng" algn="ctr">
-                      <a:solidFill>
-                        <a:srgbClr val="C9D1C9"/>
-                      </a:solidFill>
-                      <a:prstDash val="solid"/>
-                      <a:round/>
-                      <a:headEnd type="none" w="med" len="med"/>
-                      <a:tailEnd type="none" w="med" len="med"/>
-                    </a:lnB>
-                  </a:tcPr>
-                </a:tc>
-              </a:tr>
-              <a:tr h="310896">
-                <a:tc>
-                  <a:txBody>
-                    <a:bodyPr/>
-                    <a:lstStyle/>
-                    <a:p>
-                      <a:pPr indent="0" marL="0">
-                        <a:buNone/>
-                      </a:pPr>
-                      <a:r>
-                        <a:rPr lang="en-US" sz="850" b="1" dirty="0">
-                          <a:solidFill>
-                            <a:srgbClr val="2C5F2D"/>
-                          </a:solidFill>
-                          <a:latin typeface="Calibri" pitchFamily="34" charset="0"/>
-                          <a:ea typeface="Calibri" pitchFamily="34" charset="-122"/>
-                          <a:cs typeface="Calibri" pitchFamily="34" charset="-120"/>
-                        </a:rPr>
-                        <a:t>Themenfreigabe</a:t>
-                      </a:r>
-                      <a:endParaRPr lang="en-US" sz="850" dirty="0">
-                        <a:latin typeface="Calibri" charset="0"/>
-                        <a:ea typeface="Calibri" charset="0"/>
-                        <a:cs typeface="Calibri" charset="0"/>
-                      </a:endParaRPr>
-                    </a:p>
-                  </a:txBody>
-                  <a:tcPr marL="63500" marR="63500" marT="25400" marB="25400" anchor="ctr">
-                    <a:lnL w="9525" cap="flat" cmpd="sng" algn="ctr">
-                      <a:solidFill>
-                        <a:srgbClr val="C9D1C9"/>
-                      </a:solidFill>
-                      <a:prstDash val="solid"/>
-                      <a:round/>
-                      <a:headEnd type="none" w="med" len="med"/>
-                      <a:tailEnd type="none" w="med" len="med"/>
-                    </a:lnL>
-                    <a:lnR w="9525" cap="flat" cmpd="sng" algn="ctr">
-                      <a:solidFill>
-                        <a:srgbClr val="C9D1C9"/>
-                      </a:solidFill>
-                      <a:prstDash val="solid"/>
-                      <a:round/>
-                      <a:headEnd type="none" w="med" len="med"/>
-                      <a:tailEnd type="none" w="med" len="med"/>
-                    </a:lnR>
-                    <a:lnT w="9525" cap="flat" cmpd="sng" algn="ctr">
-                      <a:solidFill>
-                        <a:srgbClr val="C9D1C9"/>
-                      </a:solidFill>
-                      <a:prstDash val="solid"/>
-                      <a:round/>
-                      <a:headEnd type="none" w="med" len="med"/>
-                      <a:tailEnd type="none" w="med" len="med"/>
-                    </a:lnT>
-                    <a:lnB w="9525" cap="flat" cmpd="sng" algn="ctr">
-                      <a:solidFill>
-                        <a:srgbClr val="C9D1C9"/>
-                      </a:solidFill>
-                      <a:prstDash val="solid"/>
-                      <a:round/>
-                      <a:headEnd type="none" w="med" len="med"/>
-                      <a:tailEnd type="none" w="med" len="med"/>
-                    </a:lnB>
-                    <a:solidFill>
-                      <a:srgbClr val="EEF4E8"/>
-                    </a:solidFill>
-                  </a:tcPr>
-                </a:tc>
-                <a:tc>
-                  <a:txBody>
-                    <a:bodyPr/>
-                    <a:lstStyle/>
-                    <a:p>
-                      <a:pPr indent="0" marL="0">
-                        <a:buNone/>
-                      </a:pPr>
-                      <a:r>
-                        <a:rPr lang="en-US" sz="850" dirty="0">
-                          <a:solidFill>
-                            <a:srgbClr val="1F2A1F"/>
-                          </a:solidFill>
-                          <a:latin typeface="Calibri" pitchFamily="34" charset="0"/>
-                          <a:ea typeface="Calibri" pitchFamily="34" charset="-122"/>
-                          <a:cs typeface="Calibri" pitchFamily="34" charset="-120"/>
-                        </a:rPr>
-                        <a:t>Aufgaben</a:t>
-                      </a:r>
-                      <a:endParaRPr lang="en-US" sz="850" dirty="0">
-                        <a:latin typeface="Calibri" charset="0"/>
-                        <a:ea typeface="Calibri" charset="0"/>
-                        <a:cs typeface="Calibri" charset="0"/>
-                      </a:endParaRPr>
-                    </a:p>
-                  </a:txBody>
-                  <a:tcPr marL="63500" marR="63500" marT="25400" marB="25400" anchor="ctr">
-                    <a:lnL w="9525" cap="flat" cmpd="sng" algn="ctr">
-                      <a:solidFill>
-                        <a:srgbClr val="C9D1C9"/>
-                      </a:solidFill>
-                      <a:prstDash val="solid"/>
-                      <a:round/>
-                      <a:headEnd type="none" w="med" len="med"/>
-                      <a:tailEnd type="none" w="med" len="med"/>
-                    </a:lnL>
-                    <a:lnR w="9525" cap="flat" cmpd="sng" algn="ctr">
-                      <a:solidFill>
-                        <a:srgbClr val="C9D1C9"/>
-                      </a:solidFill>
-                      <a:prstDash val="solid"/>
-                      <a:round/>
-                      <a:headEnd type="none" w="med" len="med"/>
-                      <a:tailEnd type="none" w="med" len="med"/>
-                    </a:lnR>
-                    <a:lnT w="9525" cap="flat" cmpd="sng" algn="ctr">
-                      <a:solidFill>
-                        <a:srgbClr val="C9D1C9"/>
-                      </a:solidFill>
-                      <a:prstDash val="solid"/>
-                      <a:round/>
-                      <a:headEnd type="none" w="med" len="med"/>
-                      <a:tailEnd type="none" w="med" len="med"/>
-                    </a:lnT>
-                    <a:lnB w="9525" cap="flat" cmpd="sng" algn="ctr">
-                      <a:solidFill>
-                        <a:srgbClr val="C9D1C9"/>
-                      </a:solidFill>
-                      <a:prstDash val="solid"/>
-                      <a:round/>
-                      <a:headEnd type="none" w="med" len="med"/>
-                      <a:tailEnd type="none" w="med" len="med"/>
-                    </a:lnB>
-                  </a:tcPr>
-                </a:tc>
-                <a:tc>
-                  <a:txBody>
-                    <a:bodyPr/>
-                    <a:lstStyle/>
-                    <a:p>
-                      <a:pPr indent="0" marL="0">
-                        <a:buNone/>
-                      </a:pPr>
-                      <a:r>
-                        <a:rPr lang="en-US" sz="850" dirty="0">
-                          <a:solidFill>
-                            <a:srgbClr val="1F2A1F"/>
-                          </a:solidFill>
-                          <a:latin typeface="Calibri" pitchFamily="34" charset="0"/>
-                          <a:ea typeface="Calibri" pitchFamily="34" charset="-122"/>
-                          <a:cs typeface="Calibri" pitchFamily="34" charset="-120"/>
-                        </a:rPr>
-                        <a:t>speichern</a:t>
-                      </a:r>
-                      <a:endParaRPr lang="en-US" sz="850" dirty="0">
-                        <a:latin typeface="Calibri" charset="0"/>
-                        <a:ea typeface="Calibri" charset="0"/>
-                        <a:cs typeface="Calibri" charset="0"/>
-                      </a:endParaRPr>
-                    </a:p>
-                  </a:txBody>
-                  <a:tcPr marL="63500" marR="63500" marT="25400" marB="25400" anchor="ctr">
-                    <a:lnL w="9525" cap="flat" cmpd="sng" algn="ctr">
-                      <a:solidFill>
-                        <a:srgbClr val="C9D1C9"/>
-                      </a:solidFill>
-                      <a:prstDash val="solid"/>
-                      <a:round/>
-                      <a:headEnd type="none" w="med" len="med"/>
-                      <a:tailEnd type="none" w="med" len="med"/>
-                    </a:lnL>
-                    <a:lnR w="9525" cap="flat" cmpd="sng" algn="ctr">
-                      <a:solidFill>
-                        <a:srgbClr val="C9D1C9"/>
-                      </a:solidFill>
-                      <a:prstDash val="solid"/>
-                      <a:round/>
-                      <a:headEnd type="none" w="med" len="med"/>
-                      <a:tailEnd type="none" w="med" len="med"/>
-                    </a:lnR>
-                    <a:lnT w="9525" cap="flat" cmpd="sng" algn="ctr">
-                      <a:solidFill>
-                        <a:srgbClr val="C9D1C9"/>
-                      </a:solidFill>
-                      <a:prstDash val="solid"/>
-                      <a:round/>
-                      <a:headEnd type="none" w="med" len="med"/>
-                      <a:tailEnd type="none" w="med" len="med"/>
-                    </a:lnT>
-                    <a:lnB w="9525" cap="flat" cmpd="sng" algn="ctr">
-                      <a:solidFill>
-                        <a:srgbClr val="C9D1C9"/>
-                      </a:solidFill>
-                      <a:prstDash val="solid"/>
-                      <a:round/>
-                      <a:headEnd type="none" w="med" len="med"/>
-                      <a:tailEnd type="none" w="med" len="med"/>
-                    </a:lnB>
-                  </a:tcPr>
-                </a:tc>
-                <a:tc>
-                  <a:txBody>
-                    <a:bodyPr/>
-                    <a:lstStyle/>
-                    <a:p>
-                      <a:pPr indent="0" marL="0">
-                        <a:buNone/>
-                      </a:pPr>
-                      <a:r>
-                        <a:rPr lang="en-US" sz="850" dirty="0">
-                          <a:solidFill>
-                            <a:srgbClr val="1F2A1F"/>
-                          </a:solidFill>
-                          <a:latin typeface="Calibri" pitchFamily="34" charset="0"/>
-                          <a:ea typeface="Calibri" pitchFamily="34" charset="-122"/>
-                          <a:cs typeface="Calibri" pitchFamily="34" charset="-120"/>
-                        </a:rPr>
-                        <a:t>Klasse</a:t>
-                      </a:r>
-                      <a:endParaRPr lang="en-US" sz="850" dirty="0">
-                        <a:latin typeface="Calibri" charset="0"/>
-                        <a:ea typeface="Calibri" charset="0"/>
-                        <a:cs typeface="Calibri" charset="0"/>
-                      </a:endParaRPr>
-                    </a:p>
-                  </a:txBody>
-                  <a:tcPr marL="63500" marR="63500" marT="25400" marB="25400" anchor="ctr">
-                    <a:lnL w="9525" cap="flat" cmpd="sng" algn="ctr">
-                      <a:solidFill>
-                        <a:srgbClr val="C9D1C9"/>
-                      </a:solidFill>
-                      <a:prstDash val="solid"/>
-                      <a:round/>
-                      <a:headEnd type="none" w="med" len="med"/>
-                      <a:tailEnd type="none" w="med" len="med"/>
-                    </a:lnL>
-                    <a:lnR w="9525" cap="flat" cmpd="sng" algn="ctr">
-                      <a:solidFill>
-                        <a:srgbClr val="C9D1C9"/>
-                      </a:solidFill>
-                      <a:prstDash val="solid"/>
-                      <a:round/>
-                      <a:headEnd type="none" w="med" len="med"/>
-                      <a:tailEnd type="none" w="med" len="med"/>
-                    </a:lnR>
-                    <a:lnT w="9525" cap="flat" cmpd="sng" algn="ctr">
-                      <a:solidFill>
-                        <a:srgbClr val="C9D1C9"/>
-                      </a:solidFill>
-                      <a:prstDash val="solid"/>
-                      <a:round/>
-                      <a:headEnd type="none" w="med" len="med"/>
-                      <a:tailEnd type="none" w="med" len="med"/>
-                    </a:lnT>
-                    <a:lnB w="9525" cap="flat" cmpd="sng" algn="ctr">
-                      <a:solidFill>
-                        <a:srgbClr val="C9D1C9"/>
-                      </a:solidFill>
-                      <a:prstDash val="solid"/>
-                      <a:round/>
-                      <a:headEnd type="none" w="med" len="med"/>
-                      <a:tailEnd type="none" w="med" len="med"/>
-                    </a:lnB>
-                  </a:tcPr>
-                </a:tc>
-                <a:tc>
-                  <a:txBody>
-                    <a:bodyPr/>
-                    <a:lstStyle/>
-                    <a:p>
-                      <a:pPr indent="0" marL="0">
-                        <a:buNone/>
-                      </a:pPr>
-                      <a:r>
-                        <a:rPr lang="en-US" sz="850" dirty="0">
-                          <a:solidFill>
-                            <a:srgbClr val="1F2A1F"/>
-                          </a:solidFill>
-                          <a:latin typeface="Calibri" pitchFamily="34" charset="0"/>
-                          <a:ea typeface="Calibri" pitchFamily="34" charset="-122"/>
-                          <a:cs typeface="Calibri" pitchFamily="34" charset="-120"/>
-                        </a:rPr>
-                        <a:t>C4, C6</a:t>
-                      </a:r>
-                      <a:endParaRPr lang="en-US" sz="850" dirty="0">
-                        <a:latin typeface="Calibri" charset="0"/>
-                        <a:ea typeface="Calibri" charset="0"/>
-                        <a:cs typeface="Calibri" charset="0"/>
-                      </a:endParaRPr>
-                    </a:p>
-                  </a:txBody>
-                  <a:tcPr marL="63500" marR="63500" marT="25400" marB="25400" anchor="ctr">
-                    <a:lnL w="9525" cap="flat" cmpd="sng" algn="ctr">
-                      <a:solidFill>
-                        <a:srgbClr val="C9D1C9"/>
-                      </a:solidFill>
-                      <a:prstDash val="solid"/>
-                      <a:round/>
-                      <a:headEnd type="none" w="med" len="med"/>
-                      <a:tailEnd type="none" w="med" len="med"/>
-                    </a:lnL>
-                    <a:lnR w="9525" cap="flat" cmpd="sng" algn="ctr">
-                      <a:solidFill>
-                        <a:srgbClr val="C9D1C9"/>
-                      </a:solidFill>
-                      <a:prstDash val="solid"/>
-                      <a:round/>
-                      <a:headEnd type="none" w="med" len="med"/>
-                      <a:tailEnd type="none" w="med" len="med"/>
-                    </a:lnR>
-                    <a:lnT w="9525" cap="flat" cmpd="sng" algn="ctr">
-                      <a:solidFill>
-                        <a:srgbClr val="C9D1C9"/>
-                      </a:solidFill>
-                      <a:prstDash val="solid"/>
-                      <a:round/>
-                      <a:headEnd type="none" w="med" len="med"/>
-                      <a:tailEnd type="none" w="med" len="med"/>
-                    </a:lnT>
-                    <a:lnB w="9525" cap="flat" cmpd="sng" algn="ctr">
-                      <a:solidFill>
-                        <a:srgbClr val="C9D1C9"/>
-                      </a:solidFill>
-                      <a:prstDash val="solid"/>
-                      <a:round/>
-                      <a:headEnd type="none" w="med" len="med"/>
-                      <a:tailEnd type="none" w="med" len="med"/>
-                    </a:lnB>
-                  </a:tcPr>
-                </a:tc>
-              </a:tr>
-              <a:tr h="310896">
-                <a:tc>
-                  <a:txBody>
-                    <a:bodyPr/>
-                    <a:lstStyle/>
-                    <a:p>
-                      <a:pPr indent="0" marL="0">
-                        <a:buNone/>
-                      </a:pPr>
-                      <a:r>
-                        <a:rPr lang="en-US" sz="850" b="1" dirty="0">
-                          <a:solidFill>
-                            <a:srgbClr val="2C5F2D"/>
-                          </a:solidFill>
-                          <a:latin typeface="Calibri" pitchFamily="34" charset="0"/>
-                          <a:ea typeface="Calibri" pitchFamily="34" charset="-122"/>
-                          <a:cs typeface="Calibri" pitchFamily="34" charset="-120"/>
-                        </a:rPr>
-                        <a:t>Studierende:r</a:t>
-                      </a:r>
-                      <a:endParaRPr lang="en-US" sz="850" dirty="0">
-                        <a:latin typeface="Calibri" charset="0"/>
-                        <a:ea typeface="Calibri" charset="0"/>
-                        <a:cs typeface="Calibri" charset="0"/>
-                      </a:endParaRPr>
-                    </a:p>
-                  </a:txBody>
-                  <a:tcPr marL="63500" marR="63500" marT="25400" marB="25400" anchor="ctr">
-                    <a:lnL w="9525" cap="flat" cmpd="sng" algn="ctr">
-                      <a:solidFill>
-                        <a:srgbClr val="C9D1C9"/>
-                      </a:solidFill>
-                      <a:prstDash val="solid"/>
-                      <a:round/>
-                      <a:headEnd type="none" w="med" len="med"/>
-                      <a:tailEnd type="none" w="med" len="med"/>
-                    </a:lnL>
-                    <a:lnR w="9525" cap="flat" cmpd="sng" algn="ctr">
-                      <a:solidFill>
-                        <a:srgbClr val="C9D1C9"/>
-                      </a:solidFill>
-                      <a:prstDash val="solid"/>
-                      <a:round/>
-                      <a:headEnd type="none" w="med" len="med"/>
-                      <a:tailEnd type="none" w="med" len="med"/>
-                    </a:lnR>
-                    <a:lnT w="9525" cap="flat" cmpd="sng" algn="ctr">
-                      <a:solidFill>
-                        <a:srgbClr val="C9D1C9"/>
-                      </a:solidFill>
-                      <a:prstDash val="solid"/>
-                      <a:round/>
-                      <a:headEnd type="none" w="med" len="med"/>
-                      <a:tailEnd type="none" w="med" len="med"/>
-                    </a:lnT>
-                    <a:lnB w="9525" cap="flat" cmpd="sng" algn="ctr">
-                      <a:solidFill>
-                        <a:srgbClr val="C9D1C9"/>
-                      </a:solidFill>
-                      <a:prstDash val="solid"/>
-                      <a:round/>
-                      <a:headEnd type="none" w="med" len="med"/>
-                      <a:tailEnd type="none" w="med" len="med"/>
-                    </a:lnB>
-                    <a:solidFill>
-                      <a:srgbClr val="EEF4E8"/>
-                    </a:solidFill>
-                  </a:tcPr>
-                </a:tc>
-                <a:tc>
-                  <a:txBody>
-                    <a:bodyPr/>
-                    <a:lstStyle/>
-                    <a:p>
-                      <a:pPr indent="0" marL="0">
-                        <a:buNone/>
-                      </a:pPr>
-                      <a:r>
-                        <a:rPr lang="en-US" sz="850" dirty="0">
-                          <a:solidFill>
-                            <a:srgbClr val="1F2A1F"/>
-                          </a:solidFill>
-                          <a:latin typeface="Calibri" pitchFamily="34" charset="0"/>
-                          <a:ea typeface="Calibri" pitchFamily="34" charset="-122"/>
-                          <a:cs typeface="Calibri" pitchFamily="34" charset="-120"/>
-                        </a:rPr>
-                        <a:t>Persona A</a:t>
-                      </a:r>
-                      <a:endParaRPr lang="en-US" sz="850" dirty="0">
-                        <a:latin typeface="Calibri" charset="0"/>
-                        <a:ea typeface="Calibri" charset="0"/>
-                        <a:cs typeface="Calibri" charset="0"/>
-                      </a:endParaRPr>
-                    </a:p>
-                  </a:txBody>
-                  <a:tcPr marL="63500" marR="63500" marT="25400" marB="25400" anchor="ctr">
-                    <a:lnL w="9525" cap="flat" cmpd="sng" algn="ctr">
-                      <a:solidFill>
-                        <a:srgbClr val="C9D1C9"/>
-                      </a:solidFill>
-                      <a:prstDash val="solid"/>
-                      <a:round/>
-                      <a:headEnd type="none" w="med" len="med"/>
-                      <a:tailEnd type="none" w="med" len="med"/>
-                    </a:lnL>
-                    <a:lnR w="9525" cap="flat" cmpd="sng" algn="ctr">
-                      <a:solidFill>
-                        <a:srgbClr val="C9D1C9"/>
-                      </a:solidFill>
-                      <a:prstDash val="solid"/>
-                      <a:round/>
-                      <a:headEnd type="none" w="med" len="med"/>
-                      <a:tailEnd type="none" w="med" len="med"/>
-                    </a:lnR>
-                    <a:lnT w="9525" cap="flat" cmpd="sng" algn="ctr">
-                      <a:solidFill>
-                        <a:srgbClr val="C9D1C9"/>
-                      </a:solidFill>
-                      <a:prstDash val="solid"/>
-                      <a:round/>
-                      <a:headEnd type="none" w="med" len="med"/>
-                      <a:tailEnd type="none" w="med" len="med"/>
-                    </a:lnT>
-                    <a:lnB w="9525" cap="flat" cmpd="sng" algn="ctr">
-                      <a:solidFill>
-                        <a:srgbClr val="C9D1C9"/>
-                      </a:solidFill>
-                      <a:prstDash val="solid"/>
-                      <a:round/>
-                      <a:headEnd type="none" w="med" len="med"/>
-                      <a:tailEnd type="none" w="med" len="med"/>
-                    </a:lnB>
-                  </a:tcPr>
-                </a:tc>
-                <a:tc>
-                  <a:txBody>
-                    <a:bodyPr/>
-                    <a:lstStyle/>
-                    <a:p>
-                      <a:pPr indent="0" marL="0">
-                        <a:buNone/>
-                      </a:pPr>
-                      <a:r>
-                        <a:rPr lang="en-US" sz="850" dirty="0">
-                          <a:solidFill>
-                            <a:srgbClr val="1F2A1F"/>
-                          </a:solidFill>
-                          <a:latin typeface="Calibri" pitchFamily="34" charset="0"/>
-                          <a:ea typeface="Calibri" pitchFamily="34" charset="-122"/>
-                          <a:cs typeface="Calibri" pitchFamily="34" charset="-120"/>
-                        </a:rPr>
-                        <a:t>Endereignis</a:t>
-                      </a:r>
-                      <a:endParaRPr lang="en-US" sz="850" dirty="0">
-                        <a:latin typeface="Calibri" charset="0"/>
-                        <a:ea typeface="Calibri" charset="0"/>
-                        <a:cs typeface="Calibri" charset="0"/>
-                      </a:endParaRPr>
-                    </a:p>
-                  </a:txBody>
-                  <a:tcPr marL="63500" marR="63500" marT="25400" marB="25400" anchor="ctr">
-                    <a:lnL w="9525" cap="flat" cmpd="sng" algn="ctr">
-                      <a:solidFill>
-                        <a:srgbClr val="C9D1C9"/>
-                      </a:solidFill>
-                      <a:prstDash val="solid"/>
-                      <a:round/>
-                      <a:headEnd type="none" w="med" len="med"/>
-                      <a:tailEnd type="none" w="med" len="med"/>
-                    </a:lnL>
-                    <a:lnR w="9525" cap="flat" cmpd="sng" algn="ctr">
-                      <a:solidFill>
-                        <a:srgbClr val="C9D1C9"/>
-                      </a:solidFill>
-                      <a:prstDash val="solid"/>
-                      <a:round/>
-                      <a:headEnd type="none" w="med" len="med"/>
-                      <a:tailEnd type="none" w="med" len="med"/>
-                    </a:lnR>
-                    <a:lnT w="9525" cap="flat" cmpd="sng" algn="ctr">
-                      <a:solidFill>
-                        <a:srgbClr val="C9D1C9"/>
-                      </a:solidFill>
-                      <a:prstDash val="solid"/>
-                      <a:round/>
-                      <a:headEnd type="none" w="med" len="med"/>
-                      <a:tailEnd type="none" w="med" len="med"/>
-                    </a:lnT>
-                    <a:lnB w="9525" cap="flat" cmpd="sng" algn="ctr">
-                      <a:solidFill>
-                        <a:srgbClr val="C9D1C9"/>
-                      </a:solidFill>
-                      <a:prstDash val="solid"/>
-                      <a:round/>
-                      <a:headEnd type="none" w="med" len="med"/>
-                      <a:tailEnd type="none" w="med" len="med"/>
-                    </a:lnB>
-                  </a:tcPr>
-                </a:tc>
-                <a:tc>
-                  <a:txBody>
-                    <a:bodyPr/>
-                    <a:lstStyle/>
-                    <a:p>
-                      <a:pPr indent="0" marL="0">
-                        <a:buNone/>
-                      </a:pPr>
-                      <a:r>
-                        <a:rPr lang="en-US" sz="850" dirty="0">
-                          <a:solidFill>
-                            <a:srgbClr val="1F2A1F"/>
-                          </a:solidFill>
-                          <a:latin typeface="Calibri" pitchFamily="34" charset="0"/>
-                          <a:ea typeface="Calibri" pitchFamily="34" charset="-122"/>
-                          <a:cs typeface="Calibri" pitchFamily="34" charset="-120"/>
-                        </a:rPr>
-                        <a:t>Klasse</a:t>
-                      </a:r>
-                      <a:endParaRPr lang="en-US" sz="850" dirty="0">
-                        <a:latin typeface="Calibri" charset="0"/>
-                        <a:ea typeface="Calibri" charset="0"/>
-                        <a:cs typeface="Calibri" charset="0"/>
-                      </a:endParaRPr>
-                    </a:p>
-                  </a:txBody>
-                  <a:tcPr marL="63500" marR="63500" marT="25400" marB="25400" anchor="ctr">
-                    <a:lnL w="9525" cap="flat" cmpd="sng" algn="ctr">
-                      <a:solidFill>
-                        <a:srgbClr val="C9D1C9"/>
-                      </a:solidFill>
-                      <a:prstDash val="solid"/>
-                      <a:round/>
-                      <a:headEnd type="none" w="med" len="med"/>
-                      <a:tailEnd type="none" w="med" len="med"/>
-                    </a:lnL>
-                    <a:lnR w="9525" cap="flat" cmpd="sng" algn="ctr">
-                      <a:solidFill>
-                        <a:srgbClr val="C9D1C9"/>
-                      </a:solidFill>
-                      <a:prstDash val="solid"/>
-                      <a:round/>
-                      <a:headEnd type="none" w="med" len="med"/>
-                      <a:tailEnd type="none" w="med" len="med"/>
-                    </a:lnR>
-                    <a:lnT w="9525" cap="flat" cmpd="sng" algn="ctr">
-                      <a:solidFill>
-                        <a:srgbClr val="C9D1C9"/>
-                      </a:solidFill>
-                      <a:prstDash val="solid"/>
-                      <a:round/>
-                      <a:headEnd type="none" w="med" len="med"/>
-                      <a:tailEnd type="none" w="med" len="med"/>
-                    </a:lnT>
-                    <a:lnB w="9525" cap="flat" cmpd="sng" algn="ctr">
-                      <a:solidFill>
-                        <a:srgbClr val="C9D1C9"/>
-                      </a:solidFill>
-                      <a:prstDash val="solid"/>
-                      <a:round/>
-                      <a:headEnd type="none" w="med" len="med"/>
-                      <a:tailEnd type="none" w="med" len="med"/>
-                    </a:lnB>
-                  </a:tcPr>
-                </a:tc>
-                <a:tc>
-                  <a:txBody>
-                    <a:bodyPr/>
-                    <a:lstStyle/>
-                    <a:p>
-                      <a:pPr indent="0" marL="0">
-                        <a:buNone/>
-                      </a:pPr>
-                      <a:r>
-                        <a:rPr lang="en-US" sz="850" dirty="0">
-                          <a:solidFill>
-                            <a:srgbClr val="1F2A1F"/>
-                          </a:solidFill>
-                          <a:latin typeface="Calibri" pitchFamily="34" charset="0"/>
-                          <a:ea typeface="Calibri" pitchFamily="34" charset="-122"/>
-                          <a:cs typeface="Calibri" pitchFamily="34" charset="-120"/>
-                        </a:rPr>
-                        <a:t>–</a:t>
-                      </a:r>
-                      <a:endParaRPr lang="en-US" sz="850" dirty="0">
-                        <a:latin typeface="Calibri" charset="0"/>
-                        <a:ea typeface="Calibri" charset="0"/>
-                        <a:cs typeface="Calibri" charset="0"/>
-                      </a:endParaRPr>
-                    </a:p>
-                  </a:txBody>
-                  <a:tcPr marL="63500" marR="63500" marT="25400" marB="25400" anchor="ctr">
-                    <a:lnL w="9525" cap="flat" cmpd="sng" algn="ctr">
-                      <a:solidFill>
-                        <a:srgbClr val="C9D1C9"/>
-                      </a:solidFill>
-                      <a:prstDash val="solid"/>
-                      <a:round/>
-                      <a:headEnd type="none" w="med" len="med"/>
-                      <a:tailEnd type="none" w="med" len="med"/>
-                    </a:lnL>
-                    <a:lnR w="9525" cap="flat" cmpd="sng" algn="ctr">
-                      <a:solidFill>
-                        <a:srgbClr val="C9D1C9"/>
-                      </a:solidFill>
-                      <a:prstDash val="solid"/>
-                      <a:round/>
-                      <a:headEnd type="none" w="med" len="med"/>
-                      <a:tailEnd type="none" w="med" len="med"/>
-                    </a:lnR>
-                    <a:lnT w="9525" cap="flat" cmpd="sng" algn="ctr">
-                      <a:solidFill>
-                        <a:srgbClr val="C9D1C9"/>
-                      </a:solidFill>
-                      <a:prstDash val="solid"/>
-                      <a:round/>
-                      <a:headEnd type="none" w="med" len="med"/>
-                      <a:tailEnd type="none" w="med" len="med"/>
-                    </a:lnT>
-                    <a:lnB w="9525" cap="flat" cmpd="sng" algn="ctr">
-                      <a:solidFill>
-                        <a:srgbClr val="C9D1C9"/>
-                      </a:solidFill>
-                      <a:prstDash val="solid"/>
-                      <a:round/>
-                      <a:headEnd type="none" w="med" len="med"/>
-                      <a:tailEnd type="none" w="med" len="med"/>
-                    </a:lnB>
-                  </a:tcPr>
-                </a:tc>
-              </a:tr>
-            </a:tbl>
-          </a:graphicData>
-        </a:graphic>
-      </p:graphicFrame>
-      <p:sp>
-        <p:nvSpPr>
-          <p:cNvPr id="9" name="Shape 6"/>
-          <p:cNvSpPr/>
-          <p:nvPr/>
-        </p:nvSpPr>
-        <p:spPr>
-          <a:xfrm>
-            <a:off x="4754880" y="987552"/>
-            <a:ext cx="3977640" cy="3694176"/>
-          </a:xfrm>
-          <a:prstGeom prst="roundRect">
-            <a:avLst>
-              <a:gd name="adj" fmla="val 1980"/>
-            </a:avLst>
-          </a:prstGeom>
-          <a:solidFill>
-            <a:srgbClr val="FFF7E0"/>
-          </a:solidFill>
-          <a:ln w="12700">
-            <a:solidFill>
-              <a:srgbClr val="C9A227"/>
-            </a:solidFill>
-            <a:prstDash val="solid"/>
-          </a:ln>
-        </p:spPr>
-      </p:sp>
-      <p:sp>
-        <p:nvSpPr>
-          <p:cNvPr id="10" name="Text 7"/>
-          <p:cNvSpPr txBox="1"/>
-          <p:nvPr/>
-        </p:nvSpPr>
-        <p:spPr>
-          <a:xfrm>
-            <a:off x="4892040" y="1051560"/>
-            <a:ext cx="3703320" cy="274320"/>
-          </a:xfrm>
-          <a:prstGeom prst="rect">
-            <a:avLst/>
-          </a:prstGeom>
-          <a:noFill/>
-          <a:ln/>
-        </p:spPr>
-        <p:txBody>
-          <a:bodyPr wrap="square" lIns="0" tIns="0" rIns="0" bIns="0" rtlCol="0" anchor="ctr"/>
-          <a:lstStyle/>
-          <a:p>
-            <a:pPr indent="0" marL="0">
-              <a:buNone/>
-            </a:pPr>
-            <a:r>
-              <a:rPr lang="en-US" sz="1150" b="1" dirty="0">
-                <a:solidFill>
-                  <a:srgbClr val="7A5C00"/>
-                </a:solidFill>
-                <a:latin typeface="Calibri" pitchFamily="34" charset="0"/>
-                <a:ea typeface="Calibri" pitchFamily="34" charset="-122"/>
-                <a:cs typeface="Calibri" pitchFamily="34" charset="-120"/>
-              </a:rPr>
-              <a:t>Zu validierende Annahmen</a:t>
-            </a:r>
-            <a:endParaRPr lang="en-US" sz="1150" dirty="0"/>
-          </a:p>
-        </p:txBody>
-      </p:sp>
-      <p:sp>
-        <p:nvSpPr>
-          <p:cNvPr id="11" name="Text 8"/>
-          <p:cNvSpPr txBox="1"/>
-          <p:nvPr/>
-        </p:nvSpPr>
-        <p:spPr>
-          <a:xfrm>
-            <a:off x="4910328" y="1389888"/>
-            <a:ext cx="3657600" cy="3200400"/>
-          </a:xfrm>
-          <a:prstGeom prst="rect">
-            <a:avLst/>
-          </a:prstGeom>
-          <a:noFill/>
-          <a:ln/>
-        </p:spPr>
-        <p:txBody>
-          <a:bodyPr wrap="square" lIns="0" tIns="0" rIns="0" bIns="0" rtlCol="0" anchor="t"/>
-          <a:lstStyle/>
-          <a:p>
-            <a:pPr marL="139700" indent="-139700">
-              <a:spcAft>
-                <a:spcPts val="600"/>
-              </a:spcAft>
-              <a:buSzPct val="100000"/>
-              <a:buChar char="•"/>
-            </a:pPr>
-            <a:r>
-              <a:rPr lang="en-US" sz="950" dirty="0">
-                <a:solidFill>
-                  <a:srgbClr val="1F2A1F"/>
-                </a:solidFill>
-                <a:latin typeface="Calibri" pitchFamily="34" charset="0"/>
-                <a:ea typeface="Calibri" pitchFamily="34" charset="-122"/>
-                <a:cs typeface="Calibri" pitchFamily="34" charset="-120"/>
-              </a:rPr>
-              <a:t>Zeitpunkt der Themenfreigabe: Story Mapping und Zulassungsantrag legen sie nach der Entscheidung des Prüfungsausschusses, das Aktivitätsdiagramm davor.</a:t>
-            </a:r>
-            <a:endParaRPr lang="en-US" sz="950" dirty="0"/>
-          </a:p>
-          <a:p>
-            <a:pPr marL="139700" indent="-139700">
-              <a:spcAft>
-                <a:spcPts val="600"/>
-              </a:spcAft>
-              <a:buSzPct val="100000"/>
-              <a:buChar char="•"/>
-            </a:pPr>
-            <a:r>
-              <a:rPr lang="en-US" sz="950" dirty="0">
-                <a:solidFill>
-                  <a:srgbClr val="1F2A1F"/>
-                </a:solidFill>
-                <a:latin typeface="Calibri" pitchFamily="34" charset="0"/>
-                <a:ea typeface="Calibri" pitchFamily="34" charset="-122"/>
-                <a:cs typeface="Calibri" pitchFamily="34" charset="-120"/>
-              </a:rPr>
-              <a:t>C6: Nach der Themenfreigabe folgt das Festlegen der Bearbeitungszeit.</a:t>
-            </a:r>
-            <a:endParaRPr lang="en-US" sz="950" dirty="0"/>
-          </a:p>
-          <a:p>
-            <a:pPr marL="139700" indent="-139700">
-              <a:spcAft>
-                <a:spcPts val="600"/>
-              </a:spcAft>
-              <a:buSzPct val="100000"/>
-              <a:buChar char="•"/>
-            </a:pPr>
-            <a:r>
-              <a:rPr lang="en-US" sz="950" dirty="0">
-                <a:solidFill>
-                  <a:srgbClr val="1F2A1F"/>
-                </a:solidFill>
-                <a:latin typeface="Calibri" pitchFamily="34" charset="0"/>
-                <a:ea typeface="Calibri" pitchFamily="34" charset="-122"/>
-                <a:cs typeface="Calibri" pitchFamily="34" charset="-120"/>
-              </a:rPr>
-              <a:t>Wertebereich des Antragsstatus und Multiplizität Studierende:r zu Antrag.</a:t>
-            </a:r>
-            <a:endParaRPr lang="en-US" sz="950" dirty="0"/>
-          </a:p>
-          <a:p>
-            <a:pPr marL="139700" indent="-139700">
-              <a:spcAft>
-                <a:spcPts val="600"/>
-              </a:spcAft>
-              <a:buSzPct val="100000"/>
-              <a:buChar char="•"/>
-            </a:pPr>
-            <a:r>
-              <a:rPr lang="en-US" sz="950" dirty="0">
-                <a:solidFill>
-                  <a:srgbClr val="1F2A1F"/>
-                </a:solidFill>
-                <a:latin typeface="Calibri" pitchFamily="34" charset="0"/>
-                <a:ea typeface="Calibri" pitchFamily="34" charset="-122"/>
-                <a:cs typeface="Calibri" pitchFamily="34" charset="-120"/>
-              </a:rPr>
-              <a:t>Weg der Benachrichtigung der Erstprüfer:in.</a:t>
-            </a:r>
-            <a:endParaRPr lang="en-US" sz="950" dirty="0"/>
-          </a:p>
-          <a:p>
-            <a:pPr marL="139700" indent="-139700">
-              <a:spcAft>
-                <a:spcPts val="600"/>
-              </a:spcAft>
-              <a:buSzPct val="100000"/>
-              <a:buChar char="•"/>
-            </a:pPr>
-            <a:r>
-              <a:rPr lang="en-US" sz="950" dirty="0">
-                <a:solidFill>
-                  <a:srgbClr val="1F2A1F"/>
-                </a:solidFill>
-                <a:latin typeface="Calibri" pitchFamily="34" charset="0"/>
-                <a:ea typeface="Calibri" pitchFamily="34" charset="-122"/>
-                <a:cs typeface="Calibri" pitchFamily="34" charset="-120"/>
-              </a:rPr>
-              <a:t>Persona B ist fiktiv, Zielwerte der Qualitätsanforderungen fehlen.</a:t>
-            </a:r>
-            <a:endParaRPr lang="en-US" sz="950" dirty="0"/>
-          </a:p>
-        </p:txBody>
-      </p:sp>
-      <p:sp>
-        <p:nvSpPr>
-          <p:cNvPr id="12" name="Text 9"/>
-          <p:cNvSpPr txBox="1"/>
-          <p:nvPr/>
-        </p:nvSpPr>
-        <p:spPr>
-          <a:xfrm>
-            <a:off x="411480" y="3337560"/>
-            <a:ext cx="4160520" cy="457200"/>
-          </a:xfrm>
-          <a:prstGeom prst="rect">
-            <a:avLst/>
-          </a:prstGeom>
-          <a:noFill/>
-          <a:ln/>
-        </p:spPr>
-        <p:txBody>
-          <a:bodyPr wrap="square" lIns="0" tIns="0" rIns="0" bIns="0" rtlCol="0" anchor="t"/>
-          <a:lstStyle/>
-          <a:p>
-            <a:pPr indent="0" marL="0">
-              <a:buNone/>
-            </a:pPr>
-            <a:r>
-              <a:rPr lang="en-US" sz="900" i="1" dirty="0">
-                <a:solidFill>
-                  <a:srgbClr val="5C6B5C"/>
-                </a:solidFill>
-                <a:latin typeface="Calibri" pitchFamily="34" charset="0"/>
-                <a:ea typeface="Calibri" pitchFamily="34" charset="-122"/>
-                <a:cs typeface="Calibri" pitchFamily="34" charset="-120"/>
-              </a:rPr>
-              <a:t>Interface: wird durch das Projektteam ergänzt und anschließend auf dieselben Begriffe geprüft.</a:t>
             </a:r>
             <a:endParaRPr lang="en-US" sz="900" dirty="0"/>
           </a:p>
@@ -15637,4 +13059,319 @@
     </a:ext>
   </a:extLst>
 </a:theme>
+</file>
+
+<file path=ppt/theme/theme2.xml><?xml version="1.0" encoding="utf-8"?>
+<a:theme xmlns:a="http://schemas.openxmlformats.org/drawingml/2006/main" name="Office">
+  <a:themeElements>
+    <a:clrScheme name="Office">
+      <a:dk1>
+        <a:sysClr val="windowText" lastClr="000000"/>
+      </a:dk1>
+      <a:lt1>
+        <a:sysClr val="window" lastClr="FFFFFF"/>
+      </a:lt1>
+      <a:dk2>
+        <a:srgbClr val="0E2841"/>
+      </a:dk2>
+      <a:lt2>
+        <a:srgbClr val="E8E8E8"/>
+      </a:lt2>
+      <a:accent1>
+        <a:srgbClr val="156082"/>
+      </a:accent1>
+      <a:accent2>
+        <a:srgbClr val="E97132"/>
+      </a:accent2>
+      <a:accent3>
+        <a:srgbClr val="196B24"/>
+      </a:accent3>
+      <a:accent4>
+        <a:srgbClr val="0F9ED5"/>
+      </a:accent4>
+      <a:accent5>
+        <a:srgbClr val="A02B93"/>
+      </a:accent5>
+      <a:accent6>
+        <a:srgbClr val="4EA72E"/>
+      </a:accent6>
+      <a:hlink>
+        <a:srgbClr val="467886"/>
+      </a:hlink>
+      <a:folHlink>
+        <a:srgbClr val="96607D"/>
+      </a:folHlink>
+    </a:clrScheme>
+    <a:fontScheme name="Office">
+      <a:majorFont>
+        <a:latin typeface="Aptos Display" panose="02110004020202020204"/>
+        <a:ea typeface=""/>
+        <a:cs typeface=""/>
+        <a:font script="Jpan" typeface="游ゴシック Light"/>
+        <a:font script="Hang" typeface="맑은 고딕"/>
+        <a:font script="Hans" typeface="等线 Light"/>
+        <a:font script="Hant" typeface="新細明體"/>
+        <a:font script="Arab" typeface="Times New Roman"/>
+        <a:font script="Hebr" typeface="Times New Roman"/>
+        <a:font script="Thai" typeface="Angsana New"/>
+        <a:font script="Ethi" typeface="Nyala"/>
+        <a:font script="Beng" typeface="Vrinda"/>
+        <a:font script="Gujr" typeface="Shruti"/>
+        <a:font script="Khmr" typeface="MoolBoran"/>
+        <a:font script="Knda" typeface="Tunga"/>
+        <a:font script="Guru" typeface="Raavi"/>
+        <a:font script="Cans" typeface="Euphemia"/>
+        <a:font script="Cher" typeface="Plantagenet Cherokee"/>
+        <a:font script="Yiii" typeface="Microsoft Yi Baiti"/>
+        <a:font script="Tibt" typeface="Microsoft Himalaya"/>
+        <a:font script="Thaa" typeface="MV Boli"/>
+        <a:font script="Deva" typeface="Mangal"/>
+        <a:font script="Telu" typeface="Gautami"/>
+        <a:font script="Taml" typeface="Latha"/>
+        <a:font script="Syrc" typeface="Estrangelo Edessa"/>
+        <a:font script="Orya" typeface="Kalinga"/>
+        <a:font script="Mlym" typeface="Kartika"/>
+        <a:font script="Laoo" typeface="DokChampa"/>
+        <a:font script="Sinh" typeface="Iskoola Pota"/>
+        <a:font script="Mong" typeface="Mongolian Baiti"/>
+        <a:font script="Viet" typeface="Times New Roman"/>
+        <a:font script="Uigh" typeface="Microsoft Uighur"/>
+        <a:font script="Geor" typeface="Sylfaen"/>
+        <a:font script="Armn" typeface="Arial"/>
+        <a:font script="Bugi" typeface="Leelawadee UI"/>
+        <a:font script="Bopo" typeface="Microsoft JhengHei"/>
+        <a:font script="Java" typeface="Javanese Text"/>
+        <a:font script="Lisu" typeface="Segoe UI"/>
+        <a:font script="Mymr" typeface="Myanmar Text"/>
+        <a:font script="Nkoo" typeface="Ebrima"/>
+        <a:font script="Olck" typeface="Nirmala UI"/>
+        <a:font script="Osma" typeface="Ebrima"/>
+        <a:font script="Phag" typeface="Phagspa"/>
+        <a:font script="Syrn" typeface="Estrangelo Edessa"/>
+        <a:font script="Syrj" typeface="Estrangelo Edessa"/>
+        <a:font script="Syre" typeface="Estrangelo Edessa"/>
+        <a:font script="Sora" typeface="Nirmala UI"/>
+        <a:font script="Tale" typeface="Microsoft Tai Le"/>
+        <a:font script="Talu" typeface="Microsoft New Tai Lue"/>
+        <a:font script="Tfng" typeface="Ebrima"/>
+      </a:majorFont>
+      <a:minorFont>
+        <a:latin typeface="Aptos" panose="02110004020202020204"/>
+        <a:ea typeface=""/>
+        <a:cs typeface=""/>
+        <a:font script="Jpan" typeface="游ゴシック"/>
+        <a:font script="Hang" typeface="맑은 고딕"/>
+        <a:font script="Hans" typeface="等线"/>
+        <a:font script="Hant" typeface="新細明體"/>
+        <a:font script="Arab" typeface="Arial"/>
+        <a:font script="Hebr" typeface="Arial"/>
+        <a:font script="Thai" typeface="Cordia New"/>
+        <a:font script="Ethi" typeface="Nyala"/>
+        <a:font script="Beng" typeface="Vrinda"/>
+        <a:font script="Gujr" typeface="Shruti"/>
+        <a:font script="Khmr" typeface="DaunPenh"/>
+        <a:font script="Knda" typeface="Tunga"/>
+        <a:font script="Guru" typeface="Raavi"/>
+        <a:font script="Cans" typeface="Euphemia"/>
+        <a:font script="Cher" typeface="Plantagenet Cherokee"/>
+        <a:font script="Yiii" typeface="Microsoft Yi Baiti"/>
+        <a:font script="Tibt" typeface="Microsoft Himalaya"/>
+        <a:font script="Thaa" typeface="MV Boli"/>
+        <a:font script="Deva" typeface="Mangal"/>
+        <a:font script="Telu" typeface="Gautami"/>
+        <a:font script="Taml" typeface="Latha"/>
+        <a:font script="Syrc" typeface="Estrangelo Edessa"/>
+        <a:font script="Orya" typeface="Kalinga"/>
+        <a:font script="Mlym" typeface="Kartika"/>
+        <a:font script="Laoo" typeface="DokChampa"/>
+        <a:font script="Sinh" typeface="Iskoola Pota"/>
+        <a:font script="Mong" typeface="Mongolian Baiti"/>
+        <a:font script="Viet" typeface="Arial"/>
+        <a:font script="Uigh" typeface="Microsoft Uighur"/>
+        <a:font script="Geor" typeface="Sylfaen"/>
+        <a:font script="Armn" typeface="Arial"/>
+        <a:font script="Bugi" typeface="Leelawadee UI"/>
+        <a:font script="Bopo" typeface="Microsoft JhengHei"/>
+        <a:font script="Java" typeface="Javanese Text"/>
+        <a:font script="Lisu" typeface="Segoe UI"/>
+        <a:font script="Mymr" typeface="Myanmar Text"/>
+        <a:font script="Nkoo" typeface="Ebrima"/>
+        <a:font script="Olck" typeface="Nirmala UI"/>
+        <a:font script="Osma" typeface="Ebrima"/>
+        <a:font script="Phag" typeface="Phagspa"/>
+        <a:font script="Syrn" typeface="Estrangelo Edessa"/>
+        <a:font script="Syrj" typeface="Estrangelo Edessa"/>
+        <a:font script="Syre" typeface="Estrangelo Edessa"/>
+        <a:font script="Sora" typeface="Nirmala UI"/>
+        <a:font script="Tale" typeface="Microsoft Tai Le"/>
+        <a:font script="Talu" typeface="Microsoft New Tai Lue"/>
+        <a:font script="Tfng" typeface="Ebrima"/>
+      </a:minorFont>
+    </a:fontScheme>
+    <a:fmtScheme name="Office">
+      <a:fillStyleLst>
+        <a:solidFill>
+          <a:schemeClr val="phClr"/>
+        </a:solidFill>
+        <a:gradFill rotWithShape="1">
+          <a:gsLst>
+            <a:gs pos="0">
+              <a:schemeClr val="phClr">
+                <a:lumMod val="110000"/>
+                <a:satMod val="105000"/>
+                <a:tint val="67000"/>
+              </a:schemeClr>
+            </a:gs>
+            <a:gs pos="50000">
+              <a:schemeClr val="phClr">
+                <a:lumMod val="105000"/>
+                <a:satMod val="103000"/>
+                <a:tint val="73000"/>
+              </a:schemeClr>
+            </a:gs>
+            <a:gs pos="100000">
+              <a:schemeClr val="phClr">
+                <a:lumMod val="105000"/>
+                <a:satMod val="109000"/>
+                <a:tint val="81000"/>
+              </a:schemeClr>
+            </a:gs>
+          </a:gsLst>
+          <a:lin ang="5400000" scaled="0"/>
+        </a:gradFill>
+        <a:gradFill rotWithShape="1">
+          <a:gsLst>
+            <a:gs pos="0">
+              <a:schemeClr val="phClr">
+                <a:satMod val="103000"/>
+                <a:lumMod val="102000"/>
+                <a:tint val="94000"/>
+              </a:schemeClr>
+            </a:gs>
+            <a:gs pos="50000">
+              <a:schemeClr val="phClr">
+                <a:satMod val="110000"/>
+                <a:lumMod val="100000"/>
+                <a:shade val="100000"/>
+              </a:schemeClr>
+            </a:gs>
+            <a:gs pos="100000">
+              <a:schemeClr val="phClr">
+                <a:lumMod val="99000"/>
+                <a:satMod val="120000"/>
+                <a:shade val="78000"/>
+              </a:schemeClr>
+            </a:gs>
+          </a:gsLst>
+          <a:lin ang="5400000" scaled="0"/>
+        </a:gradFill>
+      </a:fillStyleLst>
+      <a:lnStyleLst>
+        <a:ln w="12700" cap="flat" cmpd="sng" algn="ctr">
+          <a:solidFill>
+            <a:schemeClr val="phClr"/>
+          </a:solidFill>
+          <a:prstDash val="solid"/>
+          <a:miter lim="800000"/>
+        </a:ln>
+        <a:ln w="19050" cap="flat" cmpd="sng" algn="ctr">
+          <a:solidFill>
+            <a:schemeClr val="phClr"/>
+          </a:solidFill>
+          <a:prstDash val="solid"/>
+          <a:miter lim="800000"/>
+        </a:ln>
+        <a:ln w="25400" cap="flat" cmpd="sng" algn="ctr">
+          <a:solidFill>
+            <a:schemeClr val="phClr"/>
+          </a:solidFill>
+          <a:prstDash val="solid"/>
+          <a:miter lim="800000"/>
+        </a:ln>
+      </a:lnStyleLst>
+      <a:effectStyleLst>
+        <a:effectStyle>
+          <a:effectLst/>
+        </a:effectStyle>
+        <a:effectStyle>
+          <a:effectLst/>
+        </a:effectStyle>
+        <a:effectStyle>
+          <a:effectLst>
+            <a:outerShdw blurRad="57150" dist="19050" dir="5400000" algn="ctr" rotWithShape="0">
+              <a:srgbClr val="000000">
+                <a:alpha val="63000"/>
+              </a:srgbClr>
+            </a:outerShdw>
+          </a:effectLst>
+        </a:effectStyle>
+      </a:effectStyleLst>
+      <a:bgFillStyleLst>
+        <a:solidFill>
+          <a:schemeClr val="phClr"/>
+        </a:solidFill>
+        <a:solidFill>
+          <a:schemeClr val="phClr">
+            <a:tint val="95000"/>
+            <a:satMod val="170000"/>
+          </a:schemeClr>
+        </a:solidFill>
+        <a:gradFill rotWithShape="1">
+          <a:gsLst>
+            <a:gs pos="0">
+              <a:schemeClr val="phClr">
+                <a:tint val="93000"/>
+                <a:satMod val="150000"/>
+                <a:shade val="98000"/>
+                <a:lumMod val="102000"/>
+              </a:schemeClr>
+            </a:gs>
+            <a:gs pos="50000">
+              <a:schemeClr val="phClr">
+                <a:tint val="98000"/>
+                <a:satMod val="130000"/>
+                <a:shade val="90000"/>
+                <a:lumMod val="103000"/>
+              </a:schemeClr>
+            </a:gs>
+            <a:gs pos="100000">
+              <a:schemeClr val="phClr">
+                <a:shade val="63000"/>
+                <a:satMod val="120000"/>
+              </a:schemeClr>
+            </a:gs>
+          </a:gsLst>
+          <a:lin ang="5400000" scaled="0"/>
+        </a:gradFill>
+      </a:bgFillStyleLst>
+    </a:fmtScheme>
+  </a:themeElements>
+  <a:objectDefaults>
+    <a:lnDef>
+      <a:spPr/>
+      <a:bodyPr/>
+      <a:lstStyle/>
+      <a:style>
+        <a:lnRef idx="2">
+          <a:schemeClr val="accent1"/>
+        </a:lnRef>
+        <a:fillRef idx="0">
+          <a:schemeClr val="accent1"/>
+        </a:fillRef>
+        <a:effectRef idx="1">
+          <a:schemeClr val="accent1"/>
+        </a:effectRef>
+        <a:fontRef idx="minor">
+          <a:schemeClr val="tx1"/>
+        </a:fontRef>
+      </a:style>
+    </a:lnDef>
+  </a:objectDefaults>
+  <a:extraClrSchemeLst/>
+  <a:extLst>
+    <a:ext uri="{05A4C25C-085E-4340-85A3-A5531E510DB2}">
+      <thm15:themeFamily xmlns:thm15="http://schemas.microsoft.com/office/thememl/2012/main" name="Office Theme" id="{2E142A2C-CD16-42D6-873A-C26D2A0506FA}" vid="{1BDDFF52-6CD6-40A5-AB3C-68EB2F1E4D0A}"/>
+    </a:ext>
+  </a:extLst>
+</a:theme>
 </file>
--- a/D2D User Story/7_Dimensions_Erstpruefer_Themenfreigabe.pptx
+++ b/D2D User Story/7_Dimensions_Erstpruefer_Themenfreigabe.pptx
@@ -551,7 +551,7 @@
           <a:p>
             <a:r>
               <a:rPr lang="en-US" dirty="0"/>
-              <a:t>BPMN-Ausschnitt nur für US 4.1.1. Start: Antrag vom Prüfungsausschuss angenommen (US 3.2.1); Erstprüfer:in wird informiert (US 3.2.3). Der Nein-Zweig stammt aus dem Aktivitätsdiagramm des Teams (1. Prüfer:in: Änderungswunsch oder Ablehnung eintragen, danach Rückfrage, Studierende:r passt den Antrag an) und aus dem Formularfeld Bestätigung der Vorschläge des Kandidaten: Nein (siehe Anlage). Die Vorlesung nutzt für Abläufe UML-Aktivitätsdiagramme; BPMN wurde auf Wunsch des Teams gewählt. Editierbare Quelle: quellen/Action_Themenfreigabe.bpmn.</a:t>
+              <a:t>BPMN-Ausschnitt nur für US 4.1.1. Start: Die oder der Studierende hat den Antrag mit Thema eingereicht; das Portal informiert die Erstprüfer:in. Erstprüfer:in ruft das Thema auf und prüft es. Ja-Zweig: Thema bestätigen und freigeben, das Portal speichert die Themenfreigabe und leitet den Antrag weiter (Regel C6). Nein-Zweig: Erstprüfer:in trägt einen Änderungswunsch ein, das Portal speichert ihn und informiert die Studierende:n. Systemschritte liegen in der Lane Portal, Endereignisse sind als Zustände benannt. Editierbare Quelle: quellen/Action_Themenfreigabe.bpmn.</a:t>
             </a:r>
           </a:p>
         </p:txBody>
@@ -4783,7 +4783,6 @@
         <a:solidFill>
           <a:srgbClr val="FFFFFF"/>
         </a:solidFill>
-        <a:effectLst/>
       </p:bgPr>
     </p:bg>
     <p:spTree>
@@ -4821,7 +4820,7 @@
           <a:bodyPr wrap="square" lIns="0" tIns="0" rIns="0" bIns="0" rtlCol="0" anchor="ctr"/>
           <a:lstStyle/>
           <a:p>
-            <a:pPr marL="0" indent="0">
+            <a:pPr indent="0" marL="0">
               <a:buNone/>
             </a:pPr>
             <a:r>
@@ -4860,11 +4859,11 @@
           <a:bodyPr wrap="square" lIns="0" tIns="0" rIns="0" bIns="0" rtlCol="0" anchor="ctr"/>
           <a:lstStyle/>
           <a:p>
-            <a:pPr marL="0" indent="0" algn="r">
-              <a:buNone/>
-            </a:pPr>
-            <a:r>
-              <a:rPr lang="en-US" sz="800" b="1" kern="0" spc="150" dirty="0">
+            <a:pPr algn="r" indent="0" marL="0">
+              <a:buNone/>
+            </a:pPr>
+            <a:r>
+              <a:rPr lang="en-US" sz="800" b="1" spc="150" kern="0" dirty="0">
                 <a:solidFill>
                   <a:srgbClr val="97BC62"/>
                 </a:solidFill>
@@ -4899,7 +4898,7 @@
           <a:bodyPr wrap="square" lIns="0" tIns="0" rIns="0" bIns="0" rtlCol="0" anchor="t"/>
           <a:lstStyle/>
           <a:p>
-            <a:pPr marL="0" indent="0">
+            <a:pPr indent="0" marL="0">
               <a:buNone/>
             </a:pPr>
             <a:r>
@@ -4938,7 +4937,7 @@
           <a:bodyPr wrap="square" lIns="0" tIns="0" rIns="0" bIns="0" rtlCol="0" anchor="t"/>
           <a:lstStyle/>
           <a:p>
-            <a:pPr marL="0" indent="0">
+            <a:pPr indent="0" marL="0">
               <a:buNone/>
             </a:pPr>
             <a:r>
@@ -4977,7 +4976,7 @@
           <a:bodyPr wrap="square" lIns="0" tIns="0" rIns="0" bIns="0" rtlCol="0" anchor="t"/>
           <a:lstStyle/>
           <a:p>
-            <a:pPr marL="0" indent="0" algn="r">
+            <a:pPr algn="r" indent="0" marL="0">
               <a:buNone/>
             </a:pPr>
             <a:r>
@@ -5004,7 +5003,7 @@
         <p:spPr>
           <a:xfrm>
             <a:off x="411480" y="987552"/>
-            <a:ext cx="8321040" cy="3108960"/>
+            <a:ext cx="8321040" cy="3154680"/>
           </a:xfrm>
           <a:prstGeom prst="rect">
             <a:avLst/>
@@ -5029,7 +5028,7 @@
         <p:spPr>
           <a:xfrm>
             <a:off x="411480" y="987552"/>
-            <a:ext cx="274320" cy="3108960"/>
+            <a:ext cx="274320" cy="3154680"/>
           </a:xfrm>
           <a:prstGeom prst="rect">
             <a:avLst/>
@@ -5079,7 +5078,7 @@
         <p:spPr>
           <a:xfrm>
             <a:off x="685800" y="2770632"/>
-            <a:ext cx="274320" cy="1325880"/>
+            <a:ext cx="274320" cy="1371600"/>
           </a:xfrm>
           <a:prstGeom prst="rect">
             <a:avLst/>
@@ -5126,8 +5125,8 @@
         </p:nvSpPr>
         <p:spPr>
           <a:xfrm rot="16200000">
-            <a:off x="-1005840" y="2404872"/>
-            <a:ext cx="3108960" cy="274320"/>
+            <a:off x="-1028700" y="2427732"/>
+            <a:ext cx="3154680" cy="274320"/>
           </a:xfrm>
           <a:prstGeom prst="rect">
             <a:avLst/>
@@ -5139,7 +5138,7 @@
           <a:bodyPr wrap="square" lIns="0" tIns="0" rIns="0" bIns="0" rtlCol="0" anchor="ctr"/>
           <a:lstStyle/>
           <a:p>
-            <a:pPr marL="0" indent="0" algn="ctr">
+            <a:pPr algn="ctr" indent="0" marL="0">
               <a:buNone/>
             </a:pPr>
             <a:r>
@@ -5178,7 +5177,7 @@
           <a:bodyPr wrap="square" lIns="0" tIns="0" rIns="0" bIns="0" rtlCol="0" anchor="ctr"/>
           <a:lstStyle/>
           <a:p>
-            <a:pPr marL="0" indent="0" algn="ctr">
+            <a:pPr algn="ctr" indent="0" marL="0">
               <a:buNone/>
             </a:pPr>
             <a:r>
@@ -5204,8 +5203,8 @@
         </p:nvSpPr>
         <p:spPr>
           <a:xfrm rot="16200000">
-            <a:off x="160020" y="3296412"/>
-            <a:ext cx="1325880" cy="274320"/>
+            <a:off x="137160" y="3319272"/>
+            <a:ext cx="1371600" cy="274320"/>
           </a:xfrm>
           <a:prstGeom prst="rect">
             <a:avLst/>
@@ -5217,7 +5216,7 @@
           <a:bodyPr wrap="square" lIns="0" tIns="0" rIns="0" bIns="0" rtlCol="0" anchor="ctr"/>
           <a:lstStyle/>
           <a:p>
-            <a:pPr marL="0" indent="0" algn="ctr">
+            <a:pPr algn="ctr" indent="0" marL="0">
               <a:buNone/>
             </a:pPr>
             <a:r>
@@ -5243,7 +5242,7 @@
         </p:nvSpPr>
         <p:spPr>
           <a:xfrm>
-            <a:off x="1188720" y="3209544"/>
+            <a:off x="1115568" y="3145536"/>
             <a:ext cx="256032" cy="256032"/>
           </a:xfrm>
           <a:prstGeom prst="ellipse">
@@ -5268,8 +5267,8 @@
         </p:nvSpPr>
         <p:spPr>
           <a:xfrm>
-            <a:off x="1078992" y="3520440"/>
-            <a:ext cx="868680" cy="411480"/>
+            <a:off x="1024128" y="3657600"/>
+            <a:ext cx="1097280" cy="329184"/>
           </a:xfrm>
           <a:prstGeom prst="rect">
             <a:avLst/>
@@ -5281,24 +5280,19 @@
           <a:bodyPr wrap="square" lIns="0" tIns="0" rIns="0" bIns="0" rtlCol="0" anchor="t"/>
           <a:lstStyle/>
           <a:p>
-            <a:pPr marL="0" indent="0" algn="l">
-              <a:buNone/>
-            </a:pPr>
-            <a:r>
-              <a:rPr lang="en-US" sz="700" dirty="0"/>
-              <a:t>Student </a:t>
-            </a:r>
-            <a:r>
-              <a:rPr lang="en-US" sz="700" dirty="0" err="1"/>
-              <a:t>schickt</a:t>
-            </a:r>
-            <a:r>
-              <a:rPr lang="en-US" sz="700" dirty="0"/>
-              <a:t> thema an </a:t>
-            </a:r>
-            <a:r>
-              <a:rPr lang="en-US" sz="700" dirty="0" err="1"/>
-              <a:t>Prüfer</a:t>
+            <a:pPr algn="l" indent="0" marL="0">
+              <a:buNone/>
+            </a:pPr>
+            <a:r>
+              <a:rPr lang="en-US" sz="700" dirty="0">
+                <a:solidFill>
+                  <a:srgbClr val="5C6B5C"/>
+                </a:solidFill>
+                <a:latin typeface="Calibri" pitchFamily="34" charset="0"/>
+                <a:ea typeface="Calibri" pitchFamily="34" charset="-122"/>
+                <a:cs typeface="Calibri" pitchFamily="34" charset="-120"/>
+              </a:rPr>
+              <a:t>Thema von Studierende:r eingereicht</a:t>
             </a:r>
             <a:endParaRPr lang="en-US" sz="700" dirty="0"/>
           </a:p>
@@ -5312,8 +5306,8 @@
         </p:nvSpPr>
         <p:spPr>
           <a:xfrm>
-            <a:off x="1444752" y="3337560"/>
-            <a:ext cx="521208" cy="914"/>
+            <a:off x="1371600" y="3273552"/>
+            <a:ext cx="228600" cy="914"/>
           </a:xfrm>
           <a:prstGeom prst="line">
             <a:avLst/>
@@ -5336,7 +5330,7 @@
         </p:nvSpPr>
         <p:spPr>
           <a:xfrm>
-            <a:off x="1965960" y="3099816"/>
+            <a:off x="1600200" y="3035808"/>
             <a:ext cx="1188720" cy="475488"/>
           </a:xfrm>
           <a:prstGeom prst="roundRect">
@@ -5363,7 +5357,7 @@
         </p:nvSpPr>
         <p:spPr>
           <a:xfrm>
-            <a:off x="2011680" y="3099816"/>
+            <a:off x="1645920" y="3035808"/>
             <a:ext cx="1097280" cy="475488"/>
           </a:xfrm>
           <a:prstGeom prst="rect">
@@ -5376,7 +5370,7 @@
           <a:bodyPr wrap="square" lIns="0" tIns="0" rIns="0" bIns="0" rtlCol="0" anchor="ctr"/>
           <a:lstStyle/>
           <a:p>
-            <a:pPr marL="0" indent="0" algn="ctr">
+            <a:pPr algn="ctr" indent="0" marL="0">
               <a:buNone/>
             </a:pPr>
             <a:r>
@@ -5402,8 +5396,8 @@
         </p:nvSpPr>
         <p:spPr>
           <a:xfrm>
-            <a:off x="2560320" y="2414016"/>
-            <a:ext cx="914" cy="685800"/>
+            <a:off x="2194560" y="2414016"/>
+            <a:ext cx="914" cy="621792"/>
           </a:xfrm>
           <a:prstGeom prst="line">
             <a:avLst/>
@@ -5426,7 +5420,7 @@
         </p:nvSpPr>
         <p:spPr>
           <a:xfrm>
-            <a:off x="1965960" y="1938528"/>
+            <a:off x="1600200" y="1938528"/>
             <a:ext cx="1188720" cy="475488"/>
           </a:xfrm>
           <a:prstGeom prst="roundRect">
@@ -5453,7 +5447,7 @@
         </p:nvSpPr>
         <p:spPr>
           <a:xfrm>
-            <a:off x="2011680" y="1938528"/>
+            <a:off x="1645920" y="1938528"/>
             <a:ext cx="1097280" cy="475488"/>
           </a:xfrm>
           <a:prstGeom prst="rect">
@@ -5466,7 +5460,7 @@
           <a:bodyPr wrap="square" lIns="0" tIns="0" rIns="0" bIns="0" rtlCol="0" anchor="ctr"/>
           <a:lstStyle/>
           <a:p>
-            <a:pPr marL="0" indent="0" algn="ctr">
+            <a:pPr algn="ctr" indent="0" marL="0">
               <a:buNone/>
             </a:pPr>
             <a:r>
@@ -5492,8 +5486,8 @@
         </p:nvSpPr>
         <p:spPr>
           <a:xfrm>
-            <a:off x="3154680" y="2176272"/>
-            <a:ext cx="274320" cy="914"/>
+            <a:off x="2788920" y="2176272"/>
+            <a:ext cx="228600" cy="914"/>
           </a:xfrm>
           <a:prstGeom prst="line">
             <a:avLst/>
@@ -5516,7 +5510,7 @@
         </p:nvSpPr>
         <p:spPr>
           <a:xfrm>
-            <a:off x="3429000" y="1938528"/>
+            <a:off x="3017520" y="1938528"/>
             <a:ext cx="1188720" cy="475488"/>
           </a:xfrm>
           <a:prstGeom prst="roundRect">
@@ -5543,7 +5537,7 @@
         </p:nvSpPr>
         <p:spPr>
           <a:xfrm>
-            <a:off x="3474720" y="1938528"/>
+            <a:off x="3063240" y="1938528"/>
             <a:ext cx="1097280" cy="475488"/>
           </a:xfrm>
           <a:prstGeom prst="rect">
@@ -5556,7 +5550,7 @@
           <a:bodyPr wrap="square" lIns="0" tIns="0" rIns="0" bIns="0" rtlCol="0" anchor="ctr"/>
           <a:lstStyle/>
           <a:p>
-            <a:pPr marL="0" indent="0" algn="ctr">
+            <a:pPr algn="ctr" indent="0" marL="0">
               <a:buNone/>
             </a:pPr>
             <a:r>
@@ -5582,8 +5576,8 @@
         </p:nvSpPr>
         <p:spPr>
           <a:xfrm>
-            <a:off x="4617720" y="2176272"/>
-            <a:ext cx="118872" cy="914"/>
+            <a:off x="4206240" y="2176272"/>
+            <a:ext cx="146304" cy="914"/>
           </a:xfrm>
           <a:prstGeom prst="line">
             <a:avLst/>
@@ -5606,7 +5600,7 @@
         </p:nvSpPr>
         <p:spPr>
           <a:xfrm>
-            <a:off x="4736592" y="1975104"/>
+            <a:off x="4352544" y="1975104"/>
             <a:ext cx="402336" cy="402336"/>
           </a:xfrm>
           <a:prstGeom prst="diamond">
@@ -5631,7 +5625,7 @@
         </p:nvSpPr>
         <p:spPr>
           <a:xfrm>
-            <a:off x="4736592" y="1975104"/>
+            <a:off x="4352544" y="1975104"/>
             <a:ext cx="402336" cy="402336"/>
           </a:xfrm>
           <a:prstGeom prst="rect">
@@ -5644,7 +5638,7 @@
           <a:bodyPr wrap="square" lIns="0" tIns="0" rIns="0" bIns="0" rtlCol="0" anchor="ctr"/>
           <a:lstStyle/>
           <a:p>
-            <a:pPr marL="0" indent="0" algn="ctr">
+            <a:pPr algn="ctr" indent="0" marL="0">
               <a:buNone/>
             </a:pPr>
             <a:r>
@@ -5670,7 +5664,7 @@
         </p:nvSpPr>
         <p:spPr>
           <a:xfrm>
-            <a:off x="4251960" y="2404872"/>
+            <a:off x="3867912" y="2404872"/>
             <a:ext cx="1371600" cy="182880"/>
           </a:xfrm>
           <a:prstGeom prst="rect">
@@ -5683,11 +5677,11 @@
           <a:bodyPr wrap="square" lIns="0" tIns="0" rIns="0" bIns="0" rtlCol="0" anchor="t"/>
           <a:lstStyle/>
           <a:p>
-            <a:pPr marL="0" indent="0" algn="ctr">
-              <a:buNone/>
-            </a:pPr>
-            <a:r>
-              <a:rPr lang="en-US" sz="750" i="1" dirty="0" err="1">
+            <a:pPr algn="ctr" indent="0" marL="0">
+              <a:buNone/>
+            </a:pPr>
+            <a:r>
+              <a:rPr lang="en-US" sz="750" i="1" dirty="0">
                 <a:solidFill>
                   <a:srgbClr val="5C6B5C"/>
                 </a:solidFill>
@@ -5695,18 +5689,7 @@
                 <a:ea typeface="Calibri" pitchFamily="34" charset="-122"/>
                 <a:cs typeface="Calibri" pitchFamily="34" charset="-120"/>
               </a:rPr>
-              <a:t>Passt</a:t>
-            </a:r>
-            <a:r>
-              <a:rPr lang="en-US" sz="750" i="1" dirty="0">
-                <a:solidFill>
-                  <a:srgbClr val="5C6B5C"/>
-                </a:solidFill>
-                <a:latin typeface="Calibri" pitchFamily="34" charset="0"/>
-                <a:ea typeface="Calibri" pitchFamily="34" charset="-122"/>
-                <a:cs typeface="Calibri" pitchFamily="34" charset="-120"/>
-              </a:rPr>
-              <a:t> das Thema?</a:t>
+              <a:t>Thema wie abgestimmt?</a:t>
             </a:r>
             <a:endParaRPr lang="en-US" sz="750" dirty="0"/>
           </a:p>
@@ -5720,8 +5703,8 @@
         </p:nvSpPr>
         <p:spPr>
           <a:xfrm>
-            <a:off x="5138928" y="2176272"/>
-            <a:ext cx="301752" cy="914"/>
+            <a:off x="4754880" y="2176272"/>
+            <a:ext cx="182880" cy="914"/>
           </a:xfrm>
           <a:prstGeom prst="line">
             <a:avLst/>
@@ -5744,8 +5727,8 @@
         </p:nvSpPr>
         <p:spPr>
           <a:xfrm>
-            <a:off x="5157216" y="1993392"/>
-            <a:ext cx="274320" cy="164592"/>
+            <a:off x="4736592" y="1993392"/>
+            <a:ext cx="182880" cy="164592"/>
           </a:xfrm>
           <a:prstGeom prst="rect">
             <a:avLst/>
@@ -5757,7 +5740,7 @@
           <a:bodyPr wrap="square" lIns="0" tIns="0" rIns="0" bIns="0" rtlCol="0" anchor="t"/>
           <a:lstStyle/>
           <a:p>
-            <a:pPr marL="0" indent="0">
+            <a:pPr indent="0" marL="0">
               <a:buNone/>
             </a:pPr>
             <a:r>
@@ -5783,7 +5766,7 @@
         </p:nvSpPr>
         <p:spPr>
           <a:xfrm>
-            <a:off x="5440680" y="1938528"/>
+            <a:off x="4937760" y="1938528"/>
             <a:ext cx="1188720" cy="475488"/>
           </a:xfrm>
           <a:prstGeom prst="roundRect">
@@ -5810,7 +5793,7 @@
         </p:nvSpPr>
         <p:spPr>
           <a:xfrm>
-            <a:off x="5486400" y="1938528"/>
+            <a:off x="4983480" y="1938528"/>
             <a:ext cx="1097280" cy="475488"/>
           </a:xfrm>
           <a:prstGeom prst="rect">
@@ -5823,7 +5806,7 @@
           <a:bodyPr wrap="square" lIns="0" tIns="0" rIns="0" bIns="0" rtlCol="0" anchor="ctr"/>
           <a:lstStyle/>
           <a:p>
-            <a:pPr marL="0" indent="0" algn="ctr">
+            <a:pPr algn="ctr" indent="0" marL="0">
               <a:buNone/>
             </a:pPr>
             <a:r>
@@ -5849,8 +5832,8 @@
         </p:nvSpPr>
         <p:spPr>
           <a:xfrm>
-            <a:off x="6035040" y="2414016"/>
-            <a:ext cx="914" cy="685800"/>
+            <a:off x="5532120" y="2414016"/>
+            <a:ext cx="914" cy="512064"/>
           </a:xfrm>
           <a:prstGeom prst="line">
             <a:avLst/>
@@ -5873,12 +5856,12 @@
         </p:nvSpPr>
         <p:spPr>
           <a:xfrm>
-            <a:off x="5440680" y="3099816"/>
-            <a:ext cx="1188720" cy="475488"/>
+            <a:off x="4937760" y="2926080"/>
+            <a:ext cx="1188720" cy="694944"/>
           </a:xfrm>
           <a:prstGeom prst="roundRect">
             <a:avLst>
-              <a:gd name="adj" fmla="val 19231"/>
+              <a:gd name="adj" fmla="val 13158"/>
             </a:avLst>
           </a:prstGeom>
           <a:solidFill>
@@ -5900,8 +5883,8 @@
         </p:nvSpPr>
         <p:spPr>
           <a:xfrm>
-            <a:off x="5486400" y="3099816"/>
-            <a:ext cx="1097280" cy="475488"/>
+            <a:off x="4983480" y="2926080"/>
+            <a:ext cx="1097280" cy="694944"/>
           </a:xfrm>
           <a:prstGeom prst="rect">
             <a:avLst/>
@@ -5913,7 +5896,7 @@
           <a:bodyPr wrap="square" lIns="0" tIns="0" rIns="0" bIns="0" rtlCol="0" anchor="ctr"/>
           <a:lstStyle/>
           <a:p>
-            <a:pPr marL="0" indent="0" algn="ctr">
+            <a:pPr algn="ctr" indent="0" marL="0">
               <a:buNone/>
             </a:pPr>
             <a:r>
@@ -5925,7 +5908,7 @@
                 <a:ea typeface="Calibri" pitchFamily="34" charset="-122"/>
                 <a:cs typeface="Calibri" pitchFamily="34" charset="-120"/>
               </a:rPr>
-              <a:t>Themenfreigabe speichern</a:t>
+              <a:t>Themenfreigabe speichern, Antrag weiterleiten</a:t>
             </a:r>
             <a:endParaRPr lang="en-US" sz="850" dirty="0"/>
           </a:p>
@@ -5939,8 +5922,8 @@
         </p:nvSpPr>
         <p:spPr>
           <a:xfrm>
-            <a:off x="6629400" y="3337560"/>
-            <a:ext cx="457200" cy="914"/>
+            <a:off x="6126480" y="3273552"/>
+            <a:ext cx="182880" cy="914"/>
           </a:xfrm>
           <a:prstGeom prst="line">
             <a:avLst/>
@@ -5963,7 +5946,7 @@
         </p:nvSpPr>
         <p:spPr>
           <a:xfrm>
-            <a:off x="7086600" y="3200400"/>
+            <a:off x="6309360" y="3136392"/>
             <a:ext cx="274320" cy="274320"/>
           </a:xfrm>
           <a:prstGeom prst="ellipse">
@@ -5988,8 +5971,8 @@
         </p:nvSpPr>
         <p:spPr>
           <a:xfrm>
-            <a:off x="7452360" y="3200400"/>
-            <a:ext cx="1234440" cy="274320"/>
+            <a:off x="5943600" y="3694176"/>
+            <a:ext cx="1005840" cy="182880"/>
           </a:xfrm>
           <a:prstGeom prst="rect">
             <a:avLst/>
@@ -6001,11 +5984,11 @@
           <a:bodyPr wrap="square" lIns="0" tIns="0" rIns="0" bIns="0" rtlCol="0" anchor="ctr"/>
           <a:lstStyle/>
           <a:p>
-            <a:pPr marL="0" indent="0">
-              <a:buNone/>
-            </a:pPr>
-            <a:r>
-              <a:rPr lang="en-US" sz="800" b="1" dirty="0">
+            <a:pPr algn="ctr" indent="0" marL="0">
+              <a:buNone/>
+            </a:pPr>
+            <a:r>
+              <a:rPr lang="en-US" sz="750" b="1" dirty="0">
                 <a:solidFill>
                   <a:srgbClr val="1F2A1F"/>
                 </a:solidFill>
@@ -6015,7 +5998,7 @@
               </a:rPr>
               <a:t>Thema freigegeben</a:t>
             </a:r>
-            <a:endParaRPr lang="en-US" sz="800" dirty="0"/>
+            <a:endParaRPr lang="en-US" sz="750" dirty="0"/>
           </a:p>
         </p:txBody>
       </p:sp>
@@ -6027,7 +6010,7 @@
         </p:nvSpPr>
         <p:spPr>
           <a:xfrm>
-            <a:off x="4937760" y="1444752"/>
+            <a:off x="4553712" y="1444752"/>
             <a:ext cx="914" cy="530352"/>
           </a:xfrm>
           <a:prstGeom prst="line">
@@ -6050,8 +6033,8 @@
         </p:nvSpPr>
         <p:spPr>
           <a:xfrm>
-            <a:off x="4937760" y="1444752"/>
-            <a:ext cx="502920" cy="914"/>
+            <a:off x="4553712" y="1444752"/>
+            <a:ext cx="2258568" cy="914"/>
           </a:xfrm>
           <a:prstGeom prst="line">
             <a:avLst/>
@@ -6074,7 +6057,7 @@
         </p:nvSpPr>
         <p:spPr>
           <a:xfrm>
-            <a:off x="4983480" y="1261872"/>
+            <a:off x="4599432" y="1261872"/>
             <a:ext cx="365760" cy="164592"/>
           </a:xfrm>
           <a:prstGeom prst="rect">
@@ -6087,7 +6070,7 @@
           <a:bodyPr wrap="square" lIns="0" tIns="0" rIns="0" bIns="0" rtlCol="0" anchor="t"/>
           <a:lstStyle/>
           <a:p>
-            <a:pPr marL="0" indent="0">
+            <a:pPr indent="0" marL="0">
               <a:buNone/>
             </a:pPr>
             <a:r>
@@ -6113,7 +6096,7 @@
         </p:nvSpPr>
         <p:spPr>
           <a:xfrm>
-            <a:off x="5440680" y="1207008"/>
+            <a:off x="6812280" y="1207008"/>
             <a:ext cx="1188720" cy="475488"/>
           </a:xfrm>
           <a:prstGeom prst="roundRect">
@@ -6140,7 +6123,7 @@
         </p:nvSpPr>
         <p:spPr>
           <a:xfrm>
-            <a:off x="5486400" y="1207008"/>
+            <a:off x="6858000" y="1207008"/>
             <a:ext cx="1097280" cy="475488"/>
           </a:xfrm>
           <a:prstGeom prst="rect">
@@ -6153,7 +6136,7 @@
           <a:bodyPr wrap="square" lIns="0" tIns="0" rIns="0" bIns="0" rtlCol="0" anchor="ctr"/>
           <a:lstStyle/>
           <a:p>
-            <a:pPr marL="0" indent="0" algn="ctr">
+            <a:pPr algn="ctr" indent="0" marL="0">
               <a:buNone/>
             </a:pPr>
             <a:r>
@@ -6179,8 +6162,8 @@
         </p:nvSpPr>
         <p:spPr>
           <a:xfrm>
-            <a:off x="6629400" y="1444752"/>
-            <a:ext cx="457200" cy="914"/>
+            <a:off x="7406640" y="1682496"/>
+            <a:ext cx="914" cy="1243584"/>
           </a:xfrm>
           <a:prstGeom prst="line">
             <a:avLst/>
@@ -6203,7 +6186,97 @@
         </p:nvSpPr>
         <p:spPr>
           <a:xfrm>
-            <a:off x="7086600" y="1307592"/>
+            <a:off x="6812280" y="2926080"/>
+            <a:ext cx="1188720" cy="694944"/>
+          </a:xfrm>
+          <a:prstGeom prst="roundRect">
+            <a:avLst>
+              <a:gd name="adj" fmla="val 13158"/>
+            </a:avLst>
+          </a:prstGeom>
+          <a:solidFill>
+            <a:srgbClr val="FFFFFF"/>
+          </a:solidFill>
+          <a:ln w="15875">
+            <a:solidFill>
+              <a:srgbClr val="1F2A1F"/>
+            </a:solidFill>
+            <a:prstDash val="solid"/>
+          </a:ln>
+        </p:spPr>
+      </p:sp>
+      <p:sp>
+        <p:nvSpPr>
+          <p:cNvPr id="47" name="Text 45"/>
+          <p:cNvSpPr txBox="1"/>
+          <p:nvPr/>
+        </p:nvSpPr>
+        <p:spPr>
+          <a:xfrm>
+            <a:off x="6858000" y="2926080"/>
+            <a:ext cx="1097280" cy="694944"/>
+          </a:xfrm>
+          <a:prstGeom prst="rect">
+            <a:avLst/>
+          </a:prstGeom>
+          <a:noFill/>
+          <a:ln/>
+        </p:spPr>
+        <p:txBody>
+          <a:bodyPr wrap="square" lIns="0" tIns="0" rIns="0" bIns="0" rtlCol="0" anchor="ctr"/>
+          <a:lstStyle/>
+          <a:p>
+            <a:pPr algn="ctr" indent="0" marL="0">
+              <a:buNone/>
+            </a:pPr>
+            <a:r>
+              <a:rPr lang="en-US" sz="850" dirty="0">
+                <a:solidFill>
+                  <a:srgbClr val="1F2A1F"/>
+                </a:solidFill>
+                <a:latin typeface="Calibri" pitchFamily="34" charset="0"/>
+                <a:ea typeface="Calibri" pitchFamily="34" charset="-122"/>
+                <a:cs typeface="Calibri" pitchFamily="34" charset="-120"/>
+              </a:rPr>
+              <a:t>Änderungswunsch speichern, Studierende:n informieren</a:t>
+            </a:r>
+            <a:endParaRPr lang="en-US" sz="850" dirty="0"/>
+          </a:p>
+        </p:txBody>
+      </p:sp>
+      <p:sp>
+        <p:nvSpPr>
+          <p:cNvPr id="48" name="Shape 46"/>
+          <p:cNvSpPr/>
+          <p:nvPr/>
+        </p:nvSpPr>
+        <p:spPr>
+          <a:xfrm>
+            <a:off x="8001000" y="3273552"/>
+            <a:ext cx="182880" cy="914"/>
+          </a:xfrm>
+          <a:prstGeom prst="line">
+            <a:avLst/>
+          </a:prstGeom>
+          <a:noFill/>
+          <a:ln w="15875">
+            <a:solidFill>
+              <a:srgbClr val="1F2A1F"/>
+            </a:solidFill>
+            <a:prstDash val="solid"/>
+            <a:tailEnd type="triangle"/>
+          </a:ln>
+        </p:spPr>
+      </p:sp>
+      <p:sp>
+        <p:nvSpPr>
+          <p:cNvPr id="49" name="Shape 47"/>
+          <p:cNvSpPr/>
+          <p:nvPr/>
+        </p:nvSpPr>
+        <p:spPr>
+          <a:xfrm>
+            <a:off x="8183880" y="3136392"/>
             <a:ext cx="274320" cy="274320"/>
           </a:xfrm>
           <a:prstGeom prst="ellipse">
@@ -6222,14 +6295,14 @@
       </p:sp>
       <p:sp>
         <p:nvSpPr>
-          <p:cNvPr id="47" name="Text 45"/>
-          <p:cNvSpPr txBox="1"/>
-          <p:nvPr/>
-        </p:nvSpPr>
-        <p:spPr>
-          <a:xfrm>
-            <a:off x="7452360" y="1261872"/>
-            <a:ext cx="1234440" cy="365760"/>
+          <p:cNvPr id="50" name="Text 48"/>
+          <p:cNvSpPr txBox="1"/>
+          <p:nvPr/>
+        </p:nvSpPr>
+        <p:spPr>
+          <a:xfrm>
+            <a:off x="7452360" y="3694176"/>
+            <a:ext cx="1051560" cy="182880"/>
           </a:xfrm>
           <a:prstGeom prst="rect">
             <a:avLst/>
@@ -6241,11 +6314,11 @@
           <a:bodyPr wrap="square" lIns="0" tIns="0" rIns="0" bIns="0" rtlCol="0" anchor="ctr"/>
           <a:lstStyle/>
           <a:p>
-            <a:pPr marL="0" indent="0">
-              <a:buNone/>
-            </a:pPr>
-            <a:r>
-              <a:rPr lang="en-US" sz="800" b="1" dirty="0">
+            <a:pPr algn="r" indent="0" marL="0">
+              <a:buNone/>
+            </a:pPr>
+            <a:r>
+              <a:rPr lang="en-US" sz="750" b="1" dirty="0">
                 <a:solidFill>
                   <a:srgbClr val="1F2A1F"/>
                 </a:solidFill>
@@ -6253,60 +6326,26 @@
                 <a:ea typeface="Calibri" pitchFamily="34" charset="-122"/>
                 <a:cs typeface="Calibri" pitchFamily="34" charset="-120"/>
               </a:rPr>
-              <a:t>Rückfrage an </a:t>
-            </a:r>
-            <a:r>
-              <a:rPr lang="en-US" sz="800" b="1" dirty="0" err="1">
-                <a:solidFill>
-                  <a:srgbClr val="1F2A1F"/>
-                </a:solidFill>
-                <a:latin typeface="Calibri" pitchFamily="34" charset="0"/>
-                <a:ea typeface="Calibri" pitchFamily="34" charset="-122"/>
-                <a:cs typeface="Calibri" pitchFamily="34" charset="-120"/>
-              </a:rPr>
-              <a:t>Studierende:n</a:t>
-            </a:r>
-            <a:endParaRPr lang="en-US" sz="800" b="1" dirty="0">
-              <a:solidFill>
-                <a:srgbClr val="1F2A1F"/>
-              </a:solidFill>
-              <a:latin typeface="Calibri" pitchFamily="34" charset="0"/>
-              <a:ea typeface="Calibri" pitchFamily="34" charset="-122"/>
-              <a:cs typeface="Calibri" pitchFamily="34" charset="-120"/>
-            </a:endParaRPr>
-          </a:p>
-          <a:p>
-            <a:pPr marL="0" indent="0">
-              <a:buNone/>
-            </a:pPr>
-            <a:r>
-              <a:rPr lang="en-US" sz="800" b="1" dirty="0" err="1">
-                <a:solidFill>
-                  <a:srgbClr val="1F2A1F"/>
-                </a:solidFill>
-                <a:latin typeface="Calibri" pitchFamily="34" charset="0"/>
-                <a:cs typeface="Calibri" pitchFamily="34" charset="-120"/>
-              </a:rPr>
-              <a:t>senden</a:t>
-            </a:r>
-            <a:endParaRPr lang="en-US" sz="800" dirty="0"/>
-          </a:p>
-        </p:txBody>
-      </p:sp>
-      <p:sp>
-        <p:nvSpPr>
-          <p:cNvPr id="48" name="Shape 46"/>
+              <a:t>Rückfrage gesendet</a:t>
+            </a:r>
+            <a:endParaRPr lang="en-US" sz="750" dirty="0"/>
+          </a:p>
+        </p:txBody>
+      </p:sp>
+      <p:sp>
+        <p:nvSpPr>
+          <p:cNvPr id="51" name="Shape 49"/>
           <p:cNvSpPr/>
           <p:nvPr/>
         </p:nvSpPr>
         <p:spPr>
           <a:xfrm>
-            <a:off x="411480" y="4224528"/>
-            <a:ext cx="8321040" cy="457200"/>
+            <a:off x="411480" y="4270248"/>
+            <a:ext cx="8321040" cy="420624"/>
           </a:xfrm>
           <a:prstGeom prst="roundRect">
             <a:avLst>
-              <a:gd name="adj" fmla="val 16000"/>
+              <a:gd name="adj" fmla="val 17391"/>
             </a:avLst>
           </a:prstGeom>
           <a:solidFill>
@@ -6322,14 +6361,14 @@
       </p:sp>
       <p:sp>
         <p:nvSpPr>
-          <p:cNvPr id="49" name="Text 47"/>
-          <p:cNvSpPr txBox="1"/>
-          <p:nvPr/>
-        </p:nvSpPr>
-        <p:spPr>
-          <a:xfrm>
-            <a:off x="521208" y="4224528"/>
-            <a:ext cx="8101584" cy="457200"/>
+          <p:cNvPr id="52" name="Text 50"/>
+          <p:cNvSpPr txBox="1"/>
+          <p:nvPr/>
+        </p:nvSpPr>
+        <p:spPr>
+          <a:xfrm>
+            <a:off x="521208" y="4270248"/>
+            <a:ext cx="8101584" cy="420624"/>
           </a:xfrm>
           <a:prstGeom prst="rect">
             <a:avLst/>
@@ -6341,7 +6380,7 @@
           <a:bodyPr wrap="square" lIns="0" tIns="0" rIns="0" bIns="0" rtlCol="0" anchor="ctr"/>
           <a:lstStyle/>
           <a:p>
-            <a:pPr marL="0" indent="0">
+            <a:pPr indent="0" marL="0">
               <a:buNone/>
             </a:pPr>
             <a:r>
@@ -6355,6 +6394,9 @@
               </a:rPr>
               <a:t>Ausschnitt: </a:t>
             </a:r>
+            <a:pPr indent="0" marL="0">
+              <a:buNone/>
+            </a:pPr>
             <a:r>
               <a:rPr lang="en-US" sz="850" dirty="0">
                 <a:solidFill>
@@ -6366,6 +6408,9 @@
               </a:rPr>
               <a:t>nur US 4.1.1.   </a:t>
             </a:r>
+            <a:pPr indent="0" marL="0">
+              <a:buNone/>
+            </a:pPr>
             <a:r>
               <a:rPr lang="en-US" sz="850" b="1" dirty="0">
                 <a:solidFill>
@@ -6377,6 +6422,9 @@
               </a:rPr>
               <a:t>Davor: </a:t>
             </a:r>
+            <a:pPr indent="0" marL="0">
+              <a:buNone/>
+            </a:pPr>
             <a:r>
               <a:rPr lang="en-US" sz="850" dirty="0">
                 <a:solidFill>
@@ -6386,8 +6434,11 @@
                 <a:ea typeface="Calibri" pitchFamily="34" charset="-122"/>
                 <a:cs typeface="Calibri" pitchFamily="34" charset="-120"/>
               </a:rPr>
-              <a:t>Entscheidung des Prüfungsausschusses (User Task 3.2).   </a:t>
-            </a:r>
+              <a:t>Studierende:r reicht den Antrag mit Thema ein (Activity 2).   </a:t>
+            </a:r>
+            <a:pPr indent="0" marL="0">
+              <a:buNone/>
+            </a:pPr>
             <a:r>
               <a:rPr lang="en-US" sz="850" b="1" dirty="0">
                 <a:solidFill>
@@ -6399,6 +6450,9 @@
               </a:rPr>
               <a:t>Danach: </a:t>
             </a:r>
+            <a:pPr indent="0" marL="0">
+              <a:buNone/>
+            </a:pPr>
             <a:r>
               <a:rPr lang="en-US" sz="850" dirty="0">
                 <a:solidFill>
